--- a/src/Template 2.1.pptx
+++ b/src/Template 2.1.pptx
@@ -23,8 +23,8 @@
     <p:sldId id="948" r:id="rId14"/>
     <p:sldId id="950" r:id="rId15"/>
     <p:sldId id="297" r:id="rId16"/>
-    <p:sldId id="941" r:id="rId17"/>
-    <p:sldId id="949" r:id="rId18"/>
+    <p:sldId id="966" r:id="rId17"/>
+    <p:sldId id="965" r:id="rId18"/>
   </p:sldIdLst>
   <p:sldSz cx="12192000" cy="6858000"/>
   <p:notesSz cx="6858000" cy="9144000"/>
@@ -338,7 +338,7 @@
 <file path=ppt/charts/chart1.xml><?xml version="1.0" encoding="utf-8"?>
 <c:chartSpace xmlns:c="http://schemas.openxmlformats.org/drawingml/2006/chart" xmlns:a="http://schemas.openxmlformats.org/drawingml/2006/main" xmlns:r="http://schemas.openxmlformats.org/officeDocument/2006/relationships" xmlns:c16r2="http://schemas.microsoft.com/office/drawing/2015/06/chart">
   <c:date1904 val="0"/>
-  <c:lang val="en-US"/>
+  <c:lang val="zh-CN"/>
   <c:roundedCorners val="0"/>
   <mc:AlternateContent xmlns:mc="http://schemas.openxmlformats.org/markup-compatibility/2006">
     <mc:Choice xmlns:c14="http://schemas.microsoft.com/office/drawing/2007/8/2/chart" Requires="c14">
@@ -673,359 +673,7 @@
 </c:chartSpace>
 </file>
 
-<file path=ppt/charts/chart2.xml><?xml version="1.0" encoding="utf-8"?>
-<c:chartSpace xmlns:c="http://schemas.openxmlformats.org/drawingml/2006/chart" xmlns:a="http://schemas.openxmlformats.org/drawingml/2006/main" xmlns:r="http://schemas.openxmlformats.org/officeDocument/2006/relationships" xmlns:c16r2="http://schemas.microsoft.com/office/drawing/2015/06/chart">
-  <c:date1904 val="0"/>
-  <c:lang val="en-US"/>
-  <c:roundedCorners val="0"/>
-  <mc:AlternateContent xmlns:mc="http://schemas.openxmlformats.org/markup-compatibility/2006">
-    <mc:Choice xmlns:c14="http://schemas.microsoft.com/office/drawing/2007/8/2/chart" Requires="c14">
-      <c14:style val="102"/>
-    </mc:Choice>
-    <mc:Fallback>
-      <c:style val="2"/>
-    </mc:Fallback>
-  </mc:AlternateContent>
-  <c:chart>
-    <c:autoTitleDeleted val="1"/>
-    <c:plotArea>
-      <c:layout/>
-      <c:barChart>
-        <c:barDir val="bar"/>
-        <c:grouping val="clustered"/>
-        <c:varyColors val="0"/>
-        <c:ser>
-          <c:idx val="0"/>
-          <c:order val="0"/>
-          <c:spPr>
-            <a:solidFill>
-              <a:schemeClr val="tx1"/>
-            </a:solidFill>
-            <a:ln>
-              <a:noFill/>
-            </a:ln>
-            <a:effectLst/>
-          </c:spPr>
-          <c:invertIfNegative val="0"/>
-          <c:dLbls>
-            <c:spPr>
-              <a:noFill/>
-              <a:ln>
-                <a:noFill/>
-              </a:ln>
-              <a:effectLst/>
-            </c:spPr>
-            <c:txPr>
-              <a:bodyPr rot="0" spcFirstLastPara="1" vertOverflow="ellipsis" horzOverflow="overflow" vert="horz" wrap="square" lIns="38100" tIns="19050" rIns="38100" bIns="19050" anchor="ctr" anchorCtr="1">
-                <a:spAutoFit/>
-              </a:bodyPr>
-              <a:lstStyle/>
-              <a:p>
-                <a:pPr>
-                  <a:defRPr lang="zh-CN" sz="900" b="1" i="0" u="none" strike="noStrike" kern="1200" baseline="0">
-                    <a:solidFill>
-                      <a:schemeClr val="tx1">
-                        <a:lumMod val="75000"/>
-                        <a:lumOff val="25000"/>
-                      </a:schemeClr>
-                    </a:solidFill>
-                    <a:latin typeface="微软雅黑" pitchFamily="34" charset="-122"/>
-                    <a:ea typeface="微软雅黑" pitchFamily="34" charset="-122"/>
-                    <a:cs typeface="+mn-cs"/>
-                  </a:defRPr>
-                </a:pPr>
-                <a:endParaRPr lang="zh-CN"/>
-              </a:p>
-            </c:txPr>
-            <c:dLblPos val="outEnd"/>
-            <c:showLegendKey val="0"/>
-            <c:showVal val="1"/>
-            <c:showCatName val="0"/>
-            <c:showSerName val="0"/>
-            <c:showPercent val="0"/>
-            <c:showBubbleSize val="0"/>
-            <c:showLeaderLines val="0"/>
-            <c:extLst>
-              <c:ext xmlns:c15="http://schemas.microsoft.com/office/drawing/2012/chart" uri="{CE6537A1-D6FC-4f65-9D91-7224C49458BB}">
-                <c15:showLeaderLines val="1"/>
-                <c15:leaderLines>
-                  <c:spPr>
-                    <a:ln w="9525" cap="flat" cmpd="sng" algn="ctr">
-                      <a:solidFill>
-                        <a:schemeClr val="tx1">
-                          <a:lumMod val="35000"/>
-                          <a:lumOff val="65000"/>
-                        </a:schemeClr>
-                      </a:solidFill>
-                      <a:round/>
-                    </a:ln>
-                    <a:effectLst/>
-                  </c:spPr>
-                </c15:leaderLines>
-              </c:ext>
-            </c:extLst>
-          </c:dLbls>
-          <c:cat>
-            <c:strRef>
-              <c:f>Sheet1!$B$22:$H$22</c:f>
-              <c:strCache>
-                <c:ptCount val="7"/>
-                <c:pt idx="0">
-                  <c:v>抓地性（Traction）</c:v>
-                </c:pt>
-                <c:pt idx="1">
-                  <c:v>耐久性（Durability）</c:v>
-                </c:pt>
-                <c:pt idx="2">
-                  <c:v>重量&amp;透气性（Weight&amp;Ventilation）</c:v>
-                </c:pt>
-                <c:pt idx="3">
-                  <c:v>缓震性（Cushioning）</c:v>
-                </c:pt>
-                <c:pt idx="4">
-                  <c:v>防侧翻性（Lateral Stability）</c:v>
-                </c:pt>
-                <c:pt idx="5">
-                  <c:v>抗扭转性（Torsional Support ）</c:v>
-                </c:pt>
-                <c:pt idx="6">
-                  <c:v>包裹性（Lockdwon）</c:v>
-                </c:pt>
-              </c:strCache>
-            </c:strRef>
-          </c:cat>
-          <c:val>
-            <c:numRef>
-              <c:f>Sheet1!$B$23:$H$23</c:f>
-              <c:numCache>
-                <c:formatCode>General</c:formatCode>
-                <c:ptCount val="7"/>
-                <c:pt idx="0">
-                  <c:v>8.6</c:v>
-                </c:pt>
-                <c:pt idx="1">
-                  <c:v>8.6</c:v>
-                </c:pt>
-                <c:pt idx="2">
-                  <c:v>8.4</c:v>
-                </c:pt>
-                <c:pt idx="3">
-                  <c:v>8.1999999999999993</c:v>
-                </c:pt>
-                <c:pt idx="4">
-                  <c:v>7</c:v>
-                </c:pt>
-                <c:pt idx="5">
-                  <c:v>6.6</c:v>
-                </c:pt>
-                <c:pt idx="6">
-                  <c:v>5.6</c:v>
-                </c:pt>
-              </c:numCache>
-            </c:numRef>
-          </c:val>
-          <c:extLst>
-            <c:ext xmlns:c16="http://schemas.microsoft.com/office/drawing/2014/chart" uri="{C3380CC4-5D6E-409C-BE32-E72D297353CC}">
-              <c16:uniqueId val="{00000000-1C27-4657-87D0-05A6EEB07D7E}"/>
-            </c:ext>
-          </c:extLst>
-        </c:ser>
-        <c:dLbls>
-          <c:showLegendKey val="0"/>
-          <c:showVal val="0"/>
-          <c:showCatName val="0"/>
-          <c:showSerName val="0"/>
-          <c:showPercent val="0"/>
-          <c:showBubbleSize val="0"/>
-        </c:dLbls>
-        <c:gapWidth val="182"/>
-        <c:axId val="205361536"/>
-        <c:axId val="205362096"/>
-      </c:barChart>
-      <c:catAx>
-        <c:axId val="205361536"/>
-        <c:scaling>
-          <c:orientation val="minMax"/>
-        </c:scaling>
-        <c:delete val="0"/>
-        <c:axPos val="l"/>
-        <c:numFmt formatCode="General" sourceLinked="1"/>
-        <c:majorTickMark val="none"/>
-        <c:minorTickMark val="none"/>
-        <c:tickLblPos val="nextTo"/>
-        <c:spPr>
-          <a:noFill/>
-          <a:ln w="9525" cap="flat" cmpd="sng" algn="ctr">
-            <a:solidFill>
-              <a:schemeClr val="tx1">
-                <a:lumMod val="15000"/>
-                <a:lumOff val="85000"/>
-              </a:schemeClr>
-            </a:solidFill>
-            <a:round/>
-          </a:ln>
-          <a:effectLst/>
-        </c:spPr>
-        <c:txPr>
-          <a:bodyPr rot="-60000000" spcFirstLastPara="1" vertOverflow="ellipsis" horzOverflow="overflow" vert="horz" wrap="square" anchor="ctr" anchorCtr="1"/>
-          <a:lstStyle/>
-          <a:p>
-            <a:pPr>
-              <a:defRPr lang="zh-CN" sz="900" b="0" i="0" u="none" strike="noStrike" kern="1200" baseline="0">
-                <a:solidFill>
-                  <a:schemeClr val="tx1">
-                    <a:lumMod val="65000"/>
-                    <a:lumOff val="35000"/>
-                  </a:schemeClr>
-                </a:solidFill>
-                <a:latin typeface="微软雅黑" pitchFamily="34" charset="-122"/>
-                <a:ea typeface="微软雅黑" pitchFamily="34" charset="-122"/>
-                <a:cs typeface="+mn-cs"/>
-              </a:defRPr>
-            </a:pPr>
-            <a:endParaRPr lang="zh-CN"/>
-          </a:p>
-        </c:txPr>
-        <c:crossAx val="205362096"/>
-        <c:crosses val="autoZero"/>
-        <c:auto val="1"/>
-        <c:lblAlgn val="ctr"/>
-        <c:lblOffset val="100"/>
-        <c:tickMarkSkip val="1"/>
-        <c:noMultiLvlLbl val="0"/>
-      </c:catAx>
-      <c:valAx>
-        <c:axId val="205362096"/>
-        <c:scaling>
-          <c:orientation val="minMax"/>
-        </c:scaling>
-        <c:delete val="0"/>
-        <c:axPos val="b"/>
-        <c:majorGridlines>
-          <c:spPr>
-            <a:ln w="9525" cap="flat" cmpd="sng" algn="ctr">
-              <a:solidFill>
-                <a:schemeClr val="tx1">
-                  <a:lumMod val="15000"/>
-                  <a:lumOff val="85000"/>
-                </a:schemeClr>
-              </a:solidFill>
-              <a:round/>
-            </a:ln>
-            <a:effectLst/>
-          </c:spPr>
-        </c:majorGridlines>
-        <c:numFmt formatCode="General" sourceLinked="1"/>
-        <c:majorTickMark val="none"/>
-        <c:minorTickMark val="none"/>
-        <c:tickLblPos val="nextTo"/>
-        <c:spPr>
-          <a:noFill/>
-          <a:ln>
-            <a:noFill/>
-          </a:ln>
-          <a:effectLst/>
-        </c:spPr>
-        <c:txPr>
-          <a:bodyPr rot="-60000000" spcFirstLastPara="1" vertOverflow="ellipsis" horzOverflow="overflow" vert="horz" wrap="square" anchor="ctr" anchorCtr="1"/>
-          <a:lstStyle/>
-          <a:p>
-            <a:pPr>
-              <a:defRPr lang="zh-CN" sz="900" b="0" i="0" u="none" strike="noStrike" kern="1200" baseline="0">
-                <a:solidFill>
-                  <a:schemeClr val="tx1">
-                    <a:lumMod val="65000"/>
-                    <a:lumOff val="35000"/>
-                  </a:schemeClr>
-                </a:solidFill>
-                <a:latin typeface="微软雅黑" pitchFamily="34" charset="-122"/>
-                <a:ea typeface="微软雅黑" pitchFamily="34" charset="-122"/>
-                <a:cs typeface="+mn-cs"/>
-              </a:defRPr>
-            </a:pPr>
-            <a:endParaRPr lang="zh-CN"/>
-          </a:p>
-        </c:txPr>
-        <c:crossAx val="205361536"/>
-        <c:crosses val="autoZero"/>
-        <c:crossBetween val="between"/>
-      </c:valAx>
-      <c:spPr>
-        <a:noFill/>
-        <a:ln>
-          <a:noFill/>
-        </a:ln>
-        <a:effectLst/>
-      </c:spPr>
-    </c:plotArea>
-    <c:plotVisOnly val="1"/>
-    <c:dispBlanksAs val="gap"/>
-    <c:showDLblsOverMax val="0"/>
-  </c:chart>
-  <c:spPr>
-    <a:noFill/>
-    <a:ln>
-      <a:noFill/>
-    </a:ln>
-    <a:effectLst/>
-  </c:spPr>
-  <c:txPr>
-    <a:bodyPr rot="0" spcFirstLastPara="0" vertOverflow="ellipsis" horzOverflow="overflow" vert="horz" wrap="square" anchor="ctr" anchorCtr="1"/>
-    <a:lstStyle/>
-    <a:p>
-      <a:pPr>
-        <a:defRPr lang="zh-CN"/>
-      </a:pPr>
-      <a:endParaRPr lang="zh-CN"/>
-    </a:p>
-  </c:txPr>
-  <c:externalData r:id="rId3">
-    <c:autoUpdate val="0"/>
-  </c:externalData>
-</c:chartSpace>
-</file>
-
 <file path=ppt/charts/colors1.xml><?xml version="1.0" encoding="utf-8"?>
-<cs:colorStyle xmlns:cs="http://schemas.microsoft.com/office/drawing/2012/chartStyle" xmlns:a="http://schemas.openxmlformats.org/drawingml/2006/main" meth="cycle" id="10">
-  <a:schemeClr val="accent1"/>
-  <a:schemeClr val="accent2"/>
-  <a:schemeClr val="accent3"/>
-  <a:schemeClr val="accent4"/>
-  <a:schemeClr val="accent5"/>
-  <a:schemeClr val="accent6"/>
-  <cs:variation/>
-  <cs:variation>
-    <a:lumMod val="60000"/>
-  </cs:variation>
-  <cs:variation>
-    <a:lumMod val="80000"/>
-    <a:lumOff val="20000"/>
-  </cs:variation>
-  <cs:variation>
-    <a:lumMod val="80000"/>
-  </cs:variation>
-  <cs:variation>
-    <a:lumMod val="60000"/>
-    <a:lumOff val="40000"/>
-  </cs:variation>
-  <cs:variation>
-    <a:lumMod val="50000"/>
-  </cs:variation>
-  <cs:variation>
-    <a:lumMod val="70000"/>
-    <a:lumOff val="30000"/>
-  </cs:variation>
-  <cs:variation>
-    <a:lumMod val="70000"/>
-  </cs:variation>
-  <cs:variation>
-    <a:lumMod val="50000"/>
-    <a:lumOff val="50000"/>
-  </cs:variation>
-</cs:colorStyle>
-</file>
-
-<file path=ppt/charts/colors2.xml><?xml version="1.0" encoding="utf-8"?>
 <cs:colorStyle xmlns:cs="http://schemas.microsoft.com/office/drawing/2012/chartStyle" xmlns:a="http://schemas.openxmlformats.org/drawingml/2006/main" meth="cycle" id="10">
   <a:schemeClr val="accent1"/>
   <a:schemeClr val="accent2"/>
@@ -1559,511 +1207,6 @@
 </cs:chartStyle>
 </file>
 
-<file path=ppt/charts/style2.xml><?xml version="1.0" encoding="utf-8"?>
-<cs:chartStyle xmlns:cs="http://schemas.microsoft.com/office/drawing/2012/chartStyle" xmlns:a="http://schemas.openxmlformats.org/drawingml/2006/main" id="216">
-  <cs:axisTitle>
-    <cs:lnRef idx="0"/>
-    <cs:fillRef idx="0"/>
-    <cs:effectRef idx="0"/>
-    <cs:fontRef idx="minor">
-      <a:schemeClr val="tx1">
-        <a:lumMod val="65000"/>
-        <a:lumOff val="35000"/>
-      </a:schemeClr>
-    </cs:fontRef>
-    <cs:defRPr sz="1000" kern="1200"/>
-  </cs:axisTitle>
-  <cs:categoryAxis>
-    <cs:lnRef idx="0"/>
-    <cs:fillRef idx="0"/>
-    <cs:effectRef idx="0"/>
-    <cs:fontRef idx="minor">
-      <a:schemeClr val="tx1">
-        <a:lumMod val="65000"/>
-        <a:lumOff val="35000"/>
-      </a:schemeClr>
-    </cs:fontRef>
-    <cs:spPr>
-      <a:ln w="9525" cap="flat" cmpd="sng" algn="ctr">
-        <a:solidFill>
-          <a:schemeClr val="tx1">
-            <a:lumMod val="15000"/>
-            <a:lumOff val="85000"/>
-          </a:schemeClr>
-        </a:solidFill>
-        <a:round/>
-      </a:ln>
-    </cs:spPr>
-    <cs:defRPr sz="900" kern="1200"/>
-  </cs:categoryAxis>
-  <cs:chartArea mods="allowNoFillOverride allowNoLineOverride">
-    <cs:lnRef idx="0"/>
-    <cs:fillRef idx="0"/>
-    <cs:effectRef idx="0"/>
-    <cs:fontRef idx="minor">
-      <a:schemeClr val="tx1"/>
-    </cs:fontRef>
-    <cs:spPr>
-      <a:solidFill>
-        <a:schemeClr val="bg1"/>
-      </a:solidFill>
-      <a:ln w="9525" cap="flat" cmpd="sng" algn="ctr">
-        <a:solidFill>
-          <a:schemeClr val="tx1">
-            <a:lumMod val="15000"/>
-            <a:lumOff val="85000"/>
-          </a:schemeClr>
-        </a:solidFill>
-        <a:round/>
-      </a:ln>
-    </cs:spPr>
-    <cs:defRPr sz="1000" kern="1200"/>
-  </cs:chartArea>
-  <cs:dataLabel>
-    <cs:lnRef idx="0"/>
-    <cs:fillRef idx="0"/>
-    <cs:effectRef idx="0"/>
-    <cs:fontRef idx="minor">
-      <a:schemeClr val="tx1">
-        <a:lumMod val="75000"/>
-        <a:lumOff val="25000"/>
-      </a:schemeClr>
-    </cs:fontRef>
-    <cs:defRPr sz="900" kern="1200"/>
-  </cs:dataLabel>
-  <cs:dataLabelCallout>
-    <cs:lnRef idx="0"/>
-    <cs:fillRef idx="0"/>
-    <cs:effectRef idx="0"/>
-    <cs:fontRef idx="minor">
-      <a:schemeClr val="dk1">
-        <a:lumMod val="65000"/>
-        <a:lumOff val="35000"/>
-      </a:schemeClr>
-    </cs:fontRef>
-    <cs:spPr>
-      <a:solidFill>
-        <a:schemeClr val="lt1"/>
-      </a:solidFill>
-      <a:ln>
-        <a:solidFill>
-          <a:schemeClr val="dk1">
-            <a:lumMod val="25000"/>
-            <a:lumOff val="75000"/>
-          </a:schemeClr>
-        </a:solidFill>
-      </a:ln>
-    </cs:spPr>
-    <cs:defRPr sz="900" kern="1200"/>
-    <cs:bodyPr rot="0" spcFirstLastPara="1" vertOverflow="clip" horzOverflow="clip" vert="horz" wrap="square" lIns="36576" tIns="18288" rIns="36576" bIns="18288" anchor="ctr" anchorCtr="1">
-      <a:spAutoFit/>
-    </cs:bodyPr>
-  </cs:dataLabelCallout>
-  <cs:dataPoint>
-    <cs:lnRef idx="0"/>
-    <cs:fillRef idx="1">
-      <cs:styleClr val="auto"/>
-    </cs:fillRef>
-    <cs:effectRef idx="0"/>
-    <cs:fontRef idx="minor">
-      <a:schemeClr val="tx1"/>
-    </cs:fontRef>
-  </cs:dataPoint>
-  <cs:dataPoint3D>
-    <cs:lnRef idx="0"/>
-    <cs:fillRef idx="1">
-      <cs:styleClr val="auto"/>
-    </cs:fillRef>
-    <cs:effectRef idx="0"/>
-    <cs:fontRef idx="minor">
-      <a:schemeClr val="tx1"/>
-    </cs:fontRef>
-  </cs:dataPoint3D>
-  <cs:dataPointLine>
-    <cs:lnRef idx="0">
-      <cs:styleClr val="auto"/>
-    </cs:lnRef>
-    <cs:fillRef idx="1"/>
-    <cs:effectRef idx="0"/>
-    <cs:fontRef idx="minor">
-      <a:schemeClr val="tx1"/>
-    </cs:fontRef>
-    <cs:spPr>
-      <a:ln w="28575" cap="rnd">
-        <a:solidFill>
-          <a:schemeClr val="phClr"/>
-        </a:solidFill>
-        <a:round/>
-      </a:ln>
-    </cs:spPr>
-  </cs:dataPointLine>
-  <cs:dataPointMarker>
-    <cs:lnRef idx="0">
-      <cs:styleClr val="auto"/>
-    </cs:lnRef>
-    <cs:fillRef idx="1">
-      <cs:styleClr val="auto"/>
-    </cs:fillRef>
-    <cs:effectRef idx="0"/>
-    <cs:fontRef idx="minor">
-      <a:schemeClr val="tx1"/>
-    </cs:fontRef>
-    <cs:spPr>
-      <a:ln w="9525">
-        <a:solidFill>
-          <a:schemeClr val="phClr"/>
-        </a:solidFill>
-      </a:ln>
-    </cs:spPr>
-  </cs:dataPointMarker>
-  <cs:dataPointMarkerLayout symbol="circle" size="5"/>
-  <cs:dataPointWireframe>
-    <cs:lnRef idx="0">
-      <cs:styleClr val="auto"/>
-    </cs:lnRef>
-    <cs:fillRef idx="1"/>
-    <cs:effectRef idx="0"/>
-    <cs:fontRef idx="minor">
-      <a:schemeClr val="tx1"/>
-    </cs:fontRef>
-    <cs:spPr>
-      <a:ln w="9525" cap="rnd">
-        <a:solidFill>
-          <a:schemeClr val="phClr"/>
-        </a:solidFill>
-        <a:round/>
-      </a:ln>
-    </cs:spPr>
-  </cs:dataPointWireframe>
-  <cs:dataTable>
-    <cs:lnRef idx="0"/>
-    <cs:fillRef idx="0"/>
-    <cs:effectRef idx="0"/>
-    <cs:fontRef idx="minor">
-      <a:schemeClr val="tx1">
-        <a:lumMod val="65000"/>
-        <a:lumOff val="35000"/>
-      </a:schemeClr>
-    </cs:fontRef>
-    <cs:spPr>
-      <a:noFill/>
-      <a:ln w="9525" cap="flat" cmpd="sng" algn="ctr">
-        <a:solidFill>
-          <a:schemeClr val="tx1">
-            <a:lumMod val="15000"/>
-            <a:lumOff val="85000"/>
-          </a:schemeClr>
-        </a:solidFill>
-        <a:round/>
-      </a:ln>
-    </cs:spPr>
-    <cs:defRPr sz="900" kern="1200"/>
-  </cs:dataTable>
-  <cs:downBar>
-    <cs:lnRef idx="0"/>
-    <cs:fillRef idx="0"/>
-    <cs:effectRef idx="0"/>
-    <cs:fontRef idx="minor">
-      <a:schemeClr val="tx1"/>
-    </cs:fontRef>
-    <cs:spPr>
-      <a:solidFill>
-        <a:schemeClr val="dk1">
-          <a:lumMod val="75000"/>
-          <a:lumOff val="25000"/>
-        </a:schemeClr>
-      </a:solidFill>
-      <a:ln w="9525" cap="flat" cmpd="sng" algn="ctr">
-        <a:solidFill>
-          <a:schemeClr val="tx1">
-            <a:lumMod val="65000"/>
-            <a:lumOff val="35000"/>
-          </a:schemeClr>
-        </a:solidFill>
-        <a:round/>
-      </a:ln>
-    </cs:spPr>
-  </cs:downBar>
-  <cs:dropLine>
-    <cs:lnRef idx="0"/>
-    <cs:fillRef idx="0"/>
-    <cs:effectRef idx="0"/>
-    <cs:fontRef idx="minor">
-      <a:schemeClr val="tx1"/>
-    </cs:fontRef>
-    <cs:spPr>
-      <a:ln w="9525" cap="flat" cmpd="sng" algn="ctr">
-        <a:solidFill>
-          <a:schemeClr val="tx1">
-            <a:lumMod val="35000"/>
-            <a:lumOff val="65000"/>
-          </a:schemeClr>
-        </a:solidFill>
-        <a:round/>
-      </a:ln>
-    </cs:spPr>
-  </cs:dropLine>
-  <cs:errorBar>
-    <cs:lnRef idx="0"/>
-    <cs:fillRef idx="0"/>
-    <cs:effectRef idx="0"/>
-    <cs:fontRef idx="minor">
-      <a:schemeClr val="tx1"/>
-    </cs:fontRef>
-    <cs:spPr>
-      <a:ln w="9525" cap="flat" cmpd="sng" algn="ctr">
-        <a:solidFill>
-          <a:schemeClr val="tx1">
-            <a:lumMod val="65000"/>
-            <a:lumOff val="35000"/>
-          </a:schemeClr>
-        </a:solidFill>
-        <a:round/>
-      </a:ln>
-    </cs:spPr>
-  </cs:errorBar>
-  <cs:floor>
-    <cs:lnRef idx="0"/>
-    <cs:fillRef idx="0"/>
-    <cs:effectRef idx="0"/>
-    <cs:fontRef idx="minor">
-      <a:schemeClr val="tx1"/>
-    </cs:fontRef>
-    <cs:spPr>
-      <a:noFill/>
-      <a:ln>
-        <a:noFill/>
-      </a:ln>
-    </cs:spPr>
-  </cs:floor>
-  <cs:gridlineMajor>
-    <cs:lnRef idx="0"/>
-    <cs:fillRef idx="0"/>
-    <cs:effectRef idx="0"/>
-    <cs:fontRef idx="minor">
-      <a:schemeClr val="tx1"/>
-    </cs:fontRef>
-    <cs:spPr>
-      <a:ln w="9525" cap="flat" cmpd="sng" algn="ctr">
-        <a:solidFill>
-          <a:schemeClr val="tx1">
-            <a:lumMod val="15000"/>
-            <a:lumOff val="85000"/>
-          </a:schemeClr>
-        </a:solidFill>
-        <a:round/>
-      </a:ln>
-    </cs:spPr>
-  </cs:gridlineMajor>
-  <cs:gridlineMinor>
-    <cs:lnRef idx="0"/>
-    <cs:fillRef idx="0"/>
-    <cs:effectRef idx="0"/>
-    <cs:fontRef idx="minor">
-      <a:schemeClr val="tx1"/>
-    </cs:fontRef>
-    <cs:spPr>
-      <a:ln w="9525" cap="flat" cmpd="sng" algn="ctr">
-        <a:solidFill>
-          <a:schemeClr val="tx1">
-            <a:lumMod val="5000"/>
-            <a:lumOff val="95000"/>
-          </a:schemeClr>
-        </a:solidFill>
-        <a:round/>
-      </a:ln>
-    </cs:spPr>
-  </cs:gridlineMinor>
-  <cs:hiLoLine>
-    <cs:lnRef idx="0"/>
-    <cs:fillRef idx="0"/>
-    <cs:effectRef idx="0"/>
-    <cs:fontRef idx="minor">
-      <a:schemeClr val="tx1"/>
-    </cs:fontRef>
-    <cs:spPr>
-      <a:ln w="9525" cap="flat" cmpd="sng" algn="ctr">
-        <a:solidFill>
-          <a:schemeClr val="tx1">
-            <a:lumMod val="50000"/>
-            <a:lumOff val="50000"/>
-          </a:schemeClr>
-        </a:solidFill>
-        <a:round/>
-      </a:ln>
-    </cs:spPr>
-  </cs:hiLoLine>
-  <cs:leaderLine>
-    <cs:lnRef idx="0"/>
-    <cs:fillRef idx="0"/>
-    <cs:effectRef idx="0"/>
-    <cs:fontRef idx="minor">
-      <a:schemeClr val="tx1"/>
-    </cs:fontRef>
-    <cs:spPr>
-      <a:ln w="9525" cap="flat" cmpd="sng" algn="ctr">
-        <a:solidFill>
-          <a:schemeClr val="tx1">
-            <a:lumMod val="35000"/>
-            <a:lumOff val="65000"/>
-          </a:schemeClr>
-        </a:solidFill>
-        <a:round/>
-      </a:ln>
-    </cs:spPr>
-  </cs:leaderLine>
-  <cs:legend>
-    <cs:lnRef idx="0"/>
-    <cs:fillRef idx="0"/>
-    <cs:effectRef idx="0"/>
-    <cs:fontRef idx="minor">
-      <a:schemeClr val="tx1">
-        <a:lumMod val="65000"/>
-        <a:lumOff val="35000"/>
-      </a:schemeClr>
-    </cs:fontRef>
-    <cs:defRPr sz="900" kern="1200"/>
-  </cs:legend>
-  <cs:plotArea mods="allowNoFillOverride allowNoLineOverride">
-    <cs:lnRef idx="0"/>
-    <cs:fillRef idx="0"/>
-    <cs:effectRef idx="0"/>
-    <cs:fontRef idx="minor">
-      <a:schemeClr val="tx1"/>
-    </cs:fontRef>
-  </cs:plotArea>
-  <cs:plotArea3D mods="allowNoFillOverride allowNoLineOverride">
-    <cs:lnRef idx="0"/>
-    <cs:fillRef idx="0"/>
-    <cs:effectRef idx="0"/>
-    <cs:fontRef idx="minor">
-      <a:schemeClr val="tx1"/>
-    </cs:fontRef>
-  </cs:plotArea3D>
-  <cs:seriesAxis>
-    <cs:lnRef idx="0"/>
-    <cs:fillRef idx="0"/>
-    <cs:effectRef idx="0"/>
-    <cs:fontRef idx="minor">
-      <a:schemeClr val="tx1">
-        <a:lumMod val="65000"/>
-        <a:lumOff val="35000"/>
-      </a:schemeClr>
-    </cs:fontRef>
-    <cs:defRPr sz="900" kern="1200"/>
-  </cs:seriesAxis>
-  <cs:seriesLine>
-    <cs:lnRef idx="0"/>
-    <cs:fillRef idx="0"/>
-    <cs:effectRef idx="0"/>
-    <cs:fontRef idx="minor">
-      <a:schemeClr val="tx1"/>
-    </cs:fontRef>
-    <cs:spPr>
-      <a:ln w="9525" cap="flat" cmpd="sng" algn="ctr">
-        <a:solidFill>
-          <a:schemeClr val="tx1">
-            <a:lumMod val="35000"/>
-            <a:lumOff val="65000"/>
-          </a:schemeClr>
-        </a:solidFill>
-        <a:round/>
-      </a:ln>
-    </cs:spPr>
-  </cs:seriesLine>
-  <cs:title>
-    <cs:lnRef idx="0"/>
-    <cs:fillRef idx="0"/>
-    <cs:effectRef idx="0"/>
-    <cs:fontRef idx="minor">
-      <a:schemeClr val="tx1">
-        <a:lumMod val="65000"/>
-        <a:lumOff val="35000"/>
-      </a:schemeClr>
-    </cs:fontRef>
-    <cs:defRPr sz="1400" b="0" kern="1200" spc="0" baseline="0"/>
-  </cs:title>
-  <cs:trendline>
-    <cs:lnRef idx="0">
-      <cs:styleClr val="auto"/>
-    </cs:lnRef>
-    <cs:fillRef idx="0"/>
-    <cs:effectRef idx="0"/>
-    <cs:fontRef idx="minor">
-      <a:schemeClr val="tx1"/>
-    </cs:fontRef>
-    <cs:spPr>
-      <a:ln w="19050" cap="rnd">
-        <a:solidFill>
-          <a:schemeClr val="phClr"/>
-        </a:solidFill>
-        <a:prstDash val="sysDot"/>
-      </a:ln>
-    </cs:spPr>
-  </cs:trendline>
-  <cs:trendlineLabel>
-    <cs:lnRef idx="0"/>
-    <cs:fillRef idx="0"/>
-    <cs:effectRef idx="0"/>
-    <cs:fontRef idx="minor">
-      <a:schemeClr val="tx1">
-        <a:lumMod val="65000"/>
-        <a:lumOff val="35000"/>
-      </a:schemeClr>
-    </cs:fontRef>
-    <cs:defRPr sz="900" kern="1200"/>
-  </cs:trendlineLabel>
-  <cs:upBar>
-    <cs:lnRef idx="0"/>
-    <cs:fillRef idx="0"/>
-    <cs:effectRef idx="0"/>
-    <cs:fontRef idx="minor">
-      <a:schemeClr val="tx1"/>
-    </cs:fontRef>
-    <cs:spPr>
-      <a:solidFill>
-        <a:schemeClr val="lt1"/>
-      </a:solidFill>
-      <a:ln w="9525" cap="flat" cmpd="sng" algn="ctr">
-        <a:solidFill>
-          <a:schemeClr val="tx1">
-            <a:lumMod val="65000"/>
-            <a:lumOff val="35000"/>
-          </a:schemeClr>
-        </a:solidFill>
-        <a:round/>
-      </a:ln>
-    </cs:spPr>
-  </cs:upBar>
-  <cs:valueAxis>
-    <cs:lnRef idx="0"/>
-    <cs:fillRef idx="0"/>
-    <cs:effectRef idx="0"/>
-    <cs:fontRef idx="minor">
-      <a:schemeClr val="tx1">
-        <a:lumMod val="65000"/>
-        <a:lumOff val="35000"/>
-      </a:schemeClr>
-    </cs:fontRef>
-    <cs:defRPr sz="900" kern="1200"/>
-  </cs:valueAxis>
-  <cs:wall>
-    <cs:lnRef idx="0"/>
-    <cs:fillRef idx="0"/>
-    <cs:effectRef idx="0"/>
-    <cs:fontRef idx="minor">
-      <a:schemeClr val="tx1"/>
-    </cs:fontRef>
-    <cs:spPr>
-      <a:noFill/>
-      <a:ln>
-        <a:noFill/>
-      </a:ln>
-    </cs:spPr>
-  </cs:wall>
-</cs:chartStyle>
-</file>
-
 <file path=ppt/notesMasters/notesMaster1.xml><?xml version="1.0" encoding="utf-8"?>
 <p:notesMaster xmlns:a="http://schemas.openxmlformats.org/drawingml/2006/main" xmlns:r="http://schemas.openxmlformats.org/officeDocument/2006/relationships" xmlns:p="http://schemas.openxmlformats.org/presentationml/2006/main">
   <p:cSld>
@@ -2640,7 +1783,13 @@
   <p:cSld>
     <p:spTree>
       <p:nvGrpSpPr>
-        <p:cNvPr id="1" name=""/>
+        <p:cNvPr id="1" name="">
+          <a:extLst>
+            <a:ext uri="{FF2B5EF4-FFF2-40B4-BE49-F238E27FC236}">
+              <a16:creationId xmlns:a16="http://schemas.microsoft.com/office/drawing/2014/main" id="{F61DCC48-DBB6-BEE3-3C06-0394F6AE56C6}"/>
+            </a:ext>
+          </a:extLst>
+        </p:cNvPr>
         <p:cNvGrpSpPr/>
         <p:nvPr/>
       </p:nvGrpSpPr>
@@ -2654,7 +1803,13 @@
       </p:grpSpPr>
       <p:sp>
         <p:nvSpPr>
-          <p:cNvPr id="2" name="幻灯片图像占位符 1"/>
+          <p:cNvPr id="2" name="幻灯片图像占位符 1">
+            <a:extLst>
+              <a:ext uri="{FF2B5EF4-FFF2-40B4-BE49-F238E27FC236}">
+                <a16:creationId xmlns:a16="http://schemas.microsoft.com/office/drawing/2014/main" id="{B5C8781A-C651-91C3-7F95-2366B1DC5B15}"/>
+              </a:ext>
+            </a:extLst>
+          </p:cNvPr>
           <p:cNvSpPr>
             <a:spLocks noGrp="1" noRot="1" noChangeAspect="1"/>
           </p:cNvSpPr>
@@ -2671,7 +1826,13 @@
       </p:sp>
       <p:sp>
         <p:nvSpPr>
-          <p:cNvPr id="3" name="备注占位符 2"/>
+          <p:cNvPr id="3" name="备注占位符 2">
+            <a:extLst>
+              <a:ext uri="{FF2B5EF4-FFF2-40B4-BE49-F238E27FC236}">
+                <a16:creationId xmlns:a16="http://schemas.microsoft.com/office/drawing/2014/main" id="{056FAEB4-486A-9EFE-9D6F-AB210350C5ED}"/>
+              </a:ext>
+            </a:extLst>
+          </p:cNvPr>
           <p:cNvSpPr>
             <a:spLocks noGrp="1"/>
           </p:cNvSpPr>
@@ -2684,14 +1845,14 @@
           <a:bodyPr/>
           <a:lstStyle/>
           <a:p>
-            <a:endParaRPr lang="en-US" altLang="zh-CN" dirty="0"/>
+            <a:endParaRPr lang="zh-CN" altLang="en-US" dirty="0"/>
           </a:p>
         </p:txBody>
       </p:sp>
     </p:spTree>
     <p:extLst>
       <p:ext uri="{BB962C8B-B14F-4D97-AF65-F5344CB8AC3E}">
-        <p14:creationId xmlns:p14="http://schemas.microsoft.com/office/powerpoint/2010/main" val="1436156891"/>
+        <p14:creationId xmlns:p14="http://schemas.microsoft.com/office/powerpoint/2010/main" val="3483080484"/>
       </p:ext>
     </p:extLst>
   </p:cSld>
@@ -2706,7 +1867,13 @@
   <p:cSld>
     <p:spTree>
       <p:nvGrpSpPr>
-        <p:cNvPr id="1" name=""/>
+        <p:cNvPr id="1" name="">
+          <a:extLst>
+            <a:ext uri="{FF2B5EF4-FFF2-40B4-BE49-F238E27FC236}">
+              <a16:creationId xmlns:a16="http://schemas.microsoft.com/office/drawing/2014/main" id="{2E74F2E1-2390-75AF-045D-8190ADC97E96}"/>
+            </a:ext>
+          </a:extLst>
+        </p:cNvPr>
         <p:cNvGrpSpPr/>
         <p:nvPr/>
       </p:nvGrpSpPr>
@@ -2720,7 +1887,13 @@
       </p:grpSpPr>
       <p:sp>
         <p:nvSpPr>
-          <p:cNvPr id="2" name="幻灯片图像占位符 1"/>
+          <p:cNvPr id="2" name="幻灯片图像占位符 1">
+            <a:extLst>
+              <a:ext uri="{FF2B5EF4-FFF2-40B4-BE49-F238E27FC236}">
+                <a16:creationId xmlns:a16="http://schemas.microsoft.com/office/drawing/2014/main" id="{7DCF58E2-8425-29C4-047D-05D4038A014D}"/>
+              </a:ext>
+            </a:extLst>
+          </p:cNvPr>
           <p:cNvSpPr>
             <a:spLocks noGrp="1" noRot="1" noChangeAspect="1"/>
           </p:cNvSpPr>
@@ -2737,7 +1910,13 @@
       </p:sp>
       <p:sp>
         <p:nvSpPr>
-          <p:cNvPr id="3" name="备注占位符 2"/>
+          <p:cNvPr id="3" name="备注占位符 2">
+            <a:extLst>
+              <a:ext uri="{FF2B5EF4-FFF2-40B4-BE49-F238E27FC236}">
+                <a16:creationId xmlns:a16="http://schemas.microsoft.com/office/drawing/2014/main" id="{3CEFCAE2-E407-C86B-9458-280F31C9727B}"/>
+              </a:ext>
+            </a:extLst>
+          </p:cNvPr>
           <p:cNvSpPr>
             <a:spLocks noGrp="1"/>
           </p:cNvSpPr>
@@ -2750,14 +1929,14 @@
           <a:bodyPr/>
           <a:lstStyle/>
           <a:p>
-            <a:endParaRPr lang="zh-CN" altLang="en-US"/>
+            <a:endParaRPr lang="zh-CN" altLang="en-US" dirty="0"/>
           </a:p>
         </p:txBody>
       </p:sp>
     </p:spTree>
     <p:extLst>
       <p:ext uri="{BB962C8B-B14F-4D97-AF65-F5344CB8AC3E}">
-        <p14:creationId xmlns:p14="http://schemas.microsoft.com/office/powerpoint/2010/main" val="143794314"/>
+        <p14:creationId xmlns:p14="http://schemas.microsoft.com/office/powerpoint/2010/main" val="2616061301"/>
       </p:ext>
     </p:extLst>
   </p:cSld>
@@ -9333,7 +8512,7 @@
           <a:p>
             <a:fld id="{21DFC0C0-F3C1-46A6-B1E0-38A19114CB16}" type="datetimeFigureOut">
               <a:rPr lang="zh-CN" altLang="en-US" smtClean="0"/>
-              <a:t>2026/2/19</a:t>
+              <a:t>2026/4/15</a:t>
             </a:fld>
             <a:endParaRPr lang="zh-CN" altLang="en-US"/>
           </a:p>
@@ -12117,7 +11296,7 @@
           <a:p>
             <a:fld id="{21DFC0C0-F3C1-46A6-B1E0-38A19114CB16}" type="datetimeFigureOut">
               <a:rPr lang="zh-CN" altLang="en-US" smtClean="0"/>
-              <a:t>2026/2/19</a:t>
+              <a:t>2026/4/15</a:t>
             </a:fld>
             <a:endParaRPr lang="zh-CN" altLang="en-US"/>
           </a:p>
@@ -28917,7 +28096,13 @@
   <p:cSld>
     <p:spTree>
       <p:nvGrpSpPr>
-        <p:cNvPr id="1" name=""/>
+        <p:cNvPr id="1" name="">
+          <a:extLst>
+            <a:ext uri="{FF2B5EF4-FFF2-40B4-BE49-F238E27FC236}">
+              <a16:creationId xmlns:a16="http://schemas.microsoft.com/office/drawing/2014/main" id="{D01E1857-89CF-8C2F-E2E6-E828579B4823}"/>
+            </a:ext>
+          </a:extLst>
+        </p:cNvPr>
         <p:cNvGrpSpPr/>
         <p:nvPr/>
       </p:nvGrpSpPr>
@@ -28931,22 +28116,26 @@
       </p:grpSpPr>
       <p:sp>
         <p:nvSpPr>
-          <p:cNvPr id="10" name="矩形 9"/>
+          <p:cNvPr id="2" name="矩形 1">
+            <a:extLst>
+              <a:ext uri="{FF2B5EF4-FFF2-40B4-BE49-F238E27FC236}">
+                <a16:creationId xmlns:a16="http://schemas.microsoft.com/office/drawing/2014/main" id="{8960AF60-2CE0-F6E2-D970-2B2D3F330A45}"/>
+              </a:ext>
+            </a:extLst>
+          </p:cNvPr>
           <p:cNvSpPr/>
           <p:nvPr/>
         </p:nvSpPr>
         <p:spPr>
           <a:xfrm>
-            <a:off x="3586848" y="6038105"/>
-            <a:ext cx="5281570" cy="196703"/>
+            <a:off x="191344" y="188640"/>
+            <a:ext cx="902811" cy="523220"/>
           </a:xfrm>
           <a:prstGeom prst="rect">
             <a:avLst/>
           </a:prstGeom>
           <a:solidFill>
-            <a:srgbClr val="FFC000">
-              <a:alpha val="50000"/>
-            </a:srgbClr>
+            <a:schemeClr val="dk1"/>
           </a:solidFill>
           <a:ln>
             <a:noFill/>
@@ -28967,3866 +28156,30 @@
           </a:fontRef>
         </p:style>
         <p:txBody>
-          <a:bodyPr rot="0" spcFirstLastPara="1" vertOverflow="overflow" horzOverflow="overflow" vert="horz" wrap="square" lIns="45719" tIns="45719" rIns="45719" bIns="45719" numCol="1" spcCol="38100" rtlCol="0" anchor="ctr">
-            <a:spAutoFit/>
-          </a:bodyPr>
-          <a:lstStyle/>
-          <a:p>
-            <a:pPr marL="0" marR="0" indent="0" algn="l" defTabSz="457200" rtl="0" fontAlgn="auto" latinLnBrk="0" hangingPunct="0">
-              <a:lnSpc>
-                <a:spcPct val="100000"/>
-              </a:lnSpc>
-              <a:spcBef>
-                <a:spcPts val="0"/>
-              </a:spcBef>
-              <a:spcAft>
-                <a:spcPts val="0"/>
-              </a:spcAft>
-              <a:buClrTx/>
-              <a:buSzTx/>
-              <a:buFontTx/>
-              <a:buNone/>
-            </a:pPr>
-            <a:endParaRPr kumimoji="0" lang="zh-CN" altLang="en-US" sz="1800" b="0" i="0" u="none" strike="noStrike" cap="none" spc="0" normalizeH="0" baseline="0">
-              <a:ln>
-                <a:noFill/>
-              </a:ln>
-              <a:solidFill>
-                <a:srgbClr val="000000"/>
-              </a:solidFill>
-              <a:effectLst/>
-              <a:uFillTx/>
-              <a:latin typeface="Arial"/>
-              <a:ea typeface="Arial"/>
-              <a:cs typeface="Arial"/>
-              <a:sym typeface="Arial"/>
-            </a:endParaRPr>
-          </a:p>
-        </p:txBody>
-      </p:sp>
-      <p:sp>
-        <p:nvSpPr>
-          <p:cNvPr id="50" name="矩形 49"/>
-          <p:cNvSpPr/>
-          <p:nvPr/>
-        </p:nvSpPr>
-        <p:spPr>
-          <a:xfrm>
-            <a:off x="277812" y="6331332"/>
-            <a:ext cx="4882084" cy="228205"/>
-          </a:xfrm>
-          <a:prstGeom prst="rect">
-            <a:avLst/>
-          </a:prstGeom>
-          <a:solidFill>
-            <a:srgbClr val="FFC000">
-              <a:alpha val="50000"/>
-            </a:srgbClr>
-          </a:solidFill>
-          <a:ln>
-            <a:noFill/>
-          </a:ln>
-        </p:spPr>
-        <p:style>
-          <a:lnRef idx="0">
-            <a:scrgbClr r="0" g="0" b="0"/>
-          </a:lnRef>
-          <a:fillRef idx="0">
-            <a:scrgbClr r="0" g="0" b="0"/>
-          </a:fillRef>
-          <a:effectRef idx="0">
-            <a:scrgbClr r="0" g="0" b="0"/>
-          </a:effectRef>
-          <a:fontRef idx="minor">
-            <a:schemeClr val="lt1"/>
-          </a:fontRef>
-        </p:style>
-        <p:txBody>
-          <a:bodyPr rot="0" spcFirstLastPara="1" vertOverflow="overflow" horzOverflow="overflow" vert="horz" wrap="square" lIns="45719" tIns="45719" rIns="45719" bIns="45719" numCol="1" spcCol="38100" rtlCol="0" anchor="ctr">
-            <a:spAutoFit/>
-          </a:bodyPr>
-          <a:lstStyle/>
-          <a:p>
-            <a:pPr marL="0" marR="0" indent="0" algn="l" defTabSz="457200" rtl="0" fontAlgn="auto" latinLnBrk="0" hangingPunct="0">
-              <a:lnSpc>
-                <a:spcPct val="100000"/>
-              </a:lnSpc>
-              <a:spcBef>
-                <a:spcPts val="0"/>
-              </a:spcBef>
-              <a:spcAft>
-                <a:spcPts val="0"/>
-              </a:spcAft>
-              <a:buClrTx/>
-              <a:buSzTx/>
-              <a:buFontTx/>
-              <a:buNone/>
-            </a:pPr>
-            <a:endParaRPr kumimoji="0" lang="zh-CN" altLang="en-US" sz="1800" b="0" i="0" u="none" strike="noStrike" cap="none" spc="0" normalizeH="0" baseline="0">
-              <a:ln>
-                <a:noFill/>
-              </a:ln>
-              <a:solidFill>
-                <a:srgbClr val="000000"/>
-              </a:solidFill>
-              <a:effectLst/>
-              <a:uFillTx/>
-              <a:latin typeface="Arial"/>
-              <a:ea typeface="Arial"/>
-              <a:cs typeface="Arial"/>
-              <a:sym typeface="Arial"/>
-            </a:endParaRPr>
-          </a:p>
-        </p:txBody>
-      </p:sp>
-      <p:cxnSp>
-        <p:nvCxnSpPr>
-          <p:cNvPr id="2" name="直接连接符 1"/>
-          <p:cNvCxnSpPr/>
-          <p:nvPr/>
-        </p:nvCxnSpPr>
-        <p:spPr>
-          <a:xfrm>
-            <a:off x="198716" y="1124744"/>
-            <a:ext cx="1811745" cy="0"/>
-          </a:xfrm>
-          <a:prstGeom prst="line">
-            <a:avLst/>
-          </a:prstGeom>
-          <a:ln>
-            <a:solidFill>
-              <a:schemeClr val="tx1"/>
-            </a:solidFill>
-          </a:ln>
-          <a:effectLst/>
-        </p:spPr>
-        <p:style>
-          <a:lnRef idx="2">
-            <a:schemeClr val="dk1"/>
-          </a:lnRef>
-          <a:fillRef idx="0">
-            <a:schemeClr val="dk1"/>
-          </a:fillRef>
-          <a:effectRef idx="1">
-            <a:schemeClr val="dk1"/>
-          </a:effectRef>
-          <a:fontRef idx="minor">
-            <a:schemeClr val="tx1"/>
-          </a:fontRef>
-        </p:style>
-      </p:cxnSp>
-      <p:cxnSp>
-        <p:nvCxnSpPr>
-          <p:cNvPr id="3" name="直接连接符 2"/>
-          <p:cNvCxnSpPr/>
-          <p:nvPr/>
-        </p:nvCxnSpPr>
-        <p:spPr>
-          <a:xfrm flipV="1">
-            <a:off x="184811" y="222090"/>
-            <a:ext cx="10375685" cy="8812"/>
-          </a:xfrm>
-          <a:prstGeom prst="line">
-            <a:avLst/>
-          </a:prstGeom>
-          <a:ln>
-            <a:solidFill>
-              <a:schemeClr val="tx1"/>
-            </a:solidFill>
-          </a:ln>
-          <a:effectLst/>
-        </p:spPr>
-        <p:style>
-          <a:lnRef idx="2">
-            <a:schemeClr val="dk1"/>
-          </a:lnRef>
-          <a:fillRef idx="0">
-            <a:schemeClr val="dk1"/>
-          </a:fillRef>
-          <a:effectRef idx="1">
-            <a:schemeClr val="dk1"/>
-          </a:effectRef>
-          <a:fontRef idx="minor">
-            <a:schemeClr val="tx1"/>
-          </a:fontRef>
-        </p:style>
-      </p:cxnSp>
-      <p:cxnSp>
-        <p:nvCxnSpPr>
-          <p:cNvPr id="4" name="直接连接符 3"/>
-          <p:cNvCxnSpPr/>
-          <p:nvPr/>
-        </p:nvCxnSpPr>
-        <p:spPr>
-          <a:xfrm flipV="1">
-            <a:off x="9111056" y="222091"/>
-            <a:ext cx="0" cy="919432"/>
-          </a:xfrm>
-          <a:prstGeom prst="line">
-            <a:avLst/>
-          </a:prstGeom>
-          <a:ln>
-            <a:solidFill>
-              <a:schemeClr val="tx1"/>
-            </a:solidFill>
-          </a:ln>
-          <a:effectLst/>
-        </p:spPr>
-        <p:style>
-          <a:lnRef idx="2">
-            <a:schemeClr val="dk1"/>
-          </a:lnRef>
-          <a:fillRef idx="0">
-            <a:schemeClr val="dk1"/>
-          </a:fillRef>
-          <a:effectRef idx="1">
-            <a:schemeClr val="dk1"/>
-          </a:effectRef>
-          <a:fontRef idx="minor">
-            <a:schemeClr val="tx1"/>
-          </a:fontRef>
-        </p:style>
-      </p:cxnSp>
-      <p:cxnSp>
-        <p:nvCxnSpPr>
-          <p:cNvPr id="5" name="直接连接符 4"/>
-          <p:cNvCxnSpPr/>
-          <p:nvPr/>
-        </p:nvCxnSpPr>
-        <p:spPr>
-          <a:xfrm flipV="1">
-            <a:off x="191344" y="692698"/>
-            <a:ext cx="0" cy="448825"/>
-          </a:xfrm>
-          <a:prstGeom prst="line">
-            <a:avLst/>
-          </a:prstGeom>
-          <a:ln>
-            <a:solidFill>
-              <a:schemeClr val="tx1"/>
-            </a:solidFill>
-          </a:ln>
-          <a:effectLst/>
-        </p:spPr>
-        <p:style>
-          <a:lnRef idx="2">
-            <a:schemeClr val="dk1"/>
-          </a:lnRef>
-          <a:fillRef idx="0">
-            <a:schemeClr val="dk1"/>
-          </a:fillRef>
-          <a:effectRef idx="1">
-            <a:schemeClr val="dk1"/>
-          </a:effectRef>
-          <a:fontRef idx="minor">
-            <a:schemeClr val="tx1"/>
-          </a:fontRef>
-        </p:style>
-      </p:cxnSp>
-      <p:cxnSp>
-        <p:nvCxnSpPr>
-          <p:cNvPr id="6" name="直接连接符 5"/>
-          <p:cNvCxnSpPr/>
-          <p:nvPr/>
-        </p:nvCxnSpPr>
-        <p:spPr>
-          <a:xfrm flipV="1">
-            <a:off x="191344" y="2636914"/>
-            <a:ext cx="0" cy="4104454"/>
-          </a:xfrm>
-          <a:prstGeom prst="line">
-            <a:avLst/>
-          </a:prstGeom>
-          <a:ln>
-            <a:solidFill>
-              <a:schemeClr val="tx1"/>
-            </a:solidFill>
-          </a:ln>
-          <a:effectLst/>
-        </p:spPr>
-        <p:style>
-          <a:lnRef idx="2">
-            <a:schemeClr val="dk1"/>
-          </a:lnRef>
-          <a:fillRef idx="0">
-            <a:schemeClr val="dk1"/>
-          </a:fillRef>
-          <a:effectRef idx="1">
-            <a:schemeClr val="dk1"/>
-          </a:effectRef>
-          <a:fontRef idx="minor">
-            <a:schemeClr val="tx1"/>
-          </a:fontRef>
-        </p:style>
-      </p:cxnSp>
-      <p:cxnSp>
-        <p:nvCxnSpPr>
-          <p:cNvPr id="7" name="直接连接符 6"/>
-          <p:cNvCxnSpPr/>
-          <p:nvPr/>
-        </p:nvCxnSpPr>
-        <p:spPr>
-          <a:xfrm>
-            <a:off x="191344" y="6741368"/>
-            <a:ext cx="11862323" cy="0"/>
-          </a:xfrm>
-          <a:prstGeom prst="line">
-            <a:avLst/>
-          </a:prstGeom>
-          <a:ln>
-            <a:solidFill>
-              <a:schemeClr val="tx1"/>
-            </a:solidFill>
-          </a:ln>
-          <a:effectLst/>
-        </p:spPr>
-        <p:style>
-          <a:lnRef idx="2">
-            <a:schemeClr val="dk1"/>
-          </a:lnRef>
-          <a:fillRef idx="0">
-            <a:schemeClr val="dk1"/>
-          </a:fillRef>
-          <a:effectRef idx="1">
-            <a:schemeClr val="dk1"/>
-          </a:effectRef>
-          <a:fontRef idx="minor">
-            <a:schemeClr val="tx1"/>
-          </a:fontRef>
-        </p:style>
-      </p:cxnSp>
-      <p:sp>
-        <p:nvSpPr>
-          <p:cNvPr id="8" name="文本框 7"/>
-          <p:cNvSpPr txBox="1"/>
-          <p:nvPr/>
-        </p:nvSpPr>
-        <p:spPr>
-          <a:xfrm>
-            <a:off x="191344" y="233638"/>
-            <a:ext cx="1800200" cy="461663"/>
-          </a:xfrm>
-          <a:prstGeom prst="rect">
-            <a:avLst/>
-          </a:prstGeom>
-        </p:spPr>
-        <p:style>
-          <a:lnRef idx="2">
-            <a:schemeClr val="dk1">
-              <a:shade val="50000"/>
-            </a:schemeClr>
-          </a:lnRef>
-          <a:fillRef idx="1">
-            <a:schemeClr val="dk1"/>
-          </a:fillRef>
-          <a:effectRef idx="0">
-            <a:schemeClr val="dk1"/>
-          </a:effectRef>
-          <a:fontRef idx="minor">
-            <a:schemeClr val="lt1"/>
-          </a:fontRef>
-        </p:style>
-        <p:txBody>
-          <a:bodyPr rot="0" spcFirstLastPara="1" vertOverflow="overflow" horzOverflow="overflow" vert="horz" wrap="square" lIns="45719" tIns="45719" rIns="45719" bIns="45719" numCol="1" spcCol="38100" rtlCol="0" anchor="t">
-            <a:spAutoFit/>
-          </a:bodyPr>
-          <a:lstStyle/>
-          <a:p>
-            <a:pPr marL="0" marR="0" indent="0" algn="ctr" defTabSz="457200" rtl="0" fontAlgn="auto" latinLnBrk="0" hangingPunct="0">
-              <a:lnSpc>
-                <a:spcPct val="100000"/>
-              </a:lnSpc>
-              <a:spcBef>
-                <a:spcPts val="0"/>
-              </a:spcBef>
-              <a:spcAft>
-                <a:spcPts val="0"/>
-              </a:spcAft>
-              <a:buClrTx/>
-              <a:buSzTx/>
-              <a:buFontTx/>
-              <a:buNone/>
-            </a:pPr>
-            <a:r>
-              <a:rPr lang="zh-CN" altLang="en-US" sz="2400" b="1" dirty="0">
-                <a:solidFill>
-                  <a:schemeClr val="bg1"/>
-                </a:solidFill>
-                <a:latin typeface="微软雅黑" pitchFamily="34" charset="-122"/>
-                <a:ea typeface="微软雅黑" pitchFamily="34" charset="-122"/>
-              </a:rPr>
-              <a:t>锋刺</a:t>
-            </a:r>
-            <a:r>
-              <a:rPr lang="en-US" altLang="zh-CN" sz="2400" b="1" dirty="0">
-                <a:solidFill>
-                  <a:schemeClr val="bg1"/>
-                </a:solidFill>
-                <a:latin typeface="微软雅黑" pitchFamily="34" charset="-122"/>
-                <a:ea typeface="微软雅黑" pitchFamily="34" charset="-122"/>
-              </a:rPr>
-              <a:t>7pro</a:t>
-            </a:r>
-            <a:endParaRPr kumimoji="0" lang="zh-CN" altLang="en-US" b="1" i="0" u="none" strike="noStrike" cap="none" spc="0" normalizeH="0" baseline="0" dirty="0">
-              <a:ln>
-                <a:noFill/>
-              </a:ln>
-              <a:solidFill>
-                <a:schemeClr val="bg1"/>
-              </a:solidFill>
-              <a:effectLst/>
-              <a:uFillTx/>
-              <a:latin typeface="微软雅黑" pitchFamily="34" charset="-122"/>
-              <a:ea typeface="微软雅黑" pitchFamily="34" charset="-122"/>
-              <a:sym typeface="Arial"/>
-            </a:endParaRPr>
-          </a:p>
-        </p:txBody>
-      </p:sp>
-      <p:sp>
-        <p:nvSpPr>
-          <p:cNvPr id="9" name="文本框 8"/>
-          <p:cNvSpPr txBox="1"/>
-          <p:nvPr/>
-        </p:nvSpPr>
-        <p:spPr>
-          <a:xfrm>
-            <a:off x="613461" y="740256"/>
-            <a:ext cx="1464619" cy="369330"/>
-          </a:xfrm>
-          <a:prstGeom prst="rect">
-            <a:avLst/>
-          </a:prstGeom>
-          <a:noFill/>
-          <a:ln>
-            <a:noFill/>
-          </a:ln>
-        </p:spPr>
-        <p:style>
-          <a:lnRef idx="0">
-            <a:scrgbClr r="0" g="0" b="0"/>
-          </a:lnRef>
-          <a:fillRef idx="0">
-            <a:scrgbClr r="0" g="0" b="0"/>
-          </a:fillRef>
-          <a:effectRef idx="0">
-            <a:scrgbClr r="0" g="0" b="0"/>
-          </a:effectRef>
-          <a:fontRef idx="minor">
-            <a:schemeClr val="dk1"/>
-          </a:fontRef>
-        </p:style>
-        <p:txBody>
-          <a:bodyPr rot="0" spcFirstLastPara="1" vertOverflow="overflow" horzOverflow="overflow" vert="horz" wrap="square" lIns="45719" tIns="45719" rIns="45719" bIns="45719" numCol="1" spcCol="38100" rtlCol="0" anchor="t">
-            <a:spAutoFit/>
-          </a:bodyPr>
-          <a:lstStyle/>
-          <a:p>
-            <a:pPr marL="0" marR="0" indent="0" algn="l" defTabSz="457200" rtl="0" fontAlgn="auto" latinLnBrk="0" hangingPunct="0">
-              <a:lnSpc>
-                <a:spcPct val="100000"/>
-              </a:lnSpc>
-              <a:spcBef>
-                <a:spcPts val="0"/>
-              </a:spcBef>
-              <a:spcAft>
-                <a:spcPts val="0"/>
-              </a:spcAft>
-              <a:buClrTx/>
-              <a:buSzTx/>
-              <a:buFontTx/>
-              <a:buNone/>
-            </a:pPr>
-            <a:r>
-              <a:rPr lang="zh-CN" altLang="en-US" b="1" dirty="0">
-                <a:solidFill>
-                  <a:schemeClr val="tx1"/>
-                </a:solidFill>
-                <a:latin typeface="微软雅黑" pitchFamily="34" charset="-122"/>
-                <a:ea typeface="微软雅黑" pitchFamily="34" charset="-122"/>
-              </a:rPr>
-              <a:t>实战测评</a:t>
-            </a:r>
-            <a:endParaRPr kumimoji="0" lang="zh-CN" altLang="en-US" sz="1400" b="1" i="0" u="none" strike="noStrike" cap="none" spc="0" normalizeH="0" baseline="0" dirty="0">
-              <a:ln>
-                <a:noFill/>
-              </a:ln>
-              <a:solidFill>
-                <a:schemeClr val="tx1"/>
-              </a:solidFill>
-              <a:effectLst/>
-              <a:uFillTx/>
-              <a:latin typeface="微软雅黑" pitchFamily="34" charset="-122"/>
-              <a:ea typeface="微软雅黑" pitchFamily="34" charset="-122"/>
-              <a:sym typeface="Arial"/>
-            </a:endParaRPr>
-          </a:p>
-        </p:txBody>
-      </p:sp>
-      <p:cxnSp>
-        <p:nvCxnSpPr>
-          <p:cNvPr id="12" name="直接连接符 11"/>
-          <p:cNvCxnSpPr/>
-          <p:nvPr/>
-        </p:nvCxnSpPr>
-        <p:spPr>
-          <a:xfrm flipV="1">
-            <a:off x="2010461" y="230902"/>
-            <a:ext cx="0" cy="893842"/>
-          </a:xfrm>
-          <a:prstGeom prst="line">
-            <a:avLst/>
-          </a:prstGeom>
-          <a:ln>
-            <a:solidFill>
-              <a:schemeClr val="tx1"/>
-            </a:solidFill>
-          </a:ln>
-          <a:effectLst/>
-        </p:spPr>
-        <p:style>
-          <a:lnRef idx="2">
-            <a:schemeClr val="dk1"/>
-          </a:lnRef>
-          <a:fillRef idx="0">
-            <a:schemeClr val="dk1"/>
-          </a:fillRef>
-          <a:effectRef idx="1">
-            <a:schemeClr val="dk1"/>
-          </a:effectRef>
-          <a:fontRef idx="minor">
-            <a:schemeClr val="tx1"/>
-          </a:fontRef>
-        </p:style>
-      </p:cxnSp>
-      <p:cxnSp>
-        <p:nvCxnSpPr>
-          <p:cNvPr id="28" name="直接连接符 27"/>
-          <p:cNvCxnSpPr/>
-          <p:nvPr/>
-        </p:nvCxnSpPr>
-        <p:spPr>
-          <a:xfrm>
-            <a:off x="10544682" y="230902"/>
-            <a:ext cx="0" cy="1685930"/>
-          </a:xfrm>
-          <a:prstGeom prst="line">
-            <a:avLst/>
-          </a:prstGeom>
-          <a:ln>
-            <a:solidFill>
-              <a:schemeClr val="dk1"/>
-            </a:solidFill>
-          </a:ln>
-          <a:effectLst/>
-        </p:spPr>
-        <p:style>
-          <a:lnRef idx="2">
-            <a:schemeClr val="dk1"/>
-          </a:lnRef>
-          <a:fillRef idx="0">
-            <a:schemeClr val="dk1"/>
-          </a:fillRef>
-          <a:effectRef idx="1">
-            <a:schemeClr val="dk1"/>
-          </a:effectRef>
-          <a:fontRef idx="minor">
-            <a:schemeClr val="tx1"/>
-          </a:fontRef>
-        </p:style>
-      </p:cxnSp>
-      <p:cxnSp>
-        <p:nvCxnSpPr>
-          <p:cNvPr id="30" name="直接连接符 29"/>
-          <p:cNvCxnSpPr/>
-          <p:nvPr/>
-        </p:nvCxnSpPr>
-        <p:spPr>
-          <a:xfrm flipH="1">
-            <a:off x="9104522" y="1916832"/>
-            <a:ext cx="1440160" cy="0"/>
-          </a:xfrm>
-          <a:prstGeom prst="line">
-            <a:avLst/>
-          </a:prstGeom>
-          <a:ln>
-            <a:solidFill>
-              <a:schemeClr val="dk1"/>
-            </a:solidFill>
-          </a:ln>
-          <a:effectLst/>
-        </p:spPr>
-        <p:style>
-          <a:lnRef idx="2">
-            <a:schemeClr val="dk1"/>
-          </a:lnRef>
-          <a:fillRef idx="0">
-            <a:schemeClr val="dk1"/>
-          </a:fillRef>
-          <a:effectRef idx="1">
-            <a:schemeClr val="dk1"/>
-          </a:effectRef>
-          <a:fontRef idx="minor">
-            <a:schemeClr val="tx1"/>
-          </a:fontRef>
-        </p:style>
-      </p:cxnSp>
-      <p:cxnSp>
-        <p:nvCxnSpPr>
-          <p:cNvPr id="31" name="直接连接符 30"/>
-          <p:cNvCxnSpPr/>
-          <p:nvPr/>
-        </p:nvCxnSpPr>
-        <p:spPr>
-          <a:xfrm flipV="1">
-            <a:off x="9104522" y="230902"/>
-            <a:ext cx="0" cy="6510466"/>
-          </a:xfrm>
-          <a:prstGeom prst="line">
-            <a:avLst/>
-          </a:prstGeom>
-          <a:ln>
-            <a:solidFill>
-              <a:schemeClr val="dk1"/>
-            </a:solidFill>
-          </a:ln>
-          <a:effectLst/>
-        </p:spPr>
-        <p:style>
-          <a:lnRef idx="2">
-            <a:schemeClr val="dk1"/>
-          </a:lnRef>
-          <a:fillRef idx="0">
-            <a:schemeClr val="dk1"/>
-          </a:fillRef>
-          <a:effectRef idx="1">
-            <a:schemeClr val="dk1"/>
-          </a:effectRef>
-          <a:fontRef idx="minor">
-            <a:schemeClr val="tx1"/>
-          </a:fontRef>
-        </p:style>
-      </p:cxnSp>
-      <p:sp>
-        <p:nvSpPr>
-          <p:cNvPr id="32" name="矩形 31"/>
-          <p:cNvSpPr/>
-          <p:nvPr/>
-        </p:nvSpPr>
-        <p:spPr>
-          <a:xfrm>
-            <a:off x="9128195" y="231337"/>
-            <a:ext cx="1404903" cy="1191993"/>
-          </a:xfrm>
-          <a:prstGeom prst="rect">
-            <a:avLst/>
-          </a:prstGeom>
-        </p:spPr>
-        <p:style>
-          <a:lnRef idx="2">
-            <a:schemeClr val="dk1">
-              <a:shade val="50000"/>
-            </a:schemeClr>
-          </a:lnRef>
-          <a:fillRef idx="1">
-            <a:schemeClr val="dk1"/>
-          </a:fillRef>
-          <a:effectRef idx="0">
-            <a:schemeClr val="dk1"/>
-          </a:effectRef>
-          <a:fontRef idx="minor">
-            <a:schemeClr val="lt1"/>
-          </a:fontRef>
-        </p:style>
-        <p:txBody>
-          <a:bodyPr wrap="square">
-            <a:spAutoFit/>
-          </a:bodyPr>
-          <a:lstStyle/>
-          <a:p>
-            <a:pPr algn="ctr">
-              <a:lnSpc>
-                <a:spcPct val="150000"/>
-              </a:lnSpc>
-            </a:pPr>
-            <a:r>
-              <a:rPr lang="en-US" altLang="zh-CN" sz="5400" b="1" dirty="0">
-                <a:solidFill>
-                  <a:schemeClr val="bg1"/>
-                </a:solidFill>
-                <a:latin typeface="微软雅黑" pitchFamily="34" charset="-122"/>
-                <a:ea typeface="微软雅黑" pitchFamily="34" charset="-122"/>
-              </a:rPr>
-              <a:t>B</a:t>
-            </a:r>
-            <a:endParaRPr lang="zh-CN" altLang="en-US" sz="3600" b="1" dirty="0">
-              <a:solidFill>
-                <a:schemeClr val="bg1"/>
-              </a:solidFill>
-              <a:latin typeface="微软雅黑" pitchFamily="34" charset="-122"/>
-              <a:ea typeface="微软雅黑" pitchFamily="34" charset="-122"/>
-            </a:endParaRPr>
-          </a:p>
-        </p:txBody>
-      </p:sp>
-      <p:sp>
-        <p:nvSpPr>
-          <p:cNvPr id="43" name="文本框 42"/>
-          <p:cNvSpPr txBox="1"/>
-          <p:nvPr/>
-        </p:nvSpPr>
-        <p:spPr>
-          <a:xfrm>
-            <a:off x="9088708" y="1481911"/>
-            <a:ext cx="1471788" cy="400108"/>
-          </a:xfrm>
-          <a:prstGeom prst="rect">
-            <a:avLst/>
-          </a:prstGeom>
-          <a:noFill/>
-          <a:ln>
-            <a:noFill/>
-          </a:ln>
-        </p:spPr>
-        <p:style>
-          <a:lnRef idx="0">
-            <a:scrgbClr r="0" g="0" b="0"/>
-          </a:lnRef>
-          <a:fillRef idx="0">
-            <a:scrgbClr r="0" g="0" b="0"/>
-          </a:fillRef>
-          <a:effectRef idx="0">
-            <a:scrgbClr r="0" g="0" b="0"/>
-          </a:effectRef>
-          <a:fontRef idx="minor">
-            <a:schemeClr val="dk1"/>
-          </a:fontRef>
-        </p:style>
-        <p:txBody>
-          <a:bodyPr rot="0" spcFirstLastPara="1" vertOverflow="overflow" horzOverflow="overflow" vert="horz" wrap="square" lIns="45719" tIns="45719" rIns="45719" bIns="45719" numCol="1" spcCol="38100" rtlCol="0" anchor="t">
-            <a:spAutoFit/>
-          </a:bodyPr>
-          <a:lstStyle/>
-          <a:p>
-            <a:pPr marL="0" marR="0" indent="0" algn="ctr" defTabSz="457200" rtl="0" fontAlgn="auto" latinLnBrk="0" hangingPunct="0">
-              <a:lnSpc>
-                <a:spcPct val="100000"/>
-              </a:lnSpc>
-              <a:spcBef>
-                <a:spcPts val="0"/>
-              </a:spcBef>
-              <a:spcAft>
-                <a:spcPts val="0"/>
-              </a:spcAft>
-              <a:buClrTx/>
-              <a:buSzTx/>
-              <a:buFontTx/>
-              <a:buNone/>
-            </a:pPr>
-            <a:r>
-              <a:rPr lang="en-US" altLang="zh-CN" sz="2000" b="1" dirty="0">
-                <a:solidFill>
-                  <a:schemeClr val="tx1"/>
-                </a:solidFill>
-                <a:latin typeface="微软雅黑" pitchFamily="34" charset="-122"/>
-                <a:ea typeface="微软雅黑" pitchFamily="34" charset="-122"/>
-              </a:rPr>
-              <a:t>7.57 / 10</a:t>
-            </a:r>
-            <a:endParaRPr kumimoji="0" lang="zh-CN" altLang="en-US" sz="1600" b="1" i="0" u="none" strike="noStrike" cap="none" spc="0" normalizeH="0" baseline="0" dirty="0">
-              <a:ln>
-                <a:noFill/>
-              </a:ln>
-              <a:solidFill>
-                <a:schemeClr val="tx1"/>
-              </a:solidFill>
-              <a:effectLst/>
-              <a:uFillTx/>
-              <a:latin typeface="微软雅黑" pitchFamily="34" charset="-122"/>
-              <a:ea typeface="微软雅黑" pitchFamily="34" charset="-122"/>
-              <a:sym typeface="Arial"/>
-            </a:endParaRPr>
-          </a:p>
-        </p:txBody>
-      </p:sp>
-      <p:sp>
-        <p:nvSpPr>
-          <p:cNvPr id="46" name="矩形 45"/>
-          <p:cNvSpPr/>
-          <p:nvPr/>
-        </p:nvSpPr>
-        <p:spPr>
-          <a:xfrm>
-            <a:off x="207159" y="3622372"/>
-            <a:ext cx="8810896" cy="3046988"/>
-          </a:xfrm>
-          <a:prstGeom prst="rect">
-            <a:avLst/>
-          </a:prstGeom>
-        </p:spPr>
-        <p:txBody>
-          <a:bodyPr wrap="square">
-            <a:spAutoFit/>
-          </a:bodyPr>
-          <a:lstStyle/>
-          <a:p>
-            <a:pPr marL="285750" indent="-285750">
-              <a:lnSpc>
-                <a:spcPct val="150000"/>
-              </a:lnSpc>
-              <a:buFont typeface="Wingdings" pitchFamily="2" charset="2"/>
-              <a:buChar char="n"/>
-            </a:pPr>
-            <a:r>
-              <a:rPr lang="zh-CN" altLang="en-US" sz="1400" b="1" dirty="0">
-                <a:solidFill>
-                  <a:schemeClr val="tx1"/>
-                </a:solidFill>
-                <a:latin typeface="微软雅黑" pitchFamily="34" charset="-122"/>
-                <a:ea typeface="微软雅黑" pitchFamily="34" charset="-122"/>
-              </a:rPr>
-              <a:t>缓震</a:t>
-            </a:r>
-            <a:r>
-              <a:rPr lang="en-US" altLang="zh-CN" sz="1400" b="1" dirty="0">
-                <a:solidFill>
-                  <a:schemeClr val="tx1"/>
-                </a:solidFill>
-                <a:latin typeface="微软雅黑" pitchFamily="34" charset="-122"/>
-                <a:ea typeface="微软雅黑" pitchFamily="34" charset="-122"/>
-              </a:rPr>
-              <a:t>&amp;</a:t>
-            </a:r>
-            <a:r>
-              <a:rPr lang="zh-CN" altLang="en-US" sz="1400" b="1" dirty="0">
-                <a:solidFill>
-                  <a:schemeClr val="tx1"/>
-                </a:solidFill>
-                <a:latin typeface="微软雅黑" pitchFamily="34" charset="-122"/>
-                <a:ea typeface="微软雅黑" pitchFamily="34" charset="-122"/>
-              </a:rPr>
-              <a:t>回弹：</a:t>
-            </a:r>
-            <a:r>
-              <a:rPr lang="zh-CN" altLang="en-US" sz="1400" dirty="0">
-                <a:solidFill>
-                  <a:schemeClr val="tx1"/>
-                </a:solidFill>
-                <a:latin typeface="微软雅黑" pitchFamily="34" charset="-122"/>
-                <a:ea typeface="微软雅黑" pitchFamily="34" charset="-122"/>
-              </a:rPr>
-              <a:t>重心较高，尤其在后跟厚度上（更换较薄鞋垫或去掉鞋垫情况好转）、后跟支撑轻微偏弱（</a:t>
-            </a:r>
-            <a:r>
-              <a:rPr lang="en-US" altLang="zh-CN" sz="1400" dirty="0">
-                <a:solidFill>
-                  <a:schemeClr val="tx1"/>
-                </a:solidFill>
-                <a:latin typeface="微软雅黑" pitchFamily="34" charset="-122"/>
-                <a:ea typeface="微软雅黑" pitchFamily="34" charset="-122"/>
-              </a:rPr>
-              <a:t>x1</a:t>
-            </a:r>
-            <a:r>
-              <a:rPr lang="zh-CN" altLang="en-US" sz="1400" dirty="0">
-                <a:solidFill>
-                  <a:schemeClr val="tx1"/>
-                </a:solidFill>
-                <a:latin typeface="微软雅黑" pitchFamily="34" charset="-122"/>
-                <a:ea typeface="微软雅黑" pitchFamily="34" charset="-122"/>
-              </a:rPr>
-              <a:t>）、且存在泄力的情况（木地板上泄力较为明显）。</a:t>
-            </a:r>
-            <a:endParaRPr lang="en-US" altLang="zh-CN" sz="1400" dirty="0">
-              <a:solidFill>
-                <a:schemeClr val="tx1"/>
-              </a:solidFill>
-              <a:latin typeface="微软雅黑" pitchFamily="34" charset="-122"/>
-              <a:ea typeface="微软雅黑" pitchFamily="34" charset="-122"/>
-            </a:endParaRPr>
-          </a:p>
-          <a:p>
-            <a:pPr marL="285750" indent="-285750">
-              <a:lnSpc>
-                <a:spcPct val="150000"/>
-              </a:lnSpc>
-              <a:buFont typeface="Wingdings" pitchFamily="2" charset="2"/>
-              <a:buChar char="n"/>
-            </a:pPr>
-            <a:r>
-              <a:rPr lang="zh-CN" altLang="en-US" sz="1400" b="1" dirty="0">
-                <a:solidFill>
-                  <a:schemeClr val="tx1"/>
-                </a:solidFill>
-                <a:latin typeface="微软雅黑" pitchFamily="34" charset="-122"/>
-                <a:ea typeface="微软雅黑" pitchFamily="34" charset="-122"/>
-              </a:rPr>
-              <a:t>抓地</a:t>
-            </a:r>
-            <a:r>
-              <a:rPr lang="en-US" altLang="zh-CN" sz="1400" b="1" dirty="0">
-                <a:solidFill>
-                  <a:schemeClr val="tx1"/>
-                </a:solidFill>
-                <a:latin typeface="微软雅黑" pitchFamily="34" charset="-122"/>
-                <a:ea typeface="微软雅黑" pitchFamily="34" charset="-122"/>
-              </a:rPr>
-              <a:t>&amp;</a:t>
-            </a:r>
-            <a:r>
-              <a:rPr lang="zh-CN" altLang="en-US" sz="1400" b="1" dirty="0">
-                <a:solidFill>
-                  <a:schemeClr val="tx1"/>
-                </a:solidFill>
-                <a:latin typeface="微软雅黑" pitchFamily="34" charset="-122"/>
-                <a:ea typeface="微软雅黑" pitchFamily="34" charset="-122"/>
-              </a:rPr>
-              <a:t>耐磨：</a:t>
-            </a:r>
-            <a:r>
-              <a:rPr lang="zh-CN" altLang="en-US" sz="1400" dirty="0">
-                <a:solidFill>
-                  <a:schemeClr val="tx1"/>
-                </a:solidFill>
-                <a:latin typeface="微软雅黑" pitchFamily="34" charset="-122"/>
-                <a:ea typeface="微软雅黑" pitchFamily="34" charset="-122"/>
-              </a:rPr>
-              <a:t>抓地较好，无打滑现象，吸灰时抓地性也不错。耐磨情况较好。</a:t>
-            </a:r>
-            <a:endParaRPr lang="en-US" altLang="zh-CN" sz="1400" dirty="0">
-              <a:solidFill>
-                <a:schemeClr val="tx1"/>
-              </a:solidFill>
-              <a:latin typeface="微软雅黑" pitchFamily="34" charset="-122"/>
-              <a:ea typeface="微软雅黑" pitchFamily="34" charset="-122"/>
-            </a:endParaRPr>
-          </a:p>
-          <a:p>
-            <a:pPr marL="285750" indent="-285750">
-              <a:lnSpc>
-                <a:spcPct val="150000"/>
-              </a:lnSpc>
-              <a:buFont typeface="Wingdings" pitchFamily="2" charset="2"/>
-              <a:buChar char="n"/>
-            </a:pPr>
-            <a:r>
-              <a:rPr lang="zh-CN" altLang="en-US" sz="1400" b="1" dirty="0">
-                <a:solidFill>
-                  <a:schemeClr val="tx1"/>
-                </a:solidFill>
-                <a:latin typeface="微软雅黑" pitchFamily="34" charset="-122"/>
-                <a:ea typeface="微软雅黑" pitchFamily="34" charset="-122"/>
-              </a:rPr>
-              <a:t>防侧翻：</a:t>
-            </a:r>
-            <a:r>
-              <a:rPr lang="zh-CN" altLang="en-US" sz="1400" dirty="0">
-                <a:solidFill>
-                  <a:schemeClr val="tx1"/>
-                </a:solidFill>
-                <a:latin typeface="微软雅黑" pitchFamily="34" charset="-122"/>
-                <a:ea typeface="微软雅黑" pitchFamily="34" charset="-122"/>
-              </a:rPr>
-              <a:t>防侧翻点略微靠后，穿着虽影响并不太大，但在有角度的急停与变相时出现不稳定现象。</a:t>
-            </a:r>
-            <a:endParaRPr lang="en-US" altLang="zh-CN" sz="1400" dirty="0">
-              <a:solidFill>
-                <a:schemeClr val="tx1"/>
-              </a:solidFill>
-              <a:latin typeface="微软雅黑" pitchFamily="34" charset="-122"/>
-              <a:ea typeface="微软雅黑" pitchFamily="34" charset="-122"/>
-            </a:endParaRPr>
-          </a:p>
-          <a:p>
-            <a:pPr marL="285750" indent="-285750">
-              <a:lnSpc>
-                <a:spcPct val="150000"/>
-              </a:lnSpc>
-              <a:buFont typeface="Wingdings" pitchFamily="2" charset="2"/>
-              <a:buChar char="n"/>
-            </a:pPr>
-            <a:r>
-              <a:rPr lang="zh-CN" altLang="en-US" sz="1400" b="1" dirty="0">
-                <a:solidFill>
-                  <a:schemeClr val="tx1"/>
-                </a:solidFill>
-                <a:latin typeface="微软雅黑" pitchFamily="34" charset="-122"/>
-                <a:ea typeface="微软雅黑" pitchFamily="34" charset="-122"/>
-              </a:rPr>
-              <a:t>包裹：</a:t>
-            </a:r>
-            <a:r>
-              <a:rPr lang="zh-CN" altLang="en-US" sz="1400" dirty="0">
-                <a:solidFill>
-                  <a:schemeClr val="tx1"/>
-                </a:solidFill>
-                <a:latin typeface="微软雅黑" pitchFamily="34" charset="-122"/>
-                <a:ea typeface="微软雅黑" pitchFamily="34" charset="-122"/>
-              </a:rPr>
-              <a:t>中段包裹良好，前掌以及后跟包裹较弱，后跟出现较为明显的掉跟情况。</a:t>
-            </a:r>
-            <a:endParaRPr lang="en-US" altLang="zh-CN" sz="1400" dirty="0">
-              <a:solidFill>
-                <a:schemeClr val="tx1"/>
-              </a:solidFill>
-              <a:latin typeface="微软雅黑" pitchFamily="34" charset="-122"/>
-              <a:ea typeface="微软雅黑" pitchFamily="34" charset="-122"/>
-            </a:endParaRPr>
-          </a:p>
-          <a:p>
-            <a:pPr marL="285750" indent="-285750">
-              <a:lnSpc>
-                <a:spcPct val="150000"/>
-              </a:lnSpc>
-              <a:buFont typeface="Wingdings" pitchFamily="2" charset="2"/>
-              <a:buChar char="n"/>
-            </a:pPr>
-            <a:r>
-              <a:rPr lang="zh-CN" altLang="en-US" sz="1400" b="1" dirty="0">
-                <a:solidFill>
-                  <a:schemeClr val="tx1"/>
-                </a:solidFill>
-                <a:latin typeface="微软雅黑" pitchFamily="34" charset="-122"/>
-                <a:ea typeface="微软雅黑" pitchFamily="34" charset="-122"/>
-              </a:rPr>
-              <a:t>抗扭</a:t>
-            </a:r>
-            <a:r>
-              <a:rPr lang="en-US" altLang="zh-CN" sz="1400" b="1" dirty="0">
-                <a:solidFill>
-                  <a:schemeClr val="tx1"/>
-                </a:solidFill>
-                <a:latin typeface="微软雅黑" pitchFamily="34" charset="-122"/>
-                <a:ea typeface="微软雅黑" pitchFamily="34" charset="-122"/>
-              </a:rPr>
-              <a:t>&amp;</a:t>
-            </a:r>
-            <a:r>
-              <a:rPr lang="zh-CN" altLang="en-US" sz="1400" b="1" dirty="0">
-                <a:solidFill>
-                  <a:schemeClr val="tx1"/>
-                </a:solidFill>
-                <a:latin typeface="微软雅黑" pitchFamily="34" charset="-122"/>
-                <a:ea typeface="微软雅黑" pitchFamily="34" charset="-122"/>
-              </a:rPr>
-              <a:t>稳定：</a:t>
-            </a:r>
-            <a:r>
-              <a:rPr lang="zh-CN" altLang="en-US" sz="1400" dirty="0">
-                <a:solidFill>
-                  <a:schemeClr val="tx1"/>
-                </a:solidFill>
-                <a:latin typeface="微软雅黑" pitchFamily="34" charset="-122"/>
-                <a:ea typeface="微软雅黑" pitchFamily="34" charset="-122"/>
-              </a:rPr>
-              <a:t>整体脚感偏板，推进感存在但体感上抗扭偏弱，与包裹性有关。前掌较宽，灵活性差一些。</a:t>
-            </a:r>
-            <a:endParaRPr lang="en-US" altLang="zh-CN" sz="1400" dirty="0">
-              <a:solidFill>
-                <a:schemeClr val="tx1"/>
-              </a:solidFill>
-              <a:latin typeface="微软雅黑" pitchFamily="34" charset="-122"/>
-              <a:ea typeface="微软雅黑" pitchFamily="34" charset="-122"/>
-            </a:endParaRPr>
-          </a:p>
-          <a:p>
-            <a:pPr marL="285750" indent="-285750">
-              <a:lnSpc>
-                <a:spcPct val="150000"/>
-              </a:lnSpc>
-              <a:buFont typeface="Wingdings" pitchFamily="2" charset="2"/>
-              <a:buChar char="n"/>
-            </a:pPr>
-            <a:r>
-              <a:rPr lang="zh-CN" altLang="en-US" sz="1400" b="1" dirty="0">
-                <a:solidFill>
-                  <a:schemeClr val="tx1"/>
-                </a:solidFill>
-                <a:latin typeface="微软雅黑" pitchFamily="34" charset="-122"/>
-                <a:ea typeface="微软雅黑" pitchFamily="34" charset="-122"/>
-              </a:rPr>
-              <a:t>轻量化</a:t>
-            </a:r>
-            <a:r>
-              <a:rPr lang="en-US" altLang="zh-CN" sz="1400" b="1" dirty="0">
-                <a:solidFill>
-                  <a:schemeClr val="tx1"/>
-                </a:solidFill>
-                <a:latin typeface="微软雅黑" pitchFamily="34" charset="-122"/>
-                <a:ea typeface="微软雅黑" pitchFamily="34" charset="-122"/>
-              </a:rPr>
-              <a:t>&amp;</a:t>
-            </a:r>
-            <a:r>
-              <a:rPr lang="zh-CN" altLang="en-US" sz="1400" b="1" dirty="0">
-                <a:solidFill>
-                  <a:schemeClr val="tx1"/>
-                </a:solidFill>
-                <a:latin typeface="微软雅黑" pitchFamily="34" charset="-122"/>
-                <a:ea typeface="微软雅黑" pitchFamily="34" charset="-122"/>
-              </a:rPr>
-              <a:t>透气：</a:t>
-            </a:r>
-            <a:r>
-              <a:rPr lang="zh-CN" altLang="en-US" sz="1400" dirty="0">
-                <a:solidFill>
-                  <a:schemeClr val="tx1"/>
-                </a:solidFill>
-                <a:latin typeface="微软雅黑" pitchFamily="34" charset="-122"/>
-                <a:ea typeface="微软雅黑" pitchFamily="34" charset="-122"/>
-              </a:rPr>
-              <a:t>整体轻量化突出，体感重量非常轻，透气性较好，暂未出现烧脚、闷脚现象。</a:t>
-            </a:r>
-            <a:endParaRPr lang="en-US" altLang="zh-CN" sz="1400" dirty="0">
-              <a:solidFill>
-                <a:schemeClr val="tx1"/>
-              </a:solidFill>
-              <a:latin typeface="微软雅黑" pitchFamily="34" charset="-122"/>
-              <a:ea typeface="微软雅黑" pitchFamily="34" charset="-122"/>
-            </a:endParaRPr>
-          </a:p>
-          <a:p>
-            <a:pPr>
-              <a:lnSpc>
-                <a:spcPct val="150000"/>
-              </a:lnSpc>
-            </a:pPr>
-            <a:r>
-              <a:rPr lang="zh-CN" altLang="en-US" sz="1600" b="1" dirty="0">
-                <a:solidFill>
-                  <a:schemeClr val="tx1"/>
-                </a:solidFill>
-                <a:latin typeface="微软雅黑" pitchFamily="34" charset="-122"/>
-                <a:ea typeface="微软雅黑" pitchFamily="34" charset="-122"/>
-              </a:rPr>
-              <a:t>小结：</a:t>
-            </a:r>
-            <a:r>
-              <a:rPr lang="zh-CN" altLang="en-US" sz="1400" dirty="0">
-                <a:solidFill>
-                  <a:schemeClr val="tx1"/>
-                </a:solidFill>
-                <a:latin typeface="微软雅黑" pitchFamily="34" charset="-122"/>
-                <a:ea typeface="微软雅黑" pitchFamily="34" charset="-122"/>
-              </a:rPr>
-              <a:t>锋刺</a:t>
-            </a:r>
-            <a:r>
-              <a:rPr lang="en-US" altLang="zh-CN" sz="1400" dirty="0">
-                <a:solidFill>
-                  <a:schemeClr val="tx1"/>
-                </a:solidFill>
-                <a:latin typeface="微软雅黑" pitchFamily="34" charset="-122"/>
-                <a:ea typeface="微软雅黑" pitchFamily="34" charset="-122"/>
-              </a:rPr>
-              <a:t>7pro</a:t>
-            </a:r>
-            <a:r>
-              <a:rPr lang="zh-CN" altLang="en-US" sz="1400" dirty="0">
-                <a:solidFill>
-                  <a:schemeClr val="tx1"/>
-                </a:solidFill>
-                <a:latin typeface="微软雅黑" pitchFamily="34" charset="-122"/>
-                <a:ea typeface="微软雅黑" pitchFamily="34" charset="-122"/>
-              </a:rPr>
-              <a:t>重量较轻、抓地优秀，但整体重心偏高（鞋垫厚度较厚，且无压缩形变），前、后段包裹较差，进而导致鞋</a:t>
-            </a:r>
-            <a:r>
-              <a:rPr lang="en-US" altLang="zh-CN" sz="1400" dirty="0">
-                <a:solidFill>
-                  <a:schemeClr val="tx1"/>
-                </a:solidFill>
-                <a:latin typeface="微软雅黑" pitchFamily="34" charset="-122"/>
-                <a:ea typeface="微软雅黑" pitchFamily="34" charset="-122"/>
-              </a:rPr>
-              <a:t>-</a:t>
-            </a:r>
-            <a:r>
-              <a:rPr lang="zh-CN" altLang="en-US" sz="1400" dirty="0">
-                <a:solidFill>
-                  <a:schemeClr val="tx1"/>
-                </a:solidFill>
-                <a:latin typeface="微软雅黑" pitchFamily="34" charset="-122"/>
-                <a:ea typeface="微软雅黑" pitchFamily="34" charset="-122"/>
-              </a:rPr>
-              <a:t>脚一体性差、稳定性下降、体感上抗扭性较弱。突破安全性偏弱。</a:t>
-            </a:r>
-            <a:endParaRPr lang="en-US" altLang="zh-CN" sz="1400" dirty="0">
-              <a:solidFill>
-                <a:schemeClr val="tx1"/>
-              </a:solidFill>
-              <a:latin typeface="微软雅黑" pitchFamily="34" charset="-122"/>
-              <a:ea typeface="微软雅黑" pitchFamily="34" charset="-122"/>
-            </a:endParaRPr>
-          </a:p>
-        </p:txBody>
-      </p:sp>
-      <p:sp>
-        <p:nvSpPr>
-          <p:cNvPr id="22" name="矩形 21"/>
-          <p:cNvSpPr/>
-          <p:nvPr/>
-        </p:nvSpPr>
-        <p:spPr>
-          <a:xfrm>
-            <a:off x="271256" y="2472676"/>
-            <a:ext cx="2683300" cy="854080"/>
-          </a:xfrm>
-          <a:prstGeom prst="rect">
-            <a:avLst/>
-          </a:prstGeom>
-        </p:spPr>
-        <p:txBody>
-          <a:bodyPr wrap="square">
-            <a:spAutoFit/>
-          </a:bodyPr>
-          <a:lstStyle/>
-          <a:p>
-            <a:pPr>
-              <a:lnSpc>
-                <a:spcPct val="150000"/>
-              </a:lnSpc>
-            </a:pPr>
-            <a:r>
-              <a:rPr lang="zh-CN" altLang="en-US" sz="1100" dirty="0">
-                <a:solidFill>
-                  <a:schemeClr val="tx1"/>
-                </a:solidFill>
-                <a:latin typeface="微软雅黑" pitchFamily="34" charset="-122"/>
-                <a:ea typeface="微软雅黑" pitchFamily="34" charset="-122"/>
-              </a:rPr>
-              <a:t>试穿人数：</a:t>
-            </a:r>
-            <a:r>
-              <a:rPr lang="en-US" altLang="zh-CN" sz="1100" dirty="0">
-                <a:solidFill>
-                  <a:schemeClr val="tx1"/>
-                </a:solidFill>
-                <a:latin typeface="微软雅黑" pitchFamily="34" charset="-122"/>
-                <a:ea typeface="微软雅黑" pitchFamily="34" charset="-122"/>
-              </a:rPr>
-              <a:t>5</a:t>
-            </a:r>
-            <a:r>
-              <a:rPr lang="zh-CN" altLang="en-US" sz="1100" dirty="0">
-                <a:solidFill>
-                  <a:schemeClr val="tx1"/>
-                </a:solidFill>
-                <a:latin typeface="微软雅黑" pitchFamily="34" charset="-122"/>
-                <a:ea typeface="微软雅黑" pitchFamily="34" charset="-122"/>
-              </a:rPr>
-              <a:t>人 </a:t>
-            </a:r>
-            <a:r>
-              <a:rPr lang="en-US" altLang="zh-CN" sz="1100" dirty="0">
-                <a:solidFill>
-                  <a:schemeClr val="tx1"/>
-                </a:solidFill>
-                <a:latin typeface="微软雅黑" pitchFamily="34" charset="-122"/>
-                <a:ea typeface="微软雅黑" pitchFamily="34" charset="-122"/>
-              </a:rPr>
-              <a:t>+</a:t>
-            </a:r>
-          </a:p>
-          <a:p>
-            <a:pPr>
-              <a:lnSpc>
-                <a:spcPct val="150000"/>
-              </a:lnSpc>
-            </a:pPr>
-            <a:r>
-              <a:rPr lang="zh-CN" altLang="en-US" sz="1100" dirty="0">
-                <a:solidFill>
-                  <a:schemeClr val="tx1"/>
-                </a:solidFill>
-                <a:latin typeface="微软雅黑" pitchFamily="34" charset="-122"/>
-                <a:ea typeface="微软雅黑" pitchFamily="34" charset="-122"/>
-              </a:rPr>
-              <a:t>测试者体重：</a:t>
-            </a:r>
-            <a:r>
-              <a:rPr lang="en-US" altLang="zh-CN" sz="1100" dirty="0">
-                <a:solidFill>
-                  <a:schemeClr val="tx1"/>
-                </a:solidFill>
-                <a:latin typeface="微软雅黑" pitchFamily="34" charset="-122"/>
-                <a:ea typeface="微软雅黑" pitchFamily="34" charset="-122"/>
-              </a:rPr>
-              <a:t>75±5KG</a:t>
-            </a:r>
-          </a:p>
-          <a:p>
-            <a:pPr>
-              <a:lnSpc>
-                <a:spcPct val="150000"/>
-              </a:lnSpc>
-            </a:pPr>
-            <a:r>
-              <a:rPr lang="zh-CN" altLang="en-US" sz="1100" dirty="0">
-                <a:solidFill>
-                  <a:schemeClr val="tx1"/>
-                </a:solidFill>
-                <a:latin typeface="微软雅黑" pitchFamily="34" charset="-122"/>
-                <a:ea typeface="微软雅黑" pitchFamily="34" charset="-122"/>
-              </a:rPr>
-              <a:t>测试者球场定位：小前锋、重型后卫</a:t>
-            </a:r>
-          </a:p>
-        </p:txBody>
-      </p:sp>
-      <p:cxnSp>
-        <p:nvCxnSpPr>
-          <p:cNvPr id="33" name="直接连接符 32"/>
-          <p:cNvCxnSpPr/>
-          <p:nvPr/>
-        </p:nvCxnSpPr>
-        <p:spPr>
-          <a:xfrm flipV="1">
-            <a:off x="12039600" y="1916832"/>
-            <a:ext cx="0" cy="4824536"/>
-          </a:xfrm>
-          <a:prstGeom prst="line">
-            <a:avLst/>
-          </a:prstGeom>
-          <a:ln>
-            <a:solidFill>
-              <a:schemeClr val="tx1"/>
-            </a:solidFill>
-          </a:ln>
-          <a:effectLst/>
-        </p:spPr>
-        <p:style>
-          <a:lnRef idx="2">
-            <a:schemeClr val="dk1"/>
-          </a:lnRef>
-          <a:fillRef idx="0">
-            <a:schemeClr val="dk1"/>
-          </a:fillRef>
-          <a:effectRef idx="1">
-            <a:schemeClr val="dk1"/>
-          </a:effectRef>
-          <a:fontRef idx="minor">
-            <a:schemeClr val="tx1"/>
-          </a:fontRef>
-        </p:style>
-      </p:cxnSp>
-      <p:cxnSp>
-        <p:nvCxnSpPr>
-          <p:cNvPr id="34" name="直接连接符 33"/>
-          <p:cNvCxnSpPr/>
-          <p:nvPr/>
-        </p:nvCxnSpPr>
-        <p:spPr>
-          <a:xfrm>
-            <a:off x="11424592" y="1927895"/>
-            <a:ext cx="629075" cy="0"/>
-          </a:xfrm>
-          <a:prstGeom prst="line">
-            <a:avLst/>
-          </a:prstGeom>
-          <a:ln>
-            <a:solidFill>
-              <a:schemeClr val="tx1"/>
-            </a:solidFill>
-          </a:ln>
-          <a:effectLst/>
-        </p:spPr>
-        <p:style>
-          <a:lnRef idx="2">
-            <a:schemeClr val="dk1"/>
-          </a:lnRef>
-          <a:fillRef idx="0">
-            <a:schemeClr val="dk1"/>
-          </a:fillRef>
-          <a:effectRef idx="1">
-            <a:schemeClr val="dk1"/>
-          </a:effectRef>
-          <a:fontRef idx="minor">
-            <a:schemeClr val="tx1"/>
-          </a:fontRef>
-        </p:style>
-      </p:cxnSp>
-      <p:sp>
-        <p:nvSpPr>
-          <p:cNvPr id="54" name="矩形 53"/>
-          <p:cNvSpPr/>
-          <p:nvPr/>
-        </p:nvSpPr>
-        <p:spPr>
-          <a:xfrm>
-            <a:off x="238103" y="3192962"/>
-            <a:ext cx="1210588" cy="418191"/>
-          </a:xfrm>
-          <a:prstGeom prst="rect">
-            <a:avLst/>
-          </a:prstGeom>
-        </p:spPr>
-        <p:txBody>
           <a:bodyPr wrap="none">
             <a:spAutoFit/>
           </a:bodyPr>
           <a:lstStyle/>
           <a:p>
-            <a:pPr>
-              <a:lnSpc>
-                <a:spcPct val="150000"/>
-              </a:lnSpc>
-            </a:pPr>
-            <a:r>
-              <a:rPr lang="zh-CN" altLang="en-US" sz="1600" b="1" dirty="0">
-                <a:solidFill>
-                  <a:schemeClr val="tx1"/>
+            <a:r>
+              <a:rPr lang="zh-CN" altLang="en-US" sz="2800" b="1" dirty="0">
+                <a:solidFill>
+                  <a:schemeClr val="bg1"/>
                 </a:solidFill>
                 <a:latin typeface="微软雅黑" pitchFamily="34" charset="-122"/>
                 <a:ea typeface="微软雅黑" pitchFamily="34" charset="-122"/>
               </a:rPr>
-              <a:t>实战反馈：</a:t>
-            </a:r>
-          </a:p>
-        </p:txBody>
-      </p:sp>
-      <p:sp>
-        <p:nvSpPr>
-          <p:cNvPr id="40" name="矩形 39"/>
-          <p:cNvSpPr/>
-          <p:nvPr/>
-        </p:nvSpPr>
-        <p:spPr>
-          <a:xfrm>
-            <a:off x="9120337" y="1918630"/>
-            <a:ext cx="2919262" cy="306174"/>
-          </a:xfrm>
-          <a:prstGeom prst="rect">
-            <a:avLst/>
-          </a:prstGeom>
-          <a:solidFill>
-            <a:schemeClr val="dk1"/>
-          </a:solidFill>
-          <a:ln>
-            <a:noFill/>
-          </a:ln>
-        </p:spPr>
-        <p:style>
-          <a:lnRef idx="0">
-            <a:scrgbClr r="0" g="0" b="0"/>
-          </a:lnRef>
-          <a:fillRef idx="0">
-            <a:scrgbClr r="0" g="0" b="0"/>
-          </a:fillRef>
-          <a:effectRef idx="0">
-            <a:scrgbClr r="0" g="0" b="0"/>
-          </a:effectRef>
-          <a:fontRef idx="minor">
-            <a:schemeClr val="lt1"/>
-          </a:fontRef>
-        </p:style>
-        <p:txBody>
-          <a:bodyPr wrap="square">
-            <a:spAutoFit/>
-          </a:bodyPr>
-          <a:lstStyle/>
-          <a:p>
-            <a:pPr algn="ctr">
-              <a:lnSpc>
-                <a:spcPct val="150000"/>
-              </a:lnSpc>
-            </a:pPr>
-            <a:r>
-              <a:rPr lang="zh-CN" altLang="en-US" sz="1050" b="1" dirty="0">
-                <a:solidFill>
-                  <a:schemeClr val="bg1"/>
-                </a:solidFill>
-                <a:latin typeface="微软雅黑" pitchFamily="34" charset="-122"/>
-                <a:ea typeface="微软雅黑" pitchFamily="34" charset="-122"/>
-              </a:rPr>
-              <a:t>锋刺</a:t>
-            </a:r>
-            <a:r>
-              <a:rPr lang="en-US" altLang="zh-CN" sz="1050" b="1" dirty="0">
-                <a:solidFill>
-                  <a:schemeClr val="bg1"/>
-                </a:solidFill>
-                <a:latin typeface="微软雅黑" pitchFamily="34" charset="-122"/>
-                <a:ea typeface="微软雅黑" pitchFamily="34" charset="-122"/>
-              </a:rPr>
-              <a:t>7pro vs </a:t>
-            </a:r>
-            <a:r>
-              <a:rPr lang="zh-CN" altLang="en-US" sz="1050" b="1" dirty="0">
-                <a:solidFill>
-                  <a:schemeClr val="bg1"/>
-                </a:solidFill>
-                <a:latin typeface="微软雅黑" pitchFamily="34" charset="-122"/>
-                <a:ea typeface="微软雅黑" pitchFamily="34" charset="-122"/>
-              </a:rPr>
-              <a:t>锋刺</a:t>
-            </a:r>
-            <a:r>
-              <a:rPr lang="en-US" altLang="zh-CN" sz="1050" b="1" dirty="0">
-                <a:solidFill>
-                  <a:schemeClr val="bg1"/>
-                </a:solidFill>
-                <a:latin typeface="微软雅黑" pitchFamily="34" charset="-122"/>
-                <a:ea typeface="微软雅黑" pitchFamily="34" charset="-122"/>
-              </a:rPr>
-              <a:t>6pro</a:t>
-            </a:r>
-            <a:endParaRPr lang="zh-CN" altLang="en-US" sz="1050" b="1" dirty="0">
-              <a:solidFill>
-                <a:schemeClr val="bg1"/>
-              </a:solidFill>
-              <a:latin typeface="微软雅黑" pitchFamily="34" charset="-122"/>
-              <a:ea typeface="微软雅黑" pitchFamily="34" charset="-122"/>
-            </a:endParaRPr>
-          </a:p>
-        </p:txBody>
-      </p:sp>
-      <p:cxnSp>
-        <p:nvCxnSpPr>
-          <p:cNvPr id="37" name="直接连接符 36"/>
-          <p:cNvCxnSpPr/>
-          <p:nvPr/>
-        </p:nvCxnSpPr>
-        <p:spPr>
-          <a:xfrm>
-            <a:off x="1199456" y="3573016"/>
-            <a:ext cx="2160240" cy="0"/>
-          </a:xfrm>
-          <a:prstGeom prst="line">
-            <a:avLst/>
-          </a:prstGeom>
-          <a:ln w="9525" cap="flat" cmpd="sng" algn="ctr">
-            <a:solidFill>
-              <a:schemeClr val="dk1"/>
-            </a:solidFill>
-            <a:prstDash val="dash"/>
-            <a:round/>
-            <a:headEnd type="none" w="med" len="med"/>
-            <a:tailEnd type="none" w="med" len="med"/>
-          </a:ln>
-        </p:spPr>
-        <p:style>
-          <a:lnRef idx="0">
-            <a:scrgbClr r="0" g="0" b="0"/>
-          </a:lnRef>
-          <a:fillRef idx="0">
-            <a:scrgbClr r="0" g="0" b="0"/>
-          </a:fillRef>
-          <a:effectRef idx="0">
-            <a:scrgbClr r="0" g="0" b="0"/>
-          </a:effectRef>
-          <a:fontRef idx="minor">
-            <a:schemeClr val="tx1"/>
-          </a:fontRef>
-        </p:style>
-      </p:cxnSp>
-      <p:cxnSp>
-        <p:nvCxnSpPr>
-          <p:cNvPr id="39" name="直接连接符 38"/>
-          <p:cNvCxnSpPr/>
-          <p:nvPr/>
-        </p:nvCxnSpPr>
-        <p:spPr>
-          <a:xfrm>
-            <a:off x="198110" y="3573016"/>
-            <a:ext cx="2160240" cy="0"/>
-          </a:xfrm>
-          <a:prstGeom prst="line">
-            <a:avLst/>
-          </a:prstGeom>
-          <a:ln>
-            <a:solidFill>
-              <a:schemeClr val="tx1"/>
-            </a:solidFill>
-          </a:ln>
-          <a:effectLst/>
-        </p:spPr>
-        <p:style>
-          <a:lnRef idx="2">
-            <a:schemeClr val="dk1"/>
-          </a:lnRef>
-          <a:fillRef idx="0">
-            <a:schemeClr val="dk1"/>
-          </a:fillRef>
-          <a:effectRef idx="1">
-            <a:schemeClr val="dk1"/>
-          </a:effectRef>
-          <a:fontRef idx="minor">
-            <a:schemeClr val="tx1"/>
-          </a:fontRef>
-        </p:style>
-      </p:cxnSp>
-      <p:pic>
-        <p:nvPicPr>
-          <p:cNvPr id="41" name="图片 40"/>
-          <p:cNvPicPr>
-            <a:picLocks noChangeAspect="1"/>
-          </p:cNvPicPr>
-          <p:nvPr/>
-        </p:nvPicPr>
-        <p:blipFill>
-          <a:blip r:embed="rId3" cstate="print">
-            <a:extLst>
-              <a:ext uri="{28A0092B-C50C-407E-A947-70E740481C1C}">
-                <a14:useLocalDpi xmlns:a14="http://schemas.microsoft.com/office/drawing/2010/main" val="0"/>
-              </a:ext>
-            </a:extLst>
-          </a:blip>
-          <a:stretch>
-            <a:fillRect/>
-          </a:stretch>
-        </p:blipFill>
-        <p:spPr>
-          <a:xfrm>
-            <a:off x="265110" y="1329338"/>
-            <a:ext cx="2137244" cy="1046814"/>
-          </a:xfrm>
-          <a:prstGeom prst="rect">
-            <a:avLst/>
-          </a:prstGeom>
-          <a:effectLst>
-            <a:innerShdw blurRad="63500" dist="50800" dir="2700000">
-              <a:prstClr val="black">
-                <a:alpha val="50000"/>
-              </a:prstClr>
-            </a:innerShdw>
-          </a:effectLst>
-        </p:spPr>
-      </p:pic>
-      <p:sp>
-        <p:nvSpPr>
-          <p:cNvPr id="52" name="矩形 51"/>
-          <p:cNvSpPr/>
-          <p:nvPr/>
-        </p:nvSpPr>
-        <p:spPr>
-          <a:xfrm>
-            <a:off x="9113837" y="4325051"/>
-            <a:ext cx="2939829" cy="306174"/>
-          </a:xfrm>
-          <a:prstGeom prst="rect">
-            <a:avLst/>
-          </a:prstGeom>
-          <a:solidFill>
-            <a:schemeClr val="dk1"/>
-          </a:solidFill>
-          <a:ln>
-            <a:noFill/>
-          </a:ln>
-        </p:spPr>
-        <p:style>
-          <a:lnRef idx="0">
-            <a:scrgbClr r="0" g="0" b="0"/>
-          </a:lnRef>
-          <a:fillRef idx="0">
-            <a:scrgbClr r="0" g="0" b="0"/>
-          </a:fillRef>
-          <a:effectRef idx="0">
-            <a:scrgbClr r="0" g="0" b="0"/>
-          </a:effectRef>
-          <a:fontRef idx="minor">
-            <a:schemeClr val="lt1"/>
-          </a:fontRef>
-        </p:style>
-        <p:txBody>
-          <a:bodyPr wrap="square">
-            <a:spAutoFit/>
-          </a:bodyPr>
-          <a:lstStyle/>
-          <a:p>
-            <a:pPr algn="ctr">
-              <a:lnSpc>
-                <a:spcPct val="150000"/>
-              </a:lnSpc>
-            </a:pPr>
-            <a:r>
-              <a:rPr lang="zh-CN" altLang="en-US" sz="1050" b="1" dirty="0">
-                <a:solidFill>
-                  <a:schemeClr val="bg1"/>
-                </a:solidFill>
-                <a:latin typeface="微软雅黑" pitchFamily="34" charset="-122"/>
-                <a:ea typeface="微软雅黑" pitchFamily="34" charset="-122"/>
-              </a:rPr>
-              <a:t>锋刺</a:t>
-            </a:r>
-            <a:r>
-              <a:rPr lang="en-US" altLang="zh-CN" sz="1050" b="1" dirty="0">
-                <a:solidFill>
-                  <a:schemeClr val="bg1"/>
-                </a:solidFill>
-                <a:latin typeface="微软雅黑" pitchFamily="34" charset="-122"/>
-                <a:ea typeface="微软雅黑" pitchFamily="34" charset="-122"/>
-              </a:rPr>
-              <a:t>7pro vs GTcut2.0</a:t>
-            </a:r>
-            <a:endParaRPr lang="zh-CN" altLang="en-US" sz="1050" b="1" dirty="0">
-              <a:solidFill>
-                <a:schemeClr val="bg1"/>
-              </a:solidFill>
-              <a:latin typeface="微软雅黑" pitchFamily="34" charset="-122"/>
-              <a:ea typeface="微软雅黑" pitchFamily="34" charset="-122"/>
-            </a:endParaRPr>
-          </a:p>
-        </p:txBody>
-      </p:sp>
-      <p:graphicFrame>
-        <p:nvGraphicFramePr>
-          <p:cNvPr id="53" name="图表 52"/>
-          <p:cNvGraphicFramePr/>
-          <p:nvPr/>
-        </p:nvGraphicFramePr>
-        <p:xfrm>
-          <a:off x="2395105" y="381440"/>
-          <a:ext cx="4572000" cy="2945315"/>
-        </p:xfrm>
-        <a:graphic>
-          <a:graphicData uri="http://schemas.openxmlformats.org/drawingml/2006/chart">
-            <c:chart xmlns:c="http://schemas.openxmlformats.org/drawingml/2006/chart" xmlns:r="http://schemas.openxmlformats.org/officeDocument/2006/relationships" r:id="rId4"/>
-          </a:graphicData>
-        </a:graphic>
-      </p:graphicFrame>
-      <p:pic>
-        <p:nvPicPr>
-          <p:cNvPr id="38" name="图片 37"/>
-          <p:cNvPicPr>
-            <a:picLocks noChangeAspect="1"/>
-          </p:cNvPicPr>
-          <p:nvPr/>
-        </p:nvPicPr>
-        <p:blipFill rotWithShape="1">
-          <a:blip r:embed="rId5"/>
-          <a:srcRect l="22202" r="22678"/>
-          <a:stretch>
-            <a:fillRect/>
-          </a:stretch>
-        </p:blipFill>
-        <p:spPr>
-          <a:xfrm>
-            <a:off x="9335797" y="2306418"/>
-            <a:ext cx="1841882" cy="2004971"/>
-          </a:xfrm>
-          <a:prstGeom prst="rect">
-            <a:avLst/>
-          </a:prstGeom>
-        </p:spPr>
-      </p:pic>
-      <p:sp>
-        <p:nvSpPr>
-          <p:cNvPr id="55" name="矩形 54"/>
-          <p:cNvSpPr/>
-          <p:nvPr/>
-        </p:nvSpPr>
-        <p:spPr>
-          <a:xfrm>
-            <a:off x="11208568" y="3057909"/>
-            <a:ext cx="144016" cy="144028"/>
-          </a:xfrm>
-          <a:prstGeom prst="rect">
-            <a:avLst/>
-          </a:prstGeom>
-          <a:solidFill>
-            <a:srgbClr val="D7253F"/>
-          </a:solidFill>
-          <a:ln>
-            <a:noFill/>
-          </a:ln>
-        </p:spPr>
-        <p:style>
-          <a:lnRef idx="2">
-            <a:schemeClr val="dk1">
-              <a:shade val="50000"/>
-            </a:schemeClr>
-          </a:lnRef>
-          <a:fillRef idx="1">
-            <a:schemeClr val="dk1"/>
-          </a:fillRef>
-          <a:effectRef idx="0">
-            <a:schemeClr val="dk1"/>
-          </a:effectRef>
-          <a:fontRef idx="minor">
-            <a:schemeClr val="lt1"/>
-          </a:fontRef>
-        </p:style>
-        <p:txBody>
-          <a:bodyPr rot="0" spcFirstLastPara="1" vertOverflow="overflow" horzOverflow="overflow" vert="horz" wrap="square" lIns="45719" tIns="45719" rIns="45719" bIns="45719" numCol="1" spcCol="38100" rtlCol="0" anchor="ctr">
-            <a:spAutoFit/>
-          </a:bodyPr>
-          <a:lstStyle/>
-          <a:p>
-            <a:pPr marL="0" marR="0" indent="0" algn="l" defTabSz="457200" rtl="0" fontAlgn="auto" latinLnBrk="0" hangingPunct="0">
-              <a:lnSpc>
-                <a:spcPct val="100000"/>
-              </a:lnSpc>
-              <a:spcBef>
-                <a:spcPts val="0"/>
-              </a:spcBef>
-              <a:spcAft>
-                <a:spcPts val="0"/>
-              </a:spcAft>
-              <a:buClrTx/>
-              <a:buSzTx/>
-              <a:buFontTx/>
-              <a:buNone/>
-            </a:pPr>
-            <a:endParaRPr kumimoji="0" lang="zh-CN" altLang="en-US" sz="1800" b="0" i="0" u="none" strike="noStrike" cap="none" spc="0" normalizeH="0" baseline="0">
-              <a:ln>
-                <a:noFill/>
-              </a:ln>
-              <a:solidFill>
-                <a:srgbClr val="000000"/>
-              </a:solidFill>
-              <a:effectLst/>
-              <a:uFillTx/>
-              <a:latin typeface="Arial"/>
-              <a:ea typeface="Arial"/>
-              <a:cs typeface="Arial"/>
-              <a:sym typeface="Arial"/>
-            </a:endParaRPr>
-          </a:p>
-        </p:txBody>
-      </p:sp>
-      <p:sp>
-        <p:nvSpPr>
-          <p:cNvPr id="56" name="矩形 55"/>
-          <p:cNvSpPr/>
-          <p:nvPr/>
-        </p:nvSpPr>
-        <p:spPr>
-          <a:xfrm>
-            <a:off x="11208568" y="3323331"/>
-            <a:ext cx="144016" cy="144028"/>
-          </a:xfrm>
-          <a:prstGeom prst="rect">
-            <a:avLst/>
-          </a:prstGeom>
-          <a:solidFill>
-            <a:srgbClr val="CACACA"/>
-          </a:solidFill>
-          <a:ln>
-            <a:noFill/>
-          </a:ln>
-        </p:spPr>
-        <p:style>
-          <a:lnRef idx="2">
-            <a:schemeClr val="dk1">
-              <a:shade val="50000"/>
-            </a:schemeClr>
-          </a:lnRef>
-          <a:fillRef idx="1">
-            <a:schemeClr val="dk1"/>
-          </a:fillRef>
-          <a:effectRef idx="0">
-            <a:schemeClr val="dk1"/>
-          </a:effectRef>
-          <a:fontRef idx="minor">
-            <a:schemeClr val="lt1"/>
-          </a:fontRef>
-        </p:style>
-        <p:txBody>
-          <a:bodyPr rot="0" spcFirstLastPara="1" vertOverflow="overflow" horzOverflow="overflow" vert="horz" wrap="square" lIns="45719" tIns="45719" rIns="45719" bIns="45719" numCol="1" spcCol="38100" rtlCol="0" anchor="ctr">
-            <a:spAutoFit/>
-          </a:bodyPr>
-          <a:lstStyle/>
-          <a:p>
-            <a:pPr marL="0" marR="0" indent="0" algn="l" defTabSz="457200" rtl="0" fontAlgn="auto" latinLnBrk="0" hangingPunct="0">
-              <a:lnSpc>
-                <a:spcPct val="100000"/>
-              </a:lnSpc>
-              <a:spcBef>
-                <a:spcPts val="0"/>
-              </a:spcBef>
-              <a:spcAft>
-                <a:spcPts val="0"/>
-              </a:spcAft>
-              <a:buClrTx/>
-              <a:buSzTx/>
-              <a:buFontTx/>
-              <a:buNone/>
-            </a:pPr>
-            <a:endParaRPr kumimoji="0" lang="zh-CN" altLang="en-US" sz="1800" b="0" i="0" u="none" strike="noStrike" cap="none" spc="0" normalizeH="0" baseline="0">
-              <a:ln>
-                <a:noFill/>
-              </a:ln>
-              <a:solidFill>
-                <a:srgbClr val="000000"/>
-              </a:solidFill>
-              <a:effectLst/>
-              <a:uFillTx/>
-              <a:latin typeface="Arial"/>
-              <a:ea typeface="Arial"/>
-              <a:cs typeface="Arial"/>
-              <a:sym typeface="Arial"/>
-            </a:endParaRPr>
-          </a:p>
-        </p:txBody>
-      </p:sp>
-      <p:sp>
-        <p:nvSpPr>
-          <p:cNvPr id="57" name="矩形 56"/>
-          <p:cNvSpPr/>
-          <p:nvPr/>
-        </p:nvSpPr>
-        <p:spPr>
-          <a:xfrm>
-            <a:off x="11340339" y="3011856"/>
-            <a:ext cx="673582" cy="230832"/>
-          </a:xfrm>
-          <a:prstGeom prst="rect">
-            <a:avLst/>
-          </a:prstGeom>
-        </p:spPr>
-        <p:txBody>
-          <a:bodyPr wrap="none">
-            <a:spAutoFit/>
-          </a:bodyPr>
-          <a:lstStyle/>
-          <a:p>
-            <a:r>
-              <a:rPr lang="zh-CN" altLang="en-US" sz="900" dirty="0">
-                <a:solidFill>
-                  <a:schemeClr val="tx1"/>
-                </a:solidFill>
-                <a:latin typeface="微软雅黑" pitchFamily="34" charset="-122"/>
-                <a:ea typeface="微软雅黑" pitchFamily="34" charset="-122"/>
-              </a:rPr>
-              <a:t>锋刺</a:t>
-            </a:r>
-            <a:r>
-              <a:rPr lang="en-US" altLang="zh-CN" sz="900" dirty="0">
-                <a:solidFill>
-                  <a:schemeClr val="tx1"/>
-                </a:solidFill>
-                <a:latin typeface="微软雅黑" pitchFamily="34" charset="-122"/>
-                <a:ea typeface="微软雅黑" pitchFamily="34" charset="-122"/>
-              </a:rPr>
-              <a:t>7pro</a:t>
-            </a:r>
-            <a:endParaRPr lang="zh-CN" altLang="en-US" sz="900" dirty="0"/>
-          </a:p>
-        </p:txBody>
-      </p:sp>
-      <p:sp>
-        <p:nvSpPr>
-          <p:cNvPr id="58" name="矩形 57"/>
-          <p:cNvSpPr/>
-          <p:nvPr/>
-        </p:nvSpPr>
-        <p:spPr>
-          <a:xfrm>
-            <a:off x="11340339" y="3286720"/>
-            <a:ext cx="673582" cy="230832"/>
-          </a:xfrm>
-          <a:prstGeom prst="rect">
-            <a:avLst/>
-          </a:prstGeom>
-        </p:spPr>
-        <p:txBody>
-          <a:bodyPr wrap="none">
-            <a:spAutoFit/>
-          </a:bodyPr>
-          <a:lstStyle/>
-          <a:p>
-            <a:r>
-              <a:rPr lang="zh-CN" altLang="en-US" sz="900" dirty="0">
-                <a:solidFill>
-                  <a:schemeClr val="tx1"/>
-                </a:solidFill>
-                <a:latin typeface="微软雅黑" pitchFamily="34" charset="-122"/>
-                <a:ea typeface="微软雅黑" pitchFamily="34" charset="-122"/>
-              </a:rPr>
-              <a:t>锋刺</a:t>
-            </a:r>
-            <a:r>
-              <a:rPr lang="en-US" altLang="zh-CN" sz="900" dirty="0">
-                <a:solidFill>
-                  <a:schemeClr val="tx1"/>
-                </a:solidFill>
-                <a:latin typeface="微软雅黑" pitchFamily="34" charset="-122"/>
-                <a:ea typeface="微软雅黑" pitchFamily="34" charset="-122"/>
-              </a:rPr>
-              <a:t>6pro</a:t>
-            </a:r>
-            <a:endParaRPr lang="zh-CN" altLang="en-US" sz="900" dirty="0"/>
-          </a:p>
-        </p:txBody>
-      </p:sp>
-      <p:pic>
-        <p:nvPicPr>
-          <p:cNvPr id="60" name="图片 59"/>
-          <p:cNvPicPr>
-            <a:picLocks noChangeAspect="1"/>
-          </p:cNvPicPr>
-          <p:nvPr/>
-        </p:nvPicPr>
-        <p:blipFill rotWithShape="1">
-          <a:blip r:embed="rId6"/>
-          <a:srcRect l="22030" r="21276"/>
-          <a:stretch>
-            <a:fillRect/>
-          </a:stretch>
-        </p:blipFill>
-        <p:spPr>
-          <a:xfrm>
-            <a:off x="9342517" y="4699202"/>
-            <a:ext cx="1908343" cy="2019613"/>
-          </a:xfrm>
-          <a:prstGeom prst="rect">
-            <a:avLst/>
-          </a:prstGeom>
-        </p:spPr>
-      </p:pic>
-      <p:sp>
-        <p:nvSpPr>
-          <p:cNvPr id="61" name="矩形 60"/>
-          <p:cNvSpPr/>
-          <p:nvPr/>
-        </p:nvSpPr>
-        <p:spPr>
-          <a:xfrm>
-            <a:off x="11208568" y="5491277"/>
-            <a:ext cx="144016" cy="144028"/>
-          </a:xfrm>
-          <a:prstGeom prst="rect">
-            <a:avLst/>
-          </a:prstGeom>
-          <a:solidFill>
-            <a:srgbClr val="D7253F"/>
-          </a:solidFill>
-          <a:ln>
-            <a:noFill/>
-          </a:ln>
-        </p:spPr>
-        <p:style>
-          <a:lnRef idx="2">
-            <a:schemeClr val="dk1">
-              <a:shade val="50000"/>
-            </a:schemeClr>
-          </a:lnRef>
-          <a:fillRef idx="1">
-            <a:schemeClr val="dk1"/>
-          </a:fillRef>
-          <a:effectRef idx="0">
-            <a:schemeClr val="dk1"/>
-          </a:effectRef>
-          <a:fontRef idx="minor">
-            <a:schemeClr val="lt1"/>
-          </a:fontRef>
-        </p:style>
-        <p:txBody>
-          <a:bodyPr rot="0" spcFirstLastPara="1" vertOverflow="overflow" horzOverflow="overflow" vert="horz" wrap="square" lIns="45719" tIns="45719" rIns="45719" bIns="45719" numCol="1" spcCol="38100" rtlCol="0" anchor="ctr">
-            <a:spAutoFit/>
-          </a:bodyPr>
-          <a:lstStyle/>
-          <a:p>
-            <a:pPr marL="0" marR="0" indent="0" algn="l" defTabSz="457200" rtl="0" fontAlgn="auto" latinLnBrk="0" hangingPunct="0">
-              <a:lnSpc>
-                <a:spcPct val="100000"/>
-              </a:lnSpc>
-              <a:spcBef>
-                <a:spcPts val="0"/>
-              </a:spcBef>
-              <a:spcAft>
-                <a:spcPts val="0"/>
-              </a:spcAft>
-              <a:buClrTx/>
-              <a:buSzTx/>
-              <a:buFontTx/>
-              <a:buNone/>
-            </a:pPr>
-            <a:endParaRPr kumimoji="0" lang="zh-CN" altLang="en-US" sz="1800" b="0" i="0" u="none" strike="noStrike" cap="none" spc="0" normalizeH="0" baseline="0">
-              <a:ln>
-                <a:noFill/>
-              </a:ln>
-              <a:solidFill>
-                <a:srgbClr val="000000"/>
-              </a:solidFill>
-              <a:effectLst/>
-              <a:uFillTx/>
-              <a:latin typeface="Arial"/>
-              <a:ea typeface="Arial"/>
-              <a:cs typeface="Arial"/>
-              <a:sym typeface="Arial"/>
-            </a:endParaRPr>
-          </a:p>
-        </p:txBody>
-      </p:sp>
-      <p:sp>
-        <p:nvSpPr>
-          <p:cNvPr id="62" name="矩形 61"/>
-          <p:cNvSpPr/>
-          <p:nvPr/>
-        </p:nvSpPr>
-        <p:spPr>
-          <a:xfrm>
-            <a:off x="11208568" y="5756699"/>
-            <a:ext cx="144016" cy="144028"/>
-          </a:xfrm>
-          <a:prstGeom prst="rect">
-            <a:avLst/>
-          </a:prstGeom>
-          <a:solidFill>
-            <a:srgbClr val="C3E0FF"/>
-          </a:solidFill>
-          <a:ln>
-            <a:noFill/>
-          </a:ln>
-        </p:spPr>
-        <p:style>
-          <a:lnRef idx="2">
-            <a:schemeClr val="dk1">
-              <a:shade val="50000"/>
-            </a:schemeClr>
-          </a:lnRef>
-          <a:fillRef idx="1">
-            <a:schemeClr val="dk1"/>
-          </a:fillRef>
-          <a:effectRef idx="0">
-            <a:schemeClr val="dk1"/>
-          </a:effectRef>
-          <a:fontRef idx="minor">
-            <a:schemeClr val="lt1"/>
-          </a:fontRef>
-        </p:style>
-        <p:txBody>
-          <a:bodyPr rot="0" spcFirstLastPara="1" vertOverflow="overflow" horzOverflow="overflow" vert="horz" wrap="square" lIns="45719" tIns="45719" rIns="45719" bIns="45719" numCol="1" spcCol="38100" rtlCol="0" anchor="ctr">
-            <a:spAutoFit/>
-          </a:bodyPr>
-          <a:lstStyle/>
-          <a:p>
-            <a:pPr marL="0" marR="0" indent="0" algn="l" defTabSz="457200" rtl="0" fontAlgn="auto" latinLnBrk="0" hangingPunct="0">
-              <a:lnSpc>
-                <a:spcPct val="100000"/>
-              </a:lnSpc>
-              <a:spcBef>
-                <a:spcPts val="0"/>
-              </a:spcBef>
-              <a:spcAft>
-                <a:spcPts val="0"/>
-              </a:spcAft>
-              <a:buClrTx/>
-              <a:buSzTx/>
-              <a:buFontTx/>
-              <a:buNone/>
-            </a:pPr>
-            <a:endParaRPr kumimoji="0" lang="zh-CN" altLang="en-US" sz="1800" b="0" i="0" u="none" strike="noStrike" cap="none" spc="0" normalizeH="0" baseline="0">
-              <a:ln>
-                <a:noFill/>
-              </a:ln>
-              <a:solidFill>
-                <a:srgbClr val="000000"/>
-              </a:solidFill>
-              <a:effectLst/>
-              <a:uFillTx/>
-              <a:latin typeface="Arial"/>
-              <a:ea typeface="Arial"/>
-              <a:cs typeface="Arial"/>
-              <a:sym typeface="Arial"/>
-            </a:endParaRPr>
-          </a:p>
-        </p:txBody>
-      </p:sp>
-      <p:sp>
-        <p:nvSpPr>
-          <p:cNvPr id="63" name="矩形 62"/>
-          <p:cNvSpPr/>
-          <p:nvPr/>
-        </p:nvSpPr>
-        <p:spPr>
-          <a:xfrm>
-            <a:off x="11340339" y="5445224"/>
-            <a:ext cx="673582" cy="230832"/>
-          </a:xfrm>
-          <a:prstGeom prst="rect">
-            <a:avLst/>
-          </a:prstGeom>
-        </p:spPr>
-        <p:txBody>
-          <a:bodyPr wrap="none">
-            <a:spAutoFit/>
-          </a:bodyPr>
-          <a:lstStyle/>
-          <a:p>
-            <a:r>
-              <a:rPr lang="zh-CN" altLang="en-US" sz="900" dirty="0">
-                <a:solidFill>
-                  <a:schemeClr val="tx1"/>
-                </a:solidFill>
-                <a:latin typeface="微软雅黑" pitchFamily="34" charset="-122"/>
-                <a:ea typeface="微软雅黑" pitchFamily="34" charset="-122"/>
-              </a:rPr>
-              <a:t>锋刺</a:t>
-            </a:r>
-            <a:r>
-              <a:rPr lang="en-US" altLang="zh-CN" sz="900" dirty="0">
-                <a:solidFill>
-                  <a:schemeClr val="tx1"/>
-                </a:solidFill>
-                <a:latin typeface="微软雅黑" pitchFamily="34" charset="-122"/>
-                <a:ea typeface="微软雅黑" pitchFamily="34" charset="-122"/>
-              </a:rPr>
-              <a:t>7pro</a:t>
-            </a:r>
-            <a:endParaRPr lang="zh-CN" altLang="en-US" sz="900" dirty="0"/>
-          </a:p>
-        </p:txBody>
-      </p:sp>
-      <p:sp>
-        <p:nvSpPr>
-          <p:cNvPr id="64" name="矩形 63"/>
-          <p:cNvSpPr/>
-          <p:nvPr/>
-        </p:nvSpPr>
-        <p:spPr>
-          <a:xfrm>
-            <a:off x="11340339" y="5720088"/>
-            <a:ext cx="646331" cy="230832"/>
-          </a:xfrm>
-          <a:prstGeom prst="rect">
-            <a:avLst/>
-          </a:prstGeom>
-        </p:spPr>
-        <p:txBody>
-          <a:bodyPr wrap="none">
-            <a:spAutoFit/>
-          </a:bodyPr>
-          <a:lstStyle/>
-          <a:p>
-            <a:r>
-              <a:rPr lang="en-US" altLang="zh-CN" sz="900" dirty="0">
-                <a:solidFill>
-                  <a:schemeClr val="tx1"/>
-                </a:solidFill>
-                <a:latin typeface="微软雅黑" pitchFamily="34" charset="-122"/>
-                <a:ea typeface="微软雅黑" pitchFamily="34" charset="-122"/>
-              </a:rPr>
-              <a:t>Gtcut</a:t>
-            </a:r>
-            <a:r>
-              <a:rPr lang="en-US" altLang="zh-CN" sz="900" dirty="0">
-                <a:ea typeface="微软雅黑" pitchFamily="34" charset="-122"/>
-              </a:rPr>
-              <a:t>2.0</a:t>
-            </a:r>
-            <a:endParaRPr lang="en-US" altLang="zh-CN" sz="900" dirty="0">
-              <a:solidFill>
-                <a:schemeClr val="tx1"/>
-              </a:solidFill>
-              <a:latin typeface="微软雅黑" pitchFamily="34" charset="-122"/>
-              <a:ea typeface="微软雅黑" pitchFamily="34" charset="-122"/>
-            </a:endParaRPr>
-          </a:p>
-        </p:txBody>
-      </p:sp>
-      <p:sp>
-        <p:nvSpPr>
-          <p:cNvPr id="65" name="矩形 64"/>
-          <p:cNvSpPr/>
-          <p:nvPr/>
-        </p:nvSpPr>
-        <p:spPr>
-          <a:xfrm>
-            <a:off x="10130915" y="2204864"/>
-            <a:ext cx="441146" cy="246221"/>
-          </a:xfrm>
-          <a:prstGeom prst="rect">
-            <a:avLst/>
-          </a:prstGeom>
-        </p:spPr>
-        <p:txBody>
-          <a:bodyPr wrap="none">
-            <a:spAutoFit/>
-          </a:bodyPr>
-          <a:lstStyle/>
-          <a:p>
-            <a:r>
-              <a:rPr lang="zh-CN" altLang="en-US" sz="1000" dirty="0">
-                <a:solidFill>
-                  <a:schemeClr val="tx1"/>
-                </a:solidFill>
-                <a:latin typeface="微软雅黑" pitchFamily="34" charset="-122"/>
-                <a:ea typeface="微软雅黑" pitchFamily="34" charset="-122"/>
-              </a:rPr>
-              <a:t>重量</a:t>
-            </a:r>
-            <a:endParaRPr lang="zh-CN" altLang="en-US" sz="1000" dirty="0"/>
-          </a:p>
-        </p:txBody>
-      </p:sp>
-      <p:sp>
-        <p:nvSpPr>
-          <p:cNvPr id="66" name="矩形 65"/>
-          <p:cNvSpPr/>
-          <p:nvPr/>
-        </p:nvSpPr>
-        <p:spPr>
-          <a:xfrm>
-            <a:off x="10946920" y="2700580"/>
-            <a:ext cx="441146" cy="246221"/>
-          </a:xfrm>
-          <a:prstGeom prst="rect">
-            <a:avLst/>
-          </a:prstGeom>
-        </p:spPr>
-        <p:txBody>
-          <a:bodyPr wrap="none">
-            <a:spAutoFit/>
-          </a:bodyPr>
-          <a:lstStyle/>
-          <a:p>
-            <a:r>
-              <a:rPr lang="zh-CN" altLang="en-US" sz="1000" dirty="0">
-                <a:solidFill>
-                  <a:schemeClr val="tx1"/>
-                </a:solidFill>
-                <a:latin typeface="微软雅黑" pitchFamily="34" charset="-122"/>
-                <a:ea typeface="微软雅黑" pitchFamily="34" charset="-122"/>
-              </a:rPr>
-              <a:t>缓震</a:t>
-            </a:r>
-            <a:endParaRPr lang="zh-CN" altLang="en-US" sz="1000" dirty="0"/>
-          </a:p>
-        </p:txBody>
-      </p:sp>
-      <p:sp>
-        <p:nvSpPr>
-          <p:cNvPr id="67" name="矩形 66"/>
-          <p:cNvSpPr/>
-          <p:nvPr/>
-        </p:nvSpPr>
-        <p:spPr>
-          <a:xfrm>
-            <a:off x="10076115" y="4021610"/>
-            <a:ext cx="441146" cy="246221"/>
-          </a:xfrm>
-          <a:prstGeom prst="rect">
-            <a:avLst/>
-          </a:prstGeom>
-        </p:spPr>
-        <p:txBody>
-          <a:bodyPr wrap="none">
-            <a:spAutoFit/>
-          </a:bodyPr>
-          <a:lstStyle/>
-          <a:p>
-            <a:r>
-              <a:rPr lang="zh-CN" altLang="en-US" sz="1000" dirty="0">
-                <a:solidFill>
-                  <a:schemeClr val="tx1"/>
-                </a:solidFill>
-                <a:latin typeface="微软雅黑" pitchFamily="34" charset="-122"/>
-                <a:ea typeface="微软雅黑" pitchFamily="34" charset="-122"/>
-              </a:rPr>
-              <a:t>包裹</a:t>
-            </a:r>
-            <a:endParaRPr lang="zh-CN" altLang="en-US" sz="1000" dirty="0"/>
-          </a:p>
-        </p:txBody>
-      </p:sp>
-      <p:sp>
-        <p:nvSpPr>
-          <p:cNvPr id="68" name="矩形 67"/>
-          <p:cNvSpPr/>
-          <p:nvPr/>
-        </p:nvSpPr>
-        <p:spPr>
-          <a:xfrm>
-            <a:off x="9170412" y="2745886"/>
-            <a:ext cx="441146" cy="246221"/>
-          </a:xfrm>
-          <a:prstGeom prst="rect">
-            <a:avLst/>
-          </a:prstGeom>
-        </p:spPr>
-        <p:txBody>
-          <a:bodyPr wrap="none">
-            <a:spAutoFit/>
-          </a:bodyPr>
-          <a:lstStyle/>
-          <a:p>
-            <a:r>
-              <a:rPr lang="zh-CN" altLang="en-US" sz="1000" dirty="0">
-                <a:solidFill>
-                  <a:schemeClr val="tx1"/>
-                </a:solidFill>
-                <a:latin typeface="微软雅黑" pitchFamily="34" charset="-122"/>
-                <a:ea typeface="微软雅黑" pitchFamily="34" charset="-122"/>
-              </a:rPr>
-              <a:t>刚性</a:t>
-            </a:r>
-            <a:endParaRPr lang="zh-CN" altLang="en-US" sz="1000" dirty="0"/>
-          </a:p>
-        </p:txBody>
-      </p:sp>
-      <p:sp>
-        <p:nvSpPr>
-          <p:cNvPr id="69" name="矩形 68"/>
-          <p:cNvSpPr/>
-          <p:nvPr/>
-        </p:nvSpPr>
-        <p:spPr>
-          <a:xfrm>
-            <a:off x="9183674" y="3642265"/>
-            <a:ext cx="441146" cy="246221"/>
-          </a:xfrm>
-          <a:prstGeom prst="rect">
-            <a:avLst/>
-          </a:prstGeom>
-        </p:spPr>
-        <p:txBody>
-          <a:bodyPr wrap="none">
-            <a:spAutoFit/>
-          </a:bodyPr>
-          <a:lstStyle/>
-          <a:p>
-            <a:r>
-              <a:rPr lang="zh-CN" altLang="en-US" sz="1000" dirty="0">
-                <a:solidFill>
-                  <a:schemeClr val="tx1"/>
-                </a:solidFill>
-                <a:latin typeface="微软雅黑" pitchFamily="34" charset="-122"/>
-                <a:ea typeface="微软雅黑" pitchFamily="34" charset="-122"/>
-              </a:rPr>
-              <a:t>止滑</a:t>
-            </a:r>
-            <a:endParaRPr lang="zh-CN" altLang="en-US" sz="1000" dirty="0"/>
-          </a:p>
-        </p:txBody>
-      </p:sp>
-      <p:sp>
-        <p:nvSpPr>
-          <p:cNvPr id="70" name="矩形 69"/>
-          <p:cNvSpPr/>
-          <p:nvPr/>
-        </p:nvSpPr>
-        <p:spPr>
-          <a:xfrm>
-            <a:off x="10946920" y="3642380"/>
-            <a:ext cx="441146" cy="246221"/>
-          </a:xfrm>
-          <a:prstGeom prst="rect">
-            <a:avLst/>
-          </a:prstGeom>
-        </p:spPr>
-        <p:txBody>
-          <a:bodyPr wrap="none">
-            <a:spAutoFit/>
-          </a:bodyPr>
-          <a:lstStyle/>
-          <a:p>
-            <a:r>
-              <a:rPr lang="zh-CN" altLang="en-US" sz="1000" dirty="0">
-                <a:solidFill>
-                  <a:schemeClr val="tx1"/>
-                </a:solidFill>
-                <a:latin typeface="微软雅黑" pitchFamily="34" charset="-122"/>
-                <a:ea typeface="微软雅黑" pitchFamily="34" charset="-122"/>
-              </a:rPr>
-              <a:t>回弹</a:t>
-            </a:r>
-            <a:endParaRPr lang="zh-CN" altLang="en-US" sz="1000" dirty="0"/>
-          </a:p>
-        </p:txBody>
-      </p:sp>
-      <p:sp>
-        <p:nvSpPr>
-          <p:cNvPr id="71" name="矩形 70"/>
-          <p:cNvSpPr/>
-          <p:nvPr/>
-        </p:nvSpPr>
-        <p:spPr>
-          <a:xfrm>
-            <a:off x="10145117" y="4653136"/>
-            <a:ext cx="441146" cy="246221"/>
-          </a:xfrm>
-          <a:prstGeom prst="rect">
-            <a:avLst/>
-          </a:prstGeom>
-        </p:spPr>
-        <p:txBody>
-          <a:bodyPr wrap="none">
-            <a:spAutoFit/>
-          </a:bodyPr>
-          <a:lstStyle/>
-          <a:p>
-            <a:r>
-              <a:rPr lang="zh-CN" altLang="en-US" sz="1000" dirty="0">
-                <a:solidFill>
-                  <a:schemeClr val="tx1"/>
-                </a:solidFill>
-                <a:latin typeface="微软雅黑" pitchFamily="34" charset="-122"/>
-                <a:ea typeface="微软雅黑" pitchFamily="34" charset="-122"/>
-              </a:rPr>
-              <a:t>重量</a:t>
-            </a:r>
-            <a:endParaRPr lang="zh-CN" altLang="en-US" sz="1000" dirty="0"/>
-          </a:p>
-        </p:txBody>
-      </p:sp>
-      <p:sp>
-        <p:nvSpPr>
-          <p:cNvPr id="72" name="矩形 71"/>
-          <p:cNvSpPr/>
-          <p:nvPr/>
-        </p:nvSpPr>
-        <p:spPr>
-          <a:xfrm>
-            <a:off x="10932287" y="5129037"/>
-            <a:ext cx="441146" cy="246221"/>
-          </a:xfrm>
-          <a:prstGeom prst="rect">
-            <a:avLst/>
-          </a:prstGeom>
-        </p:spPr>
-        <p:txBody>
-          <a:bodyPr wrap="none">
-            <a:spAutoFit/>
-          </a:bodyPr>
-          <a:lstStyle/>
-          <a:p>
-            <a:r>
-              <a:rPr lang="zh-CN" altLang="en-US" sz="1000" dirty="0">
-                <a:solidFill>
-                  <a:schemeClr val="tx1"/>
-                </a:solidFill>
-                <a:latin typeface="微软雅黑" pitchFamily="34" charset="-122"/>
-                <a:ea typeface="微软雅黑" pitchFamily="34" charset="-122"/>
-              </a:rPr>
-              <a:t>缓震</a:t>
-            </a:r>
-            <a:endParaRPr lang="zh-CN" altLang="en-US" sz="1000" dirty="0"/>
-          </a:p>
-        </p:txBody>
-      </p:sp>
-      <p:sp>
-        <p:nvSpPr>
-          <p:cNvPr id="73" name="矩形 72"/>
-          <p:cNvSpPr/>
-          <p:nvPr/>
-        </p:nvSpPr>
-        <p:spPr>
-          <a:xfrm>
-            <a:off x="10076115" y="6472594"/>
-            <a:ext cx="441146" cy="246221"/>
-          </a:xfrm>
-          <a:prstGeom prst="rect">
-            <a:avLst/>
-          </a:prstGeom>
-        </p:spPr>
-        <p:txBody>
-          <a:bodyPr wrap="none">
-            <a:spAutoFit/>
-          </a:bodyPr>
-          <a:lstStyle/>
-          <a:p>
-            <a:r>
-              <a:rPr lang="zh-CN" altLang="en-US" sz="1000" dirty="0">
-                <a:solidFill>
-                  <a:schemeClr val="tx1"/>
-                </a:solidFill>
-                <a:latin typeface="微软雅黑" pitchFamily="34" charset="-122"/>
-                <a:ea typeface="微软雅黑" pitchFamily="34" charset="-122"/>
-              </a:rPr>
-              <a:t>包裹</a:t>
-            </a:r>
-            <a:endParaRPr lang="zh-CN" altLang="en-US" sz="1000" dirty="0"/>
-          </a:p>
-        </p:txBody>
-      </p:sp>
-      <p:sp>
-        <p:nvSpPr>
-          <p:cNvPr id="74" name="矩形 73"/>
-          <p:cNvSpPr/>
-          <p:nvPr/>
-        </p:nvSpPr>
-        <p:spPr>
-          <a:xfrm>
-            <a:off x="9200039" y="5129037"/>
-            <a:ext cx="441146" cy="246221"/>
-          </a:xfrm>
-          <a:prstGeom prst="rect">
-            <a:avLst/>
-          </a:prstGeom>
-        </p:spPr>
-        <p:txBody>
-          <a:bodyPr wrap="none">
-            <a:spAutoFit/>
-          </a:bodyPr>
-          <a:lstStyle/>
-          <a:p>
-            <a:r>
-              <a:rPr lang="zh-CN" altLang="en-US" sz="1000" dirty="0">
-                <a:solidFill>
-                  <a:schemeClr val="tx1"/>
-                </a:solidFill>
-                <a:latin typeface="微软雅黑" pitchFamily="34" charset="-122"/>
-                <a:ea typeface="微软雅黑" pitchFamily="34" charset="-122"/>
-              </a:rPr>
-              <a:t>刚性</a:t>
-            </a:r>
-            <a:endParaRPr lang="zh-CN" altLang="en-US" sz="1000" dirty="0"/>
-          </a:p>
-        </p:txBody>
-      </p:sp>
-      <p:sp>
-        <p:nvSpPr>
-          <p:cNvPr id="75" name="矩形 74"/>
-          <p:cNvSpPr/>
-          <p:nvPr/>
-        </p:nvSpPr>
-        <p:spPr>
-          <a:xfrm>
-            <a:off x="9177953" y="6025416"/>
-            <a:ext cx="441146" cy="246221"/>
-          </a:xfrm>
-          <a:prstGeom prst="rect">
-            <a:avLst/>
-          </a:prstGeom>
-        </p:spPr>
-        <p:txBody>
-          <a:bodyPr wrap="none">
-            <a:spAutoFit/>
-          </a:bodyPr>
-          <a:lstStyle/>
-          <a:p>
-            <a:r>
-              <a:rPr lang="zh-CN" altLang="en-US" sz="1000" dirty="0">
-                <a:solidFill>
-                  <a:schemeClr val="tx1"/>
-                </a:solidFill>
-                <a:latin typeface="微软雅黑" pitchFamily="34" charset="-122"/>
-                <a:ea typeface="微软雅黑" pitchFamily="34" charset="-122"/>
-              </a:rPr>
-              <a:t>止滑</a:t>
-            </a:r>
-            <a:endParaRPr lang="zh-CN" altLang="en-US" sz="1000" dirty="0"/>
-          </a:p>
-        </p:txBody>
-      </p:sp>
-      <p:sp>
-        <p:nvSpPr>
-          <p:cNvPr id="76" name="矩形 75"/>
-          <p:cNvSpPr/>
-          <p:nvPr/>
-        </p:nvSpPr>
-        <p:spPr>
-          <a:xfrm>
-            <a:off x="10947212" y="6025416"/>
-            <a:ext cx="441146" cy="246221"/>
-          </a:xfrm>
-          <a:prstGeom prst="rect">
-            <a:avLst/>
-          </a:prstGeom>
-        </p:spPr>
-        <p:txBody>
-          <a:bodyPr wrap="none">
-            <a:spAutoFit/>
-          </a:bodyPr>
-          <a:lstStyle/>
-          <a:p>
-            <a:r>
-              <a:rPr lang="zh-CN" altLang="en-US" sz="1000" dirty="0">
-                <a:solidFill>
-                  <a:schemeClr val="tx1"/>
-                </a:solidFill>
-                <a:latin typeface="微软雅黑" pitchFamily="34" charset="-122"/>
-                <a:ea typeface="微软雅黑" pitchFamily="34" charset="-122"/>
-              </a:rPr>
-              <a:t>回弹</a:t>
-            </a:r>
-            <a:endParaRPr lang="zh-CN" altLang="en-US" sz="1000" dirty="0"/>
-          </a:p>
-        </p:txBody>
-      </p:sp>
-      <p:sp>
-        <p:nvSpPr>
-          <p:cNvPr id="21" name="矩形 20"/>
-          <p:cNvSpPr/>
-          <p:nvPr/>
-        </p:nvSpPr>
-        <p:spPr>
-          <a:xfrm>
-            <a:off x="10059879" y="381440"/>
-            <a:ext cx="380232" cy="400110"/>
-          </a:xfrm>
-          <a:prstGeom prst="rect">
-            <a:avLst/>
-          </a:prstGeom>
-        </p:spPr>
-        <p:txBody>
-          <a:bodyPr wrap="none">
-            <a:spAutoFit/>
-          </a:bodyPr>
-          <a:lstStyle/>
-          <a:p>
-            <a:r>
-              <a:rPr lang="en-US" altLang="zh-CN" sz="2000" b="1" dirty="0">
-                <a:solidFill>
-                  <a:schemeClr val="bg1"/>
-                </a:solidFill>
-                <a:latin typeface="微软雅黑" pitchFamily="34" charset="-122"/>
-                <a:ea typeface="微软雅黑" pitchFamily="34" charset="-122"/>
-              </a:rPr>
-              <a:t>+</a:t>
-            </a:r>
-            <a:endParaRPr lang="zh-CN" altLang="en-US" sz="2000" dirty="0"/>
-          </a:p>
-        </p:txBody>
-      </p:sp>
-      <p:sp>
-        <p:nvSpPr>
-          <p:cNvPr id="90" name="矩形 89"/>
-          <p:cNvSpPr/>
-          <p:nvPr/>
-        </p:nvSpPr>
-        <p:spPr>
-          <a:xfrm>
-            <a:off x="7336015" y="340788"/>
-            <a:ext cx="792088" cy="792088"/>
-          </a:xfrm>
-          <a:prstGeom prst="rect">
-            <a:avLst/>
-          </a:prstGeom>
-        </p:spPr>
-        <p:style>
-          <a:lnRef idx="2">
-            <a:schemeClr val="dk1">
-              <a:shade val="50000"/>
-            </a:schemeClr>
-          </a:lnRef>
-          <a:fillRef idx="1">
-            <a:schemeClr val="dk1"/>
-          </a:fillRef>
-          <a:effectRef idx="0">
-            <a:schemeClr val="dk1"/>
-          </a:effectRef>
-          <a:fontRef idx="minor">
-            <a:schemeClr val="lt1"/>
-          </a:fontRef>
-        </p:style>
-        <p:txBody>
-          <a:bodyPr rot="0" spcFirstLastPara="1" vertOverflow="overflow" horzOverflow="overflow" vert="horz" wrap="square" lIns="45719" tIns="45719" rIns="45719" bIns="45719" numCol="1" spcCol="38100" rtlCol="0" anchor="ctr">
-            <a:spAutoFit/>
-          </a:bodyPr>
-          <a:lstStyle/>
-          <a:p>
-            <a:pPr marL="0" marR="0" indent="0" algn="l" defTabSz="457200" rtl="0" fontAlgn="auto" latinLnBrk="0" hangingPunct="0">
-              <a:lnSpc>
-                <a:spcPct val="100000"/>
-              </a:lnSpc>
-              <a:spcBef>
-                <a:spcPts val="0"/>
-              </a:spcBef>
-              <a:spcAft>
-                <a:spcPts val="0"/>
-              </a:spcAft>
-              <a:buClrTx/>
-              <a:buSzTx/>
-              <a:buFontTx/>
-              <a:buNone/>
-            </a:pPr>
-            <a:endParaRPr kumimoji="0" lang="zh-CN" altLang="en-US" sz="1800" b="0" i="0" u="none" strike="noStrike" cap="none" spc="0" normalizeH="0" baseline="0">
-              <a:ln>
-                <a:noFill/>
-              </a:ln>
-              <a:solidFill>
-                <a:srgbClr val="000000"/>
-              </a:solidFill>
-              <a:effectLst/>
-              <a:uFillTx/>
-              <a:latin typeface="Arial"/>
-              <a:ea typeface="Arial"/>
-              <a:cs typeface="Arial"/>
-              <a:sym typeface="Arial"/>
-            </a:endParaRPr>
-          </a:p>
-        </p:txBody>
-      </p:sp>
-      <p:sp>
-        <p:nvSpPr>
-          <p:cNvPr id="91" name="矩形 90"/>
-          <p:cNvSpPr/>
-          <p:nvPr/>
-        </p:nvSpPr>
-        <p:spPr>
-          <a:xfrm>
-            <a:off x="7336015" y="1132876"/>
-            <a:ext cx="792088" cy="792088"/>
-          </a:xfrm>
-          <a:prstGeom prst="rect">
-            <a:avLst/>
-          </a:prstGeom>
-        </p:spPr>
-        <p:style>
-          <a:lnRef idx="2">
-            <a:schemeClr val="dk1">
-              <a:shade val="50000"/>
-            </a:schemeClr>
-          </a:lnRef>
-          <a:fillRef idx="1">
-            <a:schemeClr val="dk1"/>
-          </a:fillRef>
-          <a:effectRef idx="0">
-            <a:schemeClr val="dk1"/>
-          </a:effectRef>
-          <a:fontRef idx="minor">
-            <a:schemeClr val="lt1"/>
-          </a:fontRef>
-        </p:style>
-        <p:txBody>
-          <a:bodyPr rot="0" spcFirstLastPara="1" vertOverflow="overflow" horzOverflow="overflow" vert="horz" wrap="square" lIns="45719" tIns="45719" rIns="45719" bIns="45719" numCol="1" spcCol="38100" rtlCol="0" anchor="ctr">
-            <a:spAutoFit/>
-          </a:bodyPr>
-          <a:lstStyle/>
-          <a:p>
-            <a:pPr marL="0" marR="0" indent="0" algn="l" defTabSz="457200" rtl="0" fontAlgn="auto" latinLnBrk="0" hangingPunct="0">
-              <a:lnSpc>
-                <a:spcPct val="100000"/>
-              </a:lnSpc>
-              <a:spcBef>
-                <a:spcPts val="0"/>
-              </a:spcBef>
-              <a:spcAft>
-                <a:spcPts val="0"/>
-              </a:spcAft>
-              <a:buClrTx/>
-              <a:buSzTx/>
-              <a:buFontTx/>
-              <a:buNone/>
-            </a:pPr>
-            <a:endParaRPr kumimoji="0" lang="zh-CN" altLang="en-US" sz="1800" b="0" i="0" u="none" strike="noStrike" cap="none" spc="0" normalizeH="0" baseline="0">
-              <a:ln>
-                <a:noFill/>
-              </a:ln>
-              <a:solidFill>
-                <a:srgbClr val="000000"/>
-              </a:solidFill>
-              <a:effectLst/>
-              <a:uFillTx/>
-              <a:latin typeface="Arial"/>
-              <a:ea typeface="Arial"/>
-              <a:cs typeface="Arial"/>
-              <a:sym typeface="Arial"/>
-            </a:endParaRPr>
-          </a:p>
-        </p:txBody>
-      </p:sp>
-      <p:sp>
-        <p:nvSpPr>
-          <p:cNvPr id="92" name="矩形 91"/>
-          <p:cNvSpPr/>
-          <p:nvPr/>
-        </p:nvSpPr>
-        <p:spPr>
-          <a:xfrm>
-            <a:off x="8128103" y="340788"/>
-            <a:ext cx="432048" cy="792088"/>
-          </a:xfrm>
-          <a:prstGeom prst="rect">
-            <a:avLst/>
-          </a:prstGeom>
-          <a:ln>
-            <a:solidFill>
-              <a:schemeClr val="tx1"/>
-            </a:solidFill>
-          </a:ln>
-          <a:effectLst/>
-        </p:spPr>
-        <p:style>
-          <a:lnRef idx="2">
-            <a:schemeClr val="dk1"/>
-          </a:lnRef>
-          <a:fillRef idx="0">
-            <a:schemeClr val="dk1"/>
-          </a:fillRef>
-          <a:effectRef idx="1">
-            <a:schemeClr val="dk1"/>
-          </a:effectRef>
-          <a:fontRef idx="minor">
-            <a:schemeClr val="tx1"/>
-          </a:fontRef>
-        </p:style>
-        <p:txBody>
-          <a:bodyPr rot="0" spcFirstLastPara="1" vertOverflow="overflow" horzOverflow="overflow" vert="horz" wrap="square" lIns="45719" tIns="45719" rIns="45719" bIns="45719" numCol="1" spcCol="38100" rtlCol="0" anchor="ctr">
-            <a:spAutoFit/>
-          </a:bodyPr>
-          <a:lstStyle/>
-          <a:p>
-            <a:pPr marL="0" marR="0" indent="0" algn="l" defTabSz="457200" rtl="0" fontAlgn="auto" latinLnBrk="0" hangingPunct="0">
-              <a:lnSpc>
-                <a:spcPct val="100000"/>
-              </a:lnSpc>
-              <a:spcBef>
-                <a:spcPts val="0"/>
-              </a:spcBef>
-              <a:spcAft>
-                <a:spcPts val="0"/>
-              </a:spcAft>
-              <a:buClrTx/>
-              <a:buSzTx/>
-              <a:buFontTx/>
-              <a:buNone/>
-            </a:pPr>
-            <a:endParaRPr kumimoji="0" lang="zh-CN" altLang="en-US" sz="1800" b="0" i="0" u="none" strike="noStrike" cap="none" spc="0" normalizeH="0" baseline="0">
-              <a:ln>
-                <a:noFill/>
-              </a:ln>
-              <a:solidFill>
-                <a:srgbClr val="000000"/>
-              </a:solidFill>
-              <a:effectLst/>
-              <a:uFillTx/>
-              <a:latin typeface="Arial"/>
-              <a:ea typeface="Arial"/>
-              <a:cs typeface="Arial"/>
-              <a:sym typeface="Arial"/>
-            </a:endParaRPr>
-          </a:p>
-        </p:txBody>
-      </p:sp>
-      <p:sp>
-        <p:nvSpPr>
-          <p:cNvPr id="93" name="矩形 92"/>
-          <p:cNvSpPr/>
-          <p:nvPr/>
-        </p:nvSpPr>
-        <p:spPr>
-          <a:xfrm>
-            <a:off x="8128103" y="1132876"/>
-            <a:ext cx="432048" cy="792088"/>
-          </a:xfrm>
-          <a:prstGeom prst="rect">
-            <a:avLst/>
-          </a:prstGeom>
-          <a:ln>
-            <a:solidFill>
-              <a:schemeClr val="tx1"/>
-            </a:solidFill>
-          </a:ln>
-          <a:effectLst/>
-        </p:spPr>
-        <p:style>
-          <a:lnRef idx="2">
-            <a:schemeClr val="dk1"/>
-          </a:lnRef>
-          <a:fillRef idx="0">
-            <a:schemeClr val="dk1"/>
-          </a:fillRef>
-          <a:effectRef idx="1">
-            <a:schemeClr val="dk1"/>
-          </a:effectRef>
-          <a:fontRef idx="minor">
-            <a:schemeClr val="tx1"/>
-          </a:fontRef>
-        </p:style>
-        <p:txBody>
-          <a:bodyPr rot="0" spcFirstLastPara="1" vertOverflow="overflow" horzOverflow="overflow" vert="horz" wrap="square" lIns="45719" tIns="45719" rIns="45719" bIns="45719" numCol="1" spcCol="38100" rtlCol="0" anchor="ctr">
-            <a:spAutoFit/>
-          </a:bodyPr>
-          <a:lstStyle/>
-          <a:p>
-            <a:pPr marL="0" marR="0" indent="0" algn="l" defTabSz="457200" rtl="0" fontAlgn="auto" latinLnBrk="0" hangingPunct="0">
-              <a:lnSpc>
-                <a:spcPct val="100000"/>
-              </a:lnSpc>
-              <a:spcBef>
-                <a:spcPts val="0"/>
-              </a:spcBef>
-              <a:spcAft>
-                <a:spcPts val="0"/>
-              </a:spcAft>
-              <a:buClrTx/>
-              <a:buSzTx/>
-              <a:buFontTx/>
-              <a:buNone/>
-            </a:pPr>
-            <a:endParaRPr kumimoji="0" lang="zh-CN" altLang="en-US" sz="1800" b="0" i="0" u="none" strike="noStrike" cap="none" spc="0" normalizeH="0" baseline="0">
-              <a:ln>
-                <a:noFill/>
-              </a:ln>
-              <a:solidFill>
-                <a:srgbClr val="000000"/>
-              </a:solidFill>
-              <a:effectLst/>
-              <a:uFillTx/>
-              <a:latin typeface="Arial"/>
-              <a:ea typeface="Arial"/>
-              <a:cs typeface="Arial"/>
-              <a:sym typeface="Arial"/>
-            </a:endParaRPr>
-          </a:p>
-        </p:txBody>
-      </p:sp>
-      <p:cxnSp>
-        <p:nvCxnSpPr>
-          <p:cNvPr id="94" name="直接连接符 93"/>
-          <p:cNvCxnSpPr/>
-          <p:nvPr/>
-        </p:nvCxnSpPr>
-        <p:spPr>
-          <a:xfrm flipH="1">
-            <a:off x="7336015" y="1132876"/>
-            <a:ext cx="792088" cy="0"/>
-          </a:xfrm>
-          <a:prstGeom prst="line">
-            <a:avLst/>
-          </a:prstGeom>
-          <a:ln>
-            <a:solidFill>
-              <a:schemeClr val="bg1"/>
-            </a:solidFill>
-          </a:ln>
-          <a:effectLst/>
-        </p:spPr>
-        <p:style>
-          <a:lnRef idx="2">
-            <a:schemeClr val="dk1"/>
-          </a:lnRef>
-          <a:fillRef idx="0">
-            <a:schemeClr val="dk1"/>
-          </a:fillRef>
-          <a:effectRef idx="1">
-            <a:schemeClr val="dk1"/>
-          </a:effectRef>
-          <a:fontRef idx="minor">
-            <a:schemeClr val="tx1"/>
-          </a:fontRef>
-        </p:style>
-      </p:cxnSp>
-      <p:sp>
-        <p:nvSpPr>
-          <p:cNvPr id="95" name="矩形 94"/>
-          <p:cNvSpPr/>
-          <p:nvPr/>
-        </p:nvSpPr>
-        <p:spPr>
-          <a:xfrm>
-            <a:off x="7482686" y="444445"/>
-            <a:ext cx="494046" cy="584775"/>
-          </a:xfrm>
-          <a:prstGeom prst="rect">
-            <a:avLst/>
-          </a:prstGeom>
-        </p:spPr>
-        <p:txBody>
-          <a:bodyPr wrap="none">
-            <a:spAutoFit/>
-          </a:bodyPr>
-          <a:lstStyle/>
-          <a:p>
-            <a:r>
-              <a:rPr lang="en-US" altLang="zh-CN" sz="3200" b="1" dirty="0">
-                <a:solidFill>
-                  <a:schemeClr val="bg1"/>
-                </a:solidFill>
-                <a:latin typeface="微软雅黑" pitchFamily="34" charset="-122"/>
-                <a:ea typeface="微软雅黑" pitchFamily="34" charset="-122"/>
-              </a:rPr>
-              <a:t>A</a:t>
-            </a:r>
-            <a:endParaRPr lang="zh-CN" altLang="en-US" sz="3200" b="1" dirty="0">
-              <a:solidFill>
-                <a:schemeClr val="bg1"/>
-              </a:solidFill>
-            </a:endParaRPr>
-          </a:p>
-        </p:txBody>
-      </p:sp>
-      <p:sp>
-        <p:nvSpPr>
-          <p:cNvPr id="96" name="矩形 95"/>
-          <p:cNvSpPr/>
-          <p:nvPr/>
-        </p:nvSpPr>
-        <p:spPr>
-          <a:xfrm>
-            <a:off x="7482686" y="1236533"/>
-            <a:ext cx="465192" cy="584775"/>
-          </a:xfrm>
-          <a:prstGeom prst="rect">
-            <a:avLst/>
-          </a:prstGeom>
-        </p:spPr>
-        <p:txBody>
-          <a:bodyPr wrap="none">
-            <a:spAutoFit/>
-          </a:bodyPr>
-          <a:lstStyle/>
-          <a:p>
-            <a:r>
-              <a:rPr lang="en-US" altLang="zh-CN" sz="3200" b="1" dirty="0">
-                <a:solidFill>
-                  <a:schemeClr val="bg1"/>
-                </a:solidFill>
-                <a:latin typeface="微软雅黑" pitchFamily="34" charset="-122"/>
-                <a:ea typeface="微软雅黑" pitchFamily="34" charset="-122"/>
-              </a:rPr>
-              <a:t>B</a:t>
-            </a:r>
-            <a:endParaRPr lang="zh-CN" altLang="en-US" sz="3200" b="1" dirty="0">
-              <a:solidFill>
-                <a:schemeClr val="bg1"/>
-              </a:solidFill>
-            </a:endParaRPr>
-          </a:p>
-        </p:txBody>
-      </p:sp>
-      <p:sp>
-        <p:nvSpPr>
-          <p:cNvPr id="97" name="矩形 96"/>
-          <p:cNvSpPr/>
-          <p:nvPr/>
-        </p:nvSpPr>
-        <p:spPr>
-          <a:xfrm>
-            <a:off x="7786616" y="1128810"/>
-            <a:ext cx="360996" cy="369332"/>
-          </a:xfrm>
-          <a:prstGeom prst="rect">
-            <a:avLst/>
-          </a:prstGeom>
-        </p:spPr>
-        <p:txBody>
-          <a:bodyPr wrap="none">
-            <a:spAutoFit/>
-          </a:bodyPr>
-          <a:lstStyle/>
-          <a:p>
-            <a:r>
-              <a:rPr lang="en-US" altLang="zh-CN" b="1" dirty="0">
-                <a:solidFill>
-                  <a:schemeClr val="bg1"/>
-                </a:solidFill>
-                <a:latin typeface="微软雅黑" pitchFamily="34" charset="-122"/>
-                <a:ea typeface="微软雅黑" pitchFamily="34" charset="-122"/>
-              </a:rPr>
-              <a:t>+</a:t>
-            </a:r>
-            <a:endParaRPr lang="zh-CN" altLang="en-US" dirty="0"/>
-          </a:p>
-        </p:txBody>
-      </p:sp>
-      <p:sp>
-        <p:nvSpPr>
-          <p:cNvPr id="98" name="矩形 97"/>
-          <p:cNvSpPr/>
-          <p:nvPr/>
-        </p:nvSpPr>
-        <p:spPr>
-          <a:xfrm>
-            <a:off x="7786616" y="332656"/>
-            <a:ext cx="296876" cy="400110"/>
-          </a:xfrm>
-          <a:prstGeom prst="rect">
-            <a:avLst/>
-          </a:prstGeom>
-        </p:spPr>
-        <p:txBody>
-          <a:bodyPr wrap="none">
-            <a:spAutoFit/>
-          </a:bodyPr>
-          <a:lstStyle/>
-          <a:p>
-            <a:r>
-              <a:rPr lang="en-US" altLang="zh-CN" sz="2000" b="1" dirty="0">
-                <a:solidFill>
-                  <a:schemeClr val="bg1"/>
-                </a:solidFill>
-                <a:latin typeface="微软雅黑" pitchFamily="34" charset="-122"/>
-                <a:ea typeface="微软雅黑" pitchFamily="34" charset="-122"/>
-              </a:rPr>
-              <a:t>-</a:t>
-            </a:r>
-            <a:endParaRPr lang="zh-CN" altLang="en-US" sz="2000" dirty="0"/>
-          </a:p>
-        </p:txBody>
-      </p:sp>
-      <p:sp>
-        <p:nvSpPr>
-          <p:cNvPr id="99" name="矩形 98"/>
-          <p:cNvSpPr/>
-          <p:nvPr/>
-        </p:nvSpPr>
-        <p:spPr>
-          <a:xfrm>
-            <a:off x="8164107" y="332656"/>
-            <a:ext cx="360040" cy="787523"/>
-          </a:xfrm>
-          <a:prstGeom prst="rect">
-            <a:avLst/>
-          </a:prstGeom>
-        </p:spPr>
-        <p:txBody>
-          <a:bodyPr wrap="square">
-            <a:spAutoFit/>
-          </a:bodyPr>
-          <a:lstStyle/>
-          <a:p>
-            <a:pPr>
-              <a:lnSpc>
-                <a:spcPct val="150000"/>
-              </a:lnSpc>
-            </a:pPr>
-            <a:r>
-              <a:rPr lang="zh-CN" altLang="en-US" sz="1600" b="1" dirty="0">
-                <a:solidFill>
-                  <a:schemeClr val="tx1"/>
-                </a:solidFill>
-                <a:latin typeface="微软雅黑" pitchFamily="34" charset="-122"/>
-                <a:ea typeface="微软雅黑" pitchFamily="34" charset="-122"/>
-              </a:rPr>
-              <a:t>后卫</a:t>
-            </a:r>
-            <a:endParaRPr lang="en-US" altLang="zh-CN" sz="1600" b="1" dirty="0">
-              <a:solidFill>
-                <a:schemeClr val="tx1"/>
-              </a:solidFill>
-              <a:latin typeface="微软雅黑" pitchFamily="34" charset="-122"/>
-              <a:ea typeface="微软雅黑" pitchFamily="34" charset="-122"/>
-            </a:endParaRPr>
-          </a:p>
-        </p:txBody>
-      </p:sp>
-      <p:sp>
-        <p:nvSpPr>
-          <p:cNvPr id="100" name="矩形 99"/>
-          <p:cNvSpPr/>
-          <p:nvPr/>
-        </p:nvSpPr>
-        <p:spPr>
-          <a:xfrm>
-            <a:off x="8164107" y="1094202"/>
-            <a:ext cx="360040" cy="787523"/>
-          </a:xfrm>
-          <a:prstGeom prst="rect">
-            <a:avLst/>
-          </a:prstGeom>
-        </p:spPr>
-        <p:txBody>
-          <a:bodyPr wrap="square">
-            <a:spAutoFit/>
-          </a:bodyPr>
-          <a:lstStyle/>
-          <a:p>
-            <a:pPr>
-              <a:lnSpc>
-                <a:spcPct val="150000"/>
-              </a:lnSpc>
-            </a:pPr>
-            <a:r>
-              <a:rPr lang="zh-CN" altLang="en-US" sz="1600" b="1" dirty="0">
-                <a:solidFill>
-                  <a:schemeClr val="tx1"/>
-                </a:solidFill>
-                <a:latin typeface="微软雅黑" pitchFamily="34" charset="-122"/>
-                <a:ea typeface="微软雅黑" pitchFamily="34" charset="-122"/>
-              </a:rPr>
-              <a:t>小前</a:t>
-            </a:r>
-            <a:endParaRPr lang="en-US" altLang="zh-CN" sz="1600" b="1" dirty="0">
-              <a:solidFill>
-                <a:schemeClr val="tx1"/>
-              </a:solidFill>
-              <a:latin typeface="微软雅黑" pitchFamily="34" charset="-122"/>
-              <a:ea typeface="微软雅黑" pitchFamily="34" charset="-122"/>
-            </a:endParaRPr>
-          </a:p>
-        </p:txBody>
-      </p:sp>
-      <p:sp>
-        <p:nvSpPr>
-          <p:cNvPr id="101" name="矩形 100"/>
-          <p:cNvSpPr/>
-          <p:nvPr/>
-        </p:nvSpPr>
-        <p:spPr>
-          <a:xfrm>
-            <a:off x="7334576" y="1929030"/>
-            <a:ext cx="792088" cy="792088"/>
-          </a:xfrm>
-          <a:prstGeom prst="rect">
-            <a:avLst/>
-          </a:prstGeom>
-        </p:spPr>
-        <p:style>
-          <a:lnRef idx="2">
-            <a:schemeClr val="dk1">
-              <a:shade val="50000"/>
-            </a:schemeClr>
-          </a:lnRef>
-          <a:fillRef idx="1">
-            <a:schemeClr val="dk1"/>
-          </a:fillRef>
-          <a:effectRef idx="0">
-            <a:schemeClr val="dk1"/>
-          </a:effectRef>
-          <a:fontRef idx="minor">
-            <a:schemeClr val="lt1"/>
-          </a:fontRef>
-        </p:style>
-        <p:txBody>
-          <a:bodyPr rot="0" spcFirstLastPara="1" vertOverflow="overflow" horzOverflow="overflow" vert="horz" wrap="square" lIns="45719" tIns="45719" rIns="45719" bIns="45719" numCol="1" spcCol="38100" rtlCol="0" anchor="ctr">
-            <a:spAutoFit/>
-          </a:bodyPr>
-          <a:lstStyle/>
-          <a:p>
-            <a:pPr marL="0" marR="0" indent="0" algn="l" defTabSz="457200" rtl="0" fontAlgn="auto" latinLnBrk="0" hangingPunct="0">
-              <a:lnSpc>
-                <a:spcPct val="100000"/>
-              </a:lnSpc>
-              <a:spcBef>
-                <a:spcPts val="0"/>
-              </a:spcBef>
-              <a:spcAft>
-                <a:spcPts val="0"/>
-              </a:spcAft>
-              <a:buClrTx/>
-              <a:buSzTx/>
-              <a:buFontTx/>
-              <a:buNone/>
-            </a:pPr>
-            <a:endParaRPr kumimoji="0" lang="zh-CN" altLang="en-US" sz="1800" b="0" i="0" u="none" strike="noStrike" cap="none" spc="0" normalizeH="0" baseline="0">
-              <a:ln>
-                <a:noFill/>
-              </a:ln>
-              <a:solidFill>
-                <a:srgbClr val="000000"/>
-              </a:solidFill>
-              <a:effectLst/>
-              <a:uFillTx/>
-              <a:latin typeface="Arial"/>
-              <a:ea typeface="Arial"/>
-              <a:cs typeface="Arial"/>
-              <a:sym typeface="Arial"/>
-            </a:endParaRPr>
-          </a:p>
-        </p:txBody>
-      </p:sp>
-      <p:sp>
-        <p:nvSpPr>
-          <p:cNvPr id="102" name="矩形 101"/>
-          <p:cNvSpPr/>
-          <p:nvPr/>
-        </p:nvSpPr>
-        <p:spPr>
-          <a:xfrm>
-            <a:off x="8126664" y="1929030"/>
-            <a:ext cx="432048" cy="792088"/>
-          </a:xfrm>
-          <a:prstGeom prst="rect">
-            <a:avLst/>
-          </a:prstGeom>
-          <a:ln>
-            <a:solidFill>
-              <a:schemeClr val="tx1"/>
-            </a:solidFill>
-          </a:ln>
-          <a:effectLst/>
-        </p:spPr>
-        <p:style>
-          <a:lnRef idx="2">
-            <a:schemeClr val="dk1"/>
-          </a:lnRef>
-          <a:fillRef idx="0">
-            <a:schemeClr val="dk1"/>
-          </a:fillRef>
-          <a:effectRef idx="1">
-            <a:schemeClr val="dk1"/>
-          </a:effectRef>
-          <a:fontRef idx="minor">
-            <a:schemeClr val="tx1"/>
-          </a:fontRef>
-        </p:style>
-        <p:txBody>
-          <a:bodyPr rot="0" spcFirstLastPara="1" vertOverflow="overflow" horzOverflow="overflow" vert="horz" wrap="square" lIns="45719" tIns="45719" rIns="45719" bIns="45719" numCol="1" spcCol="38100" rtlCol="0" anchor="ctr">
-            <a:spAutoFit/>
-          </a:bodyPr>
-          <a:lstStyle/>
-          <a:p>
-            <a:pPr marL="0" marR="0" indent="0" algn="l" defTabSz="457200" rtl="0" fontAlgn="auto" latinLnBrk="0" hangingPunct="0">
-              <a:lnSpc>
-                <a:spcPct val="100000"/>
-              </a:lnSpc>
-              <a:spcBef>
-                <a:spcPts val="0"/>
-              </a:spcBef>
-              <a:spcAft>
-                <a:spcPts val="0"/>
-              </a:spcAft>
-              <a:buClrTx/>
-              <a:buSzTx/>
-              <a:buFontTx/>
-              <a:buNone/>
-            </a:pPr>
-            <a:endParaRPr kumimoji="0" lang="zh-CN" altLang="en-US" sz="1800" b="0" i="0" u="none" strike="noStrike" cap="none" spc="0" normalizeH="0" baseline="0">
-              <a:ln>
-                <a:noFill/>
-              </a:ln>
-              <a:solidFill>
-                <a:srgbClr val="000000"/>
-              </a:solidFill>
-              <a:effectLst/>
-              <a:uFillTx/>
-              <a:latin typeface="Arial"/>
-              <a:ea typeface="Arial"/>
-              <a:cs typeface="Arial"/>
-              <a:sym typeface="Arial"/>
-            </a:endParaRPr>
-          </a:p>
-        </p:txBody>
-      </p:sp>
-      <p:cxnSp>
-        <p:nvCxnSpPr>
-          <p:cNvPr id="103" name="直接连接符 102"/>
-          <p:cNvCxnSpPr/>
-          <p:nvPr/>
-        </p:nvCxnSpPr>
-        <p:spPr>
-          <a:xfrm flipH="1">
-            <a:off x="7334576" y="1929030"/>
-            <a:ext cx="792088" cy="0"/>
-          </a:xfrm>
-          <a:prstGeom prst="line">
-            <a:avLst/>
-          </a:prstGeom>
-          <a:ln>
-            <a:solidFill>
-              <a:schemeClr val="bg1"/>
-            </a:solidFill>
-          </a:ln>
-          <a:effectLst/>
-        </p:spPr>
-        <p:style>
-          <a:lnRef idx="2">
-            <a:schemeClr val="dk1"/>
-          </a:lnRef>
-          <a:fillRef idx="0">
-            <a:schemeClr val="dk1"/>
-          </a:fillRef>
-          <a:effectRef idx="1">
-            <a:schemeClr val="dk1"/>
-          </a:effectRef>
-          <a:fontRef idx="minor">
-            <a:schemeClr val="tx1"/>
-          </a:fontRef>
-        </p:style>
-      </p:cxnSp>
-      <p:sp>
-        <p:nvSpPr>
-          <p:cNvPr id="104" name="矩形 103"/>
-          <p:cNvSpPr/>
-          <p:nvPr/>
-        </p:nvSpPr>
-        <p:spPr>
-          <a:xfrm>
-            <a:off x="7481247" y="2032687"/>
-            <a:ext cx="465192" cy="584775"/>
-          </a:xfrm>
-          <a:prstGeom prst="rect">
-            <a:avLst/>
-          </a:prstGeom>
-        </p:spPr>
-        <p:txBody>
-          <a:bodyPr wrap="none">
-            <a:spAutoFit/>
-          </a:bodyPr>
-          <a:lstStyle/>
-          <a:p>
-            <a:r>
-              <a:rPr lang="en-US" altLang="zh-CN" sz="3200" b="1" dirty="0">
-                <a:solidFill>
-                  <a:schemeClr val="bg1"/>
-                </a:solidFill>
-                <a:latin typeface="微软雅黑" pitchFamily="34" charset="-122"/>
-                <a:ea typeface="微软雅黑" pitchFamily="34" charset="-122"/>
-              </a:rPr>
-              <a:t>B</a:t>
-            </a:r>
-            <a:endParaRPr lang="zh-CN" altLang="en-US" sz="3200" b="1" dirty="0">
-              <a:solidFill>
-                <a:schemeClr val="bg1"/>
-              </a:solidFill>
-            </a:endParaRPr>
-          </a:p>
-        </p:txBody>
-      </p:sp>
-      <p:sp>
-        <p:nvSpPr>
-          <p:cNvPr id="106" name="矩形 105"/>
-          <p:cNvSpPr/>
-          <p:nvPr/>
-        </p:nvSpPr>
-        <p:spPr>
-          <a:xfrm>
-            <a:off x="8162668" y="1903074"/>
-            <a:ext cx="360040" cy="787523"/>
-          </a:xfrm>
-          <a:prstGeom prst="rect">
-            <a:avLst/>
-          </a:prstGeom>
-        </p:spPr>
-        <p:txBody>
-          <a:bodyPr wrap="square">
-            <a:spAutoFit/>
-          </a:bodyPr>
-          <a:lstStyle/>
-          <a:p>
-            <a:pPr>
-              <a:lnSpc>
-                <a:spcPct val="150000"/>
-              </a:lnSpc>
-            </a:pPr>
-            <a:r>
-              <a:rPr lang="zh-CN" altLang="en-US" sz="1600" b="1" dirty="0">
-                <a:solidFill>
-                  <a:schemeClr val="tx1"/>
-                </a:solidFill>
-                <a:latin typeface="微软雅黑" pitchFamily="34" charset="-122"/>
-                <a:ea typeface="微软雅黑" pitchFamily="34" charset="-122"/>
-              </a:rPr>
-              <a:t>突破</a:t>
-            </a:r>
-            <a:endParaRPr lang="en-US" altLang="zh-CN" sz="1600" b="1" dirty="0">
-              <a:solidFill>
-                <a:schemeClr val="tx1"/>
-              </a:solidFill>
-              <a:latin typeface="微软雅黑" pitchFamily="34" charset="-122"/>
-              <a:ea typeface="微软雅黑" pitchFamily="34" charset="-122"/>
-            </a:endParaRPr>
-          </a:p>
-        </p:txBody>
-      </p:sp>
-      <p:sp>
-        <p:nvSpPr>
-          <p:cNvPr id="107" name="矩形 106"/>
-          <p:cNvSpPr/>
-          <p:nvPr/>
-        </p:nvSpPr>
-        <p:spPr>
-          <a:xfrm>
-            <a:off x="7334576" y="2721117"/>
-            <a:ext cx="792088" cy="792088"/>
-          </a:xfrm>
-          <a:prstGeom prst="rect">
-            <a:avLst/>
-          </a:prstGeom>
-        </p:spPr>
-        <p:style>
-          <a:lnRef idx="2">
-            <a:schemeClr val="dk1">
-              <a:shade val="50000"/>
-            </a:schemeClr>
-          </a:lnRef>
-          <a:fillRef idx="1">
-            <a:schemeClr val="dk1"/>
-          </a:fillRef>
-          <a:effectRef idx="0">
-            <a:schemeClr val="dk1"/>
-          </a:effectRef>
-          <a:fontRef idx="minor">
-            <a:schemeClr val="lt1"/>
-          </a:fontRef>
-        </p:style>
-        <p:txBody>
-          <a:bodyPr rot="0" spcFirstLastPara="1" vertOverflow="overflow" horzOverflow="overflow" vert="horz" wrap="square" lIns="45719" tIns="45719" rIns="45719" bIns="45719" numCol="1" spcCol="38100" rtlCol="0" anchor="ctr">
-            <a:spAutoFit/>
-          </a:bodyPr>
-          <a:lstStyle/>
-          <a:p>
-            <a:pPr marL="0" marR="0" indent="0" algn="l" defTabSz="457200" rtl="0" fontAlgn="auto" latinLnBrk="0" hangingPunct="0">
-              <a:lnSpc>
-                <a:spcPct val="100000"/>
-              </a:lnSpc>
-              <a:spcBef>
-                <a:spcPts val="0"/>
-              </a:spcBef>
-              <a:spcAft>
-                <a:spcPts val="0"/>
-              </a:spcAft>
-              <a:buClrTx/>
-              <a:buSzTx/>
-              <a:buFontTx/>
-              <a:buNone/>
-            </a:pPr>
-            <a:endParaRPr kumimoji="0" lang="zh-CN" altLang="en-US" sz="1800" b="0" i="0" u="none" strike="noStrike" cap="none" spc="0" normalizeH="0" baseline="0">
-              <a:ln>
-                <a:noFill/>
-              </a:ln>
-              <a:solidFill>
-                <a:srgbClr val="000000"/>
-              </a:solidFill>
-              <a:effectLst/>
-              <a:uFillTx/>
-              <a:latin typeface="Arial"/>
-              <a:ea typeface="Arial"/>
-              <a:cs typeface="Arial"/>
-              <a:sym typeface="Arial"/>
-            </a:endParaRPr>
-          </a:p>
-        </p:txBody>
-      </p:sp>
-      <p:sp>
-        <p:nvSpPr>
-          <p:cNvPr id="108" name="矩形 107"/>
-          <p:cNvSpPr/>
-          <p:nvPr/>
-        </p:nvSpPr>
-        <p:spPr>
-          <a:xfrm>
-            <a:off x="8126664" y="2721117"/>
-            <a:ext cx="432048" cy="792088"/>
-          </a:xfrm>
-          <a:prstGeom prst="rect">
-            <a:avLst/>
-          </a:prstGeom>
-          <a:ln>
-            <a:solidFill>
-              <a:schemeClr val="tx1"/>
-            </a:solidFill>
-          </a:ln>
-          <a:effectLst/>
-        </p:spPr>
-        <p:style>
-          <a:lnRef idx="2">
-            <a:schemeClr val="dk1"/>
-          </a:lnRef>
-          <a:fillRef idx="0">
-            <a:schemeClr val="dk1"/>
-          </a:fillRef>
-          <a:effectRef idx="1">
-            <a:schemeClr val="dk1"/>
-          </a:effectRef>
-          <a:fontRef idx="minor">
-            <a:schemeClr val="tx1"/>
-          </a:fontRef>
-        </p:style>
-        <p:txBody>
-          <a:bodyPr rot="0" spcFirstLastPara="1" vertOverflow="overflow" horzOverflow="overflow" vert="horz" wrap="square" lIns="45719" tIns="45719" rIns="45719" bIns="45719" numCol="1" spcCol="38100" rtlCol="0" anchor="ctr">
-            <a:spAutoFit/>
-          </a:bodyPr>
-          <a:lstStyle/>
-          <a:p>
-            <a:pPr marL="0" marR="0" indent="0" algn="l" defTabSz="457200" rtl="0" fontAlgn="auto" latinLnBrk="0" hangingPunct="0">
-              <a:lnSpc>
-                <a:spcPct val="100000"/>
-              </a:lnSpc>
-              <a:spcBef>
-                <a:spcPts val="0"/>
-              </a:spcBef>
-              <a:spcAft>
-                <a:spcPts val="0"/>
-              </a:spcAft>
-              <a:buClrTx/>
-              <a:buSzTx/>
-              <a:buFontTx/>
-              <a:buNone/>
-            </a:pPr>
-            <a:endParaRPr kumimoji="0" lang="zh-CN" altLang="en-US" sz="1800" b="0" i="0" u="none" strike="noStrike" cap="none" spc="0" normalizeH="0" baseline="0">
-              <a:ln>
-                <a:noFill/>
-              </a:ln>
-              <a:solidFill>
-                <a:srgbClr val="000000"/>
-              </a:solidFill>
-              <a:effectLst/>
-              <a:uFillTx/>
-              <a:latin typeface="Arial"/>
-              <a:ea typeface="Arial"/>
-              <a:cs typeface="Arial"/>
-              <a:sym typeface="Arial"/>
-            </a:endParaRPr>
-          </a:p>
-        </p:txBody>
-      </p:sp>
-      <p:cxnSp>
-        <p:nvCxnSpPr>
-          <p:cNvPr id="109" name="直接连接符 108"/>
-          <p:cNvCxnSpPr/>
-          <p:nvPr/>
-        </p:nvCxnSpPr>
-        <p:spPr>
-          <a:xfrm flipH="1">
-            <a:off x="7334576" y="2721117"/>
-            <a:ext cx="792088" cy="0"/>
-          </a:xfrm>
-          <a:prstGeom prst="line">
-            <a:avLst/>
-          </a:prstGeom>
-          <a:ln>
-            <a:solidFill>
-              <a:schemeClr val="bg1"/>
-            </a:solidFill>
-          </a:ln>
-          <a:effectLst/>
-        </p:spPr>
-        <p:style>
-          <a:lnRef idx="2">
-            <a:schemeClr val="dk1"/>
-          </a:lnRef>
-          <a:fillRef idx="0">
-            <a:schemeClr val="dk1"/>
-          </a:fillRef>
-          <a:effectRef idx="1">
-            <a:schemeClr val="dk1"/>
-          </a:effectRef>
-          <a:fontRef idx="minor">
-            <a:schemeClr val="tx1"/>
-          </a:fontRef>
-        </p:style>
-      </p:cxnSp>
-      <p:sp>
-        <p:nvSpPr>
-          <p:cNvPr id="110" name="矩形 109"/>
-          <p:cNvSpPr/>
-          <p:nvPr/>
-        </p:nvSpPr>
-        <p:spPr>
-          <a:xfrm>
-            <a:off x="7481247" y="2824774"/>
-            <a:ext cx="481222" cy="584775"/>
-          </a:xfrm>
-          <a:prstGeom prst="rect">
-            <a:avLst/>
-          </a:prstGeom>
-        </p:spPr>
-        <p:txBody>
-          <a:bodyPr wrap="none">
-            <a:spAutoFit/>
-          </a:bodyPr>
-          <a:lstStyle/>
-          <a:p>
-            <a:r>
-              <a:rPr lang="en-US" altLang="zh-CN" sz="3200" b="1" dirty="0">
-                <a:solidFill>
-                  <a:schemeClr val="bg1"/>
-                </a:solidFill>
-              </a:rPr>
-              <a:t>A</a:t>
-            </a:r>
-            <a:endParaRPr lang="zh-CN" altLang="en-US" sz="3200" b="1" dirty="0">
-              <a:solidFill>
-                <a:schemeClr val="bg1"/>
-              </a:solidFill>
-            </a:endParaRPr>
-          </a:p>
-        </p:txBody>
-      </p:sp>
-      <p:sp>
-        <p:nvSpPr>
-          <p:cNvPr id="111" name="矩形 110"/>
-          <p:cNvSpPr/>
-          <p:nvPr/>
-        </p:nvSpPr>
-        <p:spPr>
-          <a:xfrm>
-            <a:off x="7785177" y="2717051"/>
-            <a:ext cx="360996" cy="369332"/>
-          </a:xfrm>
-          <a:prstGeom prst="rect">
-            <a:avLst/>
-          </a:prstGeom>
-        </p:spPr>
-        <p:txBody>
-          <a:bodyPr wrap="none">
-            <a:spAutoFit/>
-          </a:bodyPr>
-          <a:lstStyle/>
-          <a:p>
-            <a:r>
-              <a:rPr lang="en-US" altLang="zh-CN" b="1" dirty="0">
-                <a:solidFill>
-                  <a:schemeClr val="bg1"/>
-                </a:solidFill>
-                <a:latin typeface="微软雅黑" pitchFamily="34" charset="-122"/>
-                <a:ea typeface="微软雅黑" pitchFamily="34" charset="-122"/>
-              </a:rPr>
-              <a:t>+</a:t>
-            </a:r>
-            <a:endParaRPr lang="zh-CN" altLang="en-US" dirty="0"/>
-          </a:p>
-        </p:txBody>
-      </p:sp>
-      <p:sp>
-        <p:nvSpPr>
-          <p:cNvPr id="112" name="矩形 111"/>
-          <p:cNvSpPr/>
-          <p:nvPr/>
-        </p:nvSpPr>
-        <p:spPr>
-          <a:xfrm>
-            <a:off x="8162668" y="2682443"/>
-            <a:ext cx="360040" cy="787523"/>
-          </a:xfrm>
-          <a:prstGeom prst="rect">
-            <a:avLst/>
-          </a:prstGeom>
-        </p:spPr>
-        <p:txBody>
-          <a:bodyPr wrap="square">
-            <a:spAutoFit/>
-          </a:bodyPr>
-          <a:lstStyle/>
-          <a:p>
-            <a:pPr>
-              <a:lnSpc>
-                <a:spcPct val="150000"/>
-              </a:lnSpc>
-            </a:pPr>
-            <a:r>
-              <a:rPr lang="zh-CN" altLang="en-US" sz="1600" b="1" dirty="0">
-                <a:solidFill>
-                  <a:schemeClr val="tx1"/>
-                </a:solidFill>
-                <a:latin typeface="微软雅黑" pitchFamily="34" charset="-122"/>
-                <a:ea typeface="微软雅黑" pitchFamily="34" charset="-122"/>
-              </a:rPr>
-              <a:t>外线</a:t>
-            </a:r>
-            <a:endParaRPr lang="en-US" altLang="zh-CN" sz="1600" b="1" dirty="0">
-              <a:solidFill>
-                <a:schemeClr val="tx1"/>
-              </a:solidFill>
-              <a:latin typeface="微软雅黑" pitchFamily="34" charset="-122"/>
-              <a:ea typeface="微软雅黑" pitchFamily="34" charset="-122"/>
-            </a:endParaRPr>
-          </a:p>
-        </p:txBody>
-      </p:sp>
-      <p:sp>
-        <p:nvSpPr>
-          <p:cNvPr id="113" name="矩形 112"/>
-          <p:cNvSpPr/>
-          <p:nvPr/>
-        </p:nvSpPr>
-        <p:spPr>
-          <a:xfrm>
-            <a:off x="7786616" y="1925783"/>
-            <a:ext cx="296876" cy="400110"/>
-          </a:xfrm>
-          <a:prstGeom prst="rect">
-            <a:avLst/>
-          </a:prstGeom>
-        </p:spPr>
-        <p:txBody>
-          <a:bodyPr wrap="none">
-            <a:spAutoFit/>
-          </a:bodyPr>
-          <a:lstStyle/>
-          <a:p>
-            <a:r>
-              <a:rPr lang="en-US" altLang="zh-CN" sz="2000" b="1" dirty="0">
-                <a:solidFill>
-                  <a:schemeClr val="bg1"/>
-                </a:solidFill>
-                <a:latin typeface="微软雅黑" pitchFamily="34" charset="-122"/>
-                <a:ea typeface="微软雅黑" pitchFamily="34" charset="-122"/>
-              </a:rPr>
-              <a:t>-</a:t>
-            </a:r>
-            <a:endParaRPr lang="zh-CN" altLang="en-US" sz="2000" dirty="0"/>
+              <a:t>总结</a:t>
+            </a:r>
           </a:p>
         </p:txBody>
       </p:sp>
     </p:spTree>
+    <p:extLst>
+      <p:ext uri="{BB962C8B-B14F-4D97-AF65-F5344CB8AC3E}">
+        <p14:creationId xmlns:p14="http://schemas.microsoft.com/office/powerpoint/2010/main" val="2188863619"/>
+      </p:ext>
+    </p:extLst>
   </p:cSld>
   <p:clrMapOvr>
     <a:masterClrMapping/>
@@ -32840,7 +28193,13 @@
   <p:cSld>
     <p:spTree>
       <p:nvGrpSpPr>
-        <p:cNvPr id="1" name=""/>
+        <p:cNvPr id="1" name="">
+          <a:extLst>
+            <a:ext uri="{FF2B5EF4-FFF2-40B4-BE49-F238E27FC236}">
+              <a16:creationId xmlns:a16="http://schemas.microsoft.com/office/drawing/2014/main" id="{AC409B17-59BC-6642-6114-D6FADF4033A0}"/>
+            </a:ext>
+          </a:extLst>
+        </p:cNvPr>
         <p:cNvGrpSpPr/>
         <p:nvPr/>
       </p:nvGrpSpPr>
@@ -32852,7 +28211,477 @@
           <a:chExt cx="0" cy="0"/>
         </a:xfrm>
       </p:grpSpPr>
+      <p:sp>
+        <p:nvSpPr>
+          <p:cNvPr id="2" name="矩形 1">
+            <a:extLst>
+              <a:ext uri="{FF2B5EF4-FFF2-40B4-BE49-F238E27FC236}">
+                <a16:creationId xmlns:a16="http://schemas.microsoft.com/office/drawing/2014/main" id="{7F494C62-2966-3928-682B-B339878946BB}"/>
+              </a:ext>
+            </a:extLst>
+          </p:cNvPr>
+          <p:cNvSpPr/>
+          <p:nvPr/>
+        </p:nvSpPr>
+        <p:spPr>
+          <a:xfrm>
+            <a:off x="191344" y="188640"/>
+            <a:ext cx="902811" cy="523220"/>
+          </a:xfrm>
+          <a:prstGeom prst="rect">
+            <a:avLst/>
+          </a:prstGeom>
+          <a:solidFill>
+            <a:schemeClr val="dk1"/>
+          </a:solidFill>
+          <a:ln>
+            <a:noFill/>
+          </a:ln>
+        </p:spPr>
+        <p:style>
+          <a:lnRef idx="0">
+            <a:scrgbClr r="0" g="0" b="0"/>
+          </a:lnRef>
+          <a:fillRef idx="0">
+            <a:scrgbClr r="0" g="0" b="0"/>
+          </a:fillRef>
+          <a:effectRef idx="0">
+            <a:scrgbClr r="0" g="0" b="0"/>
+          </a:effectRef>
+          <a:fontRef idx="minor">
+            <a:schemeClr val="lt1"/>
+          </a:fontRef>
+        </p:style>
+        <p:txBody>
+          <a:bodyPr wrap="none">
+            <a:spAutoFit/>
+          </a:bodyPr>
+          <a:lstStyle/>
+          <a:p>
+            <a:r>
+              <a:rPr lang="zh-CN" altLang="en-US" sz="2800" b="1" dirty="0">
+                <a:solidFill>
+                  <a:schemeClr val="bg1"/>
+                </a:solidFill>
+                <a:latin typeface="微软雅黑" pitchFamily="34" charset="-122"/>
+                <a:ea typeface="微软雅黑" pitchFamily="34" charset="-122"/>
+              </a:rPr>
+              <a:t>总结</a:t>
+            </a:r>
+          </a:p>
+        </p:txBody>
+      </p:sp>
+      <p:sp>
+        <p:nvSpPr>
+          <p:cNvPr id="16" name="文本框 15">
+            <a:extLst>
+              <a:ext uri="{FF2B5EF4-FFF2-40B4-BE49-F238E27FC236}">
+                <a16:creationId xmlns:a16="http://schemas.microsoft.com/office/drawing/2014/main" id="{001E3B39-1748-6C5F-8B34-3D4A894D5B65}"/>
+              </a:ext>
+            </a:extLst>
+          </p:cNvPr>
+          <p:cNvSpPr txBox="1"/>
+          <p:nvPr/>
+        </p:nvSpPr>
+        <p:spPr>
+          <a:xfrm>
+            <a:off x="479376" y="1628800"/>
+            <a:ext cx="8242141" cy="4197944"/>
+          </a:xfrm>
+          <a:prstGeom prst="rect">
+            <a:avLst/>
+          </a:prstGeom>
+          <a:noFill/>
+          <a:ln w="12700" cap="flat">
+            <a:noFill/>
+            <a:miter lim="400000"/>
+          </a:ln>
+          <a:effectLst/>
+        </p:spPr>
+        <p:style>
+          <a:lnRef idx="0">
+            <a:scrgbClr r="0" g="0" b="0"/>
+          </a:lnRef>
+          <a:fillRef idx="0">
+            <a:scrgbClr r="0" g="0" b="0"/>
+          </a:fillRef>
+          <a:effectRef idx="0">
+            <a:scrgbClr r="0" g="0" b="0"/>
+          </a:effectRef>
+          <a:fontRef idx="none"/>
+        </p:style>
+        <p:txBody>
+          <a:bodyPr wrap="square">
+            <a:spAutoFit/>
+          </a:bodyPr>
+          <a:lstStyle/>
+          <a:p>
+            <a:pPr>
+              <a:lnSpc>
+                <a:spcPct val="150000"/>
+              </a:lnSpc>
+              <a:buNone/>
+            </a:pPr>
+            <a:r>
+              <a:rPr lang="zh-CN" altLang="en-US" b="1" dirty="0">
+                <a:solidFill>
+                  <a:srgbClr val="FF0000"/>
+                </a:solidFill>
+              </a:rPr>
+              <a:t>优势</a:t>
+            </a:r>
+          </a:p>
+          <a:p>
+            <a:pPr>
+              <a:lnSpc>
+                <a:spcPct val="150000"/>
+              </a:lnSpc>
+              <a:buFont typeface="Arial" panose="020B0604020202020204" pitchFamily="34" charset="0"/>
+              <a:buChar char="•"/>
+            </a:pPr>
+            <a:r>
+              <a:rPr lang="zh-CN" altLang="en-US" b="1" dirty="0"/>
+              <a:t>包裹性表现较好</a:t>
+            </a:r>
+            <a:r>
+              <a:rPr lang="zh-CN" altLang="en-US" dirty="0"/>
+              <a:t>，鞋脚一体性明显 </a:t>
+            </a:r>
+          </a:p>
+          <a:p>
+            <a:pPr>
+              <a:lnSpc>
+                <a:spcPct val="150000"/>
+              </a:lnSpc>
+              <a:buFont typeface="Arial" panose="020B0604020202020204" pitchFamily="34" charset="0"/>
+              <a:buChar char="•"/>
+            </a:pPr>
+            <a:r>
+              <a:rPr lang="zh-CN" altLang="en-US" b="1" dirty="0"/>
+              <a:t>支撑与刚性在线</a:t>
+            </a:r>
+            <a:r>
+              <a:rPr lang="zh-CN" altLang="en-US" dirty="0"/>
+              <a:t>，实战稳定性较好 </a:t>
+            </a:r>
+          </a:p>
+          <a:p>
+            <a:pPr>
+              <a:lnSpc>
+                <a:spcPct val="150000"/>
+              </a:lnSpc>
+              <a:buFont typeface="Arial" panose="020B0604020202020204" pitchFamily="34" charset="0"/>
+              <a:buChar char="•"/>
+            </a:pPr>
+            <a:r>
+              <a:rPr lang="zh-CN" altLang="en-US" b="1" dirty="0"/>
+              <a:t>整体舒适度不错</a:t>
+            </a:r>
+            <a:endParaRPr lang="zh-CN" altLang="en-US" dirty="0"/>
+          </a:p>
+          <a:p>
+            <a:pPr>
+              <a:lnSpc>
+                <a:spcPct val="150000"/>
+              </a:lnSpc>
+              <a:buNone/>
+            </a:pPr>
+            <a:endParaRPr lang="en-US" altLang="zh-CN" b="1" dirty="0">
+              <a:solidFill>
+                <a:srgbClr val="0070C0"/>
+              </a:solidFill>
+            </a:endParaRPr>
+          </a:p>
+          <a:p>
+            <a:pPr>
+              <a:lnSpc>
+                <a:spcPct val="150000"/>
+              </a:lnSpc>
+              <a:buNone/>
+            </a:pPr>
+            <a:r>
+              <a:rPr lang="zh-CN" altLang="en-US" b="1" dirty="0">
+                <a:solidFill>
+                  <a:srgbClr val="0070C0"/>
+                </a:solidFill>
+              </a:rPr>
+              <a:t>问题</a:t>
+            </a:r>
+          </a:p>
+          <a:p>
+            <a:pPr>
+              <a:lnSpc>
+                <a:spcPct val="150000"/>
+              </a:lnSpc>
+              <a:buFont typeface="Arial" panose="020B0604020202020204" pitchFamily="34" charset="0"/>
+              <a:buChar char="•"/>
+            </a:pPr>
+            <a:r>
+              <a:rPr lang="zh-CN" altLang="en-US" b="1" dirty="0"/>
+              <a:t>抓地不足（</a:t>
+            </a:r>
+            <a:r>
+              <a:rPr lang="en-US" altLang="zh-CN" b="1" dirty="0"/>
+              <a:t>4/7</a:t>
+            </a:r>
+            <a:r>
+              <a:rPr lang="zh-CN" altLang="en-US" b="1" dirty="0"/>
+              <a:t>）</a:t>
+            </a:r>
+            <a:r>
+              <a:rPr lang="zh-CN" altLang="en-US" dirty="0"/>
+              <a:t>：木地板、急停、横移时更明显 </a:t>
+            </a:r>
+          </a:p>
+          <a:p>
+            <a:pPr>
+              <a:lnSpc>
+                <a:spcPct val="150000"/>
+              </a:lnSpc>
+              <a:buFont typeface="Arial" panose="020B0604020202020204" pitchFamily="34" charset="0"/>
+              <a:buChar char="•"/>
+            </a:pPr>
+            <a:r>
+              <a:rPr lang="zh-CN" altLang="en-US" b="1" dirty="0"/>
+              <a:t>后跟</a:t>
+            </a:r>
+            <a:r>
+              <a:rPr lang="en-US" altLang="zh-CN" b="1" dirty="0"/>
+              <a:t>/</a:t>
+            </a:r>
+            <a:r>
+              <a:rPr lang="zh-CN" altLang="en-US" b="1" dirty="0"/>
+              <a:t>脚踝问题（</a:t>
+            </a:r>
+            <a:r>
+              <a:rPr lang="en-US" altLang="zh-CN" b="1" dirty="0"/>
+              <a:t>3/7</a:t>
+            </a:r>
+            <a:r>
+              <a:rPr lang="zh-CN" altLang="en-US" b="1" dirty="0"/>
+              <a:t>）</a:t>
+            </a:r>
+            <a:r>
+              <a:rPr lang="zh-CN" altLang="en-US" dirty="0"/>
+              <a:t>：掉跟、外踝卡脚 </a:t>
+            </a:r>
+          </a:p>
+          <a:p>
+            <a:pPr>
+              <a:lnSpc>
+                <a:spcPct val="150000"/>
+              </a:lnSpc>
+              <a:buFont typeface="Arial" panose="020B0604020202020204" pitchFamily="34" charset="0"/>
+              <a:buChar char="•"/>
+            </a:pPr>
+            <a:r>
+              <a:rPr lang="zh-CN" altLang="en-US" b="1" dirty="0"/>
+              <a:t>缓震偏硬</a:t>
+            </a:r>
+            <a:r>
+              <a:rPr lang="en-US" altLang="zh-CN" b="1" dirty="0"/>
+              <a:t>/</a:t>
+            </a:r>
+            <a:r>
+              <a:rPr lang="zh-CN" altLang="en-US" b="1" dirty="0"/>
+              <a:t>偏薄（</a:t>
+            </a:r>
+            <a:r>
+              <a:rPr lang="en-US" altLang="zh-CN" b="1" dirty="0"/>
+              <a:t>2/7</a:t>
+            </a:r>
+            <a:r>
+              <a:rPr lang="zh-CN" altLang="en-US" b="1" dirty="0"/>
+              <a:t>）</a:t>
+            </a:r>
+            <a:r>
+              <a:rPr lang="zh-CN" altLang="en-US" dirty="0"/>
+              <a:t>：前掌硬、后跟硬、缓震感不足 </a:t>
+            </a:r>
+          </a:p>
+          <a:p>
+            <a:pPr>
+              <a:lnSpc>
+                <a:spcPct val="150000"/>
+              </a:lnSpc>
+              <a:buFont typeface="Arial" panose="020B0604020202020204" pitchFamily="34" charset="0"/>
+              <a:buChar char="•"/>
+            </a:pPr>
+            <a:r>
+              <a:rPr lang="zh-CN" altLang="en-US" b="1" dirty="0"/>
+              <a:t>鞋带偏短（</a:t>
+            </a:r>
+            <a:r>
+              <a:rPr lang="en-US" altLang="zh-CN" b="1" dirty="0"/>
+              <a:t>2/7</a:t>
+            </a:r>
+            <a:r>
+              <a:rPr lang="zh-CN" altLang="en-US" b="1" dirty="0"/>
+              <a:t>）</a:t>
+            </a:r>
+            <a:r>
+              <a:rPr lang="zh-CN" altLang="en-US" dirty="0"/>
+              <a:t> </a:t>
+            </a:r>
+          </a:p>
+        </p:txBody>
+      </p:sp>
+      <p:sp>
+        <p:nvSpPr>
+          <p:cNvPr id="18" name="文本框 17">
+            <a:extLst>
+              <a:ext uri="{FF2B5EF4-FFF2-40B4-BE49-F238E27FC236}">
+                <a16:creationId xmlns:a16="http://schemas.microsoft.com/office/drawing/2014/main" id="{8ED99B3E-3E42-AA7F-192A-E2595295D225}"/>
+              </a:ext>
+            </a:extLst>
+          </p:cNvPr>
+          <p:cNvSpPr txBox="1"/>
+          <p:nvPr/>
+        </p:nvSpPr>
+        <p:spPr>
+          <a:xfrm>
+            <a:off x="6989412" y="1862253"/>
+            <a:ext cx="6096000" cy="3366947"/>
+          </a:xfrm>
+          <a:prstGeom prst="rect">
+            <a:avLst/>
+          </a:prstGeom>
+          <a:noFill/>
+          <a:ln w="12700" cap="flat">
+            <a:noFill/>
+            <a:miter lim="400000"/>
+          </a:ln>
+          <a:effectLst/>
+        </p:spPr>
+        <p:style>
+          <a:lnRef idx="0">
+            <a:scrgbClr r="0" g="0" b="0"/>
+          </a:lnRef>
+          <a:fillRef idx="0">
+            <a:scrgbClr r="0" g="0" b="0"/>
+          </a:fillRef>
+          <a:effectRef idx="0">
+            <a:scrgbClr r="0" g="0" b="0"/>
+          </a:effectRef>
+          <a:fontRef idx="none"/>
+        </p:style>
+        <p:txBody>
+          <a:bodyPr wrap="square">
+            <a:spAutoFit/>
+          </a:bodyPr>
+          <a:lstStyle/>
+          <a:p>
+            <a:pPr>
+              <a:lnSpc>
+                <a:spcPct val="150000"/>
+              </a:lnSpc>
+              <a:buNone/>
+            </a:pPr>
+            <a:r>
+              <a:rPr lang="zh-CN" altLang="en-US" b="1" dirty="0"/>
+              <a:t>修改建议</a:t>
+            </a:r>
+          </a:p>
+          <a:p>
+            <a:pPr>
+              <a:lnSpc>
+                <a:spcPct val="150000"/>
+              </a:lnSpc>
+              <a:buFont typeface="Arial" panose="020B0604020202020204" pitchFamily="34" charset="0"/>
+              <a:buChar char="•"/>
+            </a:pPr>
+            <a:r>
+              <a:rPr lang="en-US" altLang="zh-CN" b="1" dirty="0">
+                <a:solidFill>
+                  <a:schemeClr val="accent1"/>
+                </a:solidFill>
+              </a:rPr>
+              <a:t>P1</a:t>
+            </a:r>
+            <a:r>
+              <a:rPr lang="zh-CN" altLang="en-US" b="1" dirty="0">
+                <a:solidFill>
+                  <a:schemeClr val="accent1"/>
+                </a:solidFill>
+              </a:rPr>
+              <a:t>：优化抓地</a:t>
+            </a:r>
+            <a:br>
+              <a:rPr lang="zh-CN" altLang="en-US" dirty="0"/>
+            </a:br>
+            <a:r>
+              <a:rPr lang="zh-CN" altLang="en-US" dirty="0"/>
+              <a:t>核查橡胶硬度，如果硬度正确考虑调软</a:t>
+            </a:r>
+            <a:endParaRPr lang="en-US" altLang="zh-CN" dirty="0"/>
+          </a:p>
+          <a:p>
+            <a:pPr>
+              <a:lnSpc>
+                <a:spcPct val="150000"/>
+              </a:lnSpc>
+            </a:pPr>
+            <a:r>
+              <a:rPr lang="zh-CN" altLang="en-US" dirty="0"/>
+              <a:t>更换为普通橡胶或者止滑橡胶</a:t>
+            </a:r>
+          </a:p>
+          <a:p>
+            <a:pPr>
+              <a:lnSpc>
+                <a:spcPct val="150000"/>
+              </a:lnSpc>
+              <a:buFont typeface="Arial" panose="020B0604020202020204" pitchFamily="34" charset="0"/>
+              <a:buChar char="•"/>
+            </a:pPr>
+            <a:r>
+              <a:rPr lang="en-US" altLang="zh-CN" b="1" dirty="0"/>
+              <a:t>P1</a:t>
+            </a:r>
+            <a:r>
+              <a:rPr lang="zh-CN" altLang="en-US" b="1" dirty="0"/>
+              <a:t>：优化后跟锁定</a:t>
+            </a:r>
+            <a:br>
+              <a:rPr lang="zh-CN" altLang="en-US" dirty="0"/>
+            </a:br>
+            <a:r>
+              <a:rPr lang="zh-CN" altLang="en-US" dirty="0"/>
+              <a:t>调整后跟杯、领口泡棉 </a:t>
+            </a:r>
+          </a:p>
+          <a:p>
+            <a:pPr>
+              <a:lnSpc>
+                <a:spcPct val="150000"/>
+              </a:lnSpc>
+              <a:buFont typeface="Arial" panose="020B0604020202020204" pitchFamily="34" charset="0"/>
+              <a:buChar char="•"/>
+            </a:pPr>
+            <a:r>
+              <a:rPr lang="en-US" altLang="zh-CN" b="1" dirty="0"/>
+              <a:t>P2</a:t>
+            </a:r>
+            <a:r>
+              <a:rPr lang="zh-CN" altLang="en-US" b="1" dirty="0"/>
+              <a:t>：修正细节体验</a:t>
+            </a:r>
+            <a:br>
+              <a:rPr lang="zh-CN" altLang="en-US" dirty="0"/>
+            </a:br>
+            <a:r>
+              <a:rPr lang="zh-CN" altLang="en-US" dirty="0"/>
+              <a:t>加长鞋带</a:t>
+            </a:r>
+          </a:p>
+        </p:txBody>
+      </p:sp>
     </p:spTree>
+    <p:extLst>
+      <p:ext uri="{BB962C8B-B14F-4D97-AF65-F5344CB8AC3E}">
+        <p14:creationId xmlns:p14="http://schemas.microsoft.com/office/powerpoint/2010/main" val="1802919555"/>
+      </p:ext>
+    </p:extLst>
   </p:cSld>
   <p:clrMapOvr>
     <a:masterClrMapping/>

--- a/src/Template 2.1.pptx
+++ b/src/Template 2.1.pptx
@@ -410,6 +410,7 @@
           </c:spPr>
           <c:invertIfNegative val="0"/>
           <c:dLbls>
+            <c:numFmt formatCode="#,##0.0_);[Red]\(#,##0.0\)" sourceLinked="0"/>
             <c:spPr>
               <a:noFill/>
               <a:ln>
@@ -418,15 +419,16 @@
               <a:effectLst/>
             </c:spPr>
             <c:txPr>
-              <a:bodyPr rot="0" spcFirstLastPara="1" vertOverflow="ellipsis" vert="horz" wrap="square" lIns="38100" tIns="19050" rIns="38100" bIns="19050" anchor="ctr" anchorCtr="1">
-                <a:spAutoFit/>
-              </a:bodyPr>
+              <a:bodyPr rot="0" spcFirstLastPara="1" vertOverflow="ellipsis" vert="horz" wrap="square" anchor="ctr" anchorCtr="1"/>
               <a:lstStyle/>
               <a:p>
                 <a:pPr>
-                  <a:defRPr sz="1050" b="1" i="0" u="none" strike="noStrike" kern="1200" baseline="0">
+                  <a:defRPr sz="900" b="1" i="0" u="none" strike="noStrike" kern="1200" baseline="0">
                     <a:solidFill>
-                      <a:schemeClr val="tx1"/>
+                      <a:schemeClr val="tx1">
+                        <a:lumMod val="75000"/>
+                        <a:lumOff val="25000"/>
+                      </a:schemeClr>
                     </a:solidFill>
                     <a:latin typeface="+mn-lt"/>
                     <a:ea typeface="+mn-ea"/>
@@ -464,67 +466,61 @@
             </c:extLst>
           </c:dLbls>
           <c:cat>
-            <c:strRef>
-              <c:f>篮球鞋试穿问卷!$D$20:$D$26</c:f>
-              <c:strCache>
-                <c:ptCount val="7"/>
-                <c:pt idx="0">
-                  <c:v>抓地性（Traction）</c:v>
-                </c:pt>
-                <c:pt idx="1">
-                  <c:v>缓震性（Cushioning）</c:v>
-                </c:pt>
-                <c:pt idx="2">
-                  <c:v>包裹性（Lockdwon）</c:v>
-                </c:pt>
-                <c:pt idx="3">
-                  <c:v>抗扭转性（Torsional Support ）</c:v>
-                </c:pt>
-                <c:pt idx="4">
-                  <c:v>重量&amp;透气性（Weight&amp;Ventilation）</c:v>
-                </c:pt>
-                <c:pt idx="5">
-                  <c:v>防侧翻性（Lateral Stability）</c:v>
-                </c:pt>
-                <c:pt idx="6">
-                  <c:v>耐久性（Durability）</c:v>
-                </c:pt>
-              </c:strCache>
-            </c:strRef>
+            <c:strLit>
+              <c:ptCount val="7"/>
+              <c:pt idx="0">
+                <c:v>A</c:v>
+              </c:pt>
+              <c:pt idx="1">
+                <c:v>B</c:v>
+              </c:pt>
+              <c:pt idx="2">
+                <c:v>C</c:v>
+              </c:pt>
+              <c:pt idx="3">
+                <c:v>D</c:v>
+              </c:pt>
+              <c:pt idx="4">
+                <c:v>E</c:v>
+              </c:pt>
+              <c:pt idx="5">
+                <c:v>F</c:v>
+              </c:pt>
+              <c:pt idx="6">
+                <c:v>G</c:v>
+              </c:pt>
+            </c:strLit>
           </c:cat>
           <c:val>
-            <c:numRef>
-              <c:f>篮球鞋试穿问卷!$E$20:$E$26</c:f>
-              <c:numCache>
-                <c:formatCode>0.00</c:formatCode>
-                <c:ptCount val="7"/>
-                <c:pt idx="0">
-                  <c:v>8.3333333333333339</c:v>
-                </c:pt>
-                <c:pt idx="1">
-                  <c:v>8.6666666666666661</c:v>
-                </c:pt>
-                <c:pt idx="2">
-                  <c:v>8.3333333333333339</c:v>
-                </c:pt>
-                <c:pt idx="3">
-                  <c:v>8.3333333333333339</c:v>
-                </c:pt>
-                <c:pt idx="4">
-                  <c:v>8.3333333333333339</c:v>
-                </c:pt>
-                <c:pt idx="5">
-                  <c:v>8</c:v>
-                </c:pt>
-                <c:pt idx="6">
-                  <c:v>8</c:v>
-                </c:pt>
-              </c:numCache>
-            </c:numRef>
+            <c:numLit>
+              <c:formatCode>General</c:formatCode>
+              <c:ptCount val="7"/>
+              <c:pt idx="0">
+                <c:v>4</c:v>
+              </c:pt>
+              <c:pt idx="1">
+                <c:v>5</c:v>
+              </c:pt>
+              <c:pt idx="2">
+                <c:v>6</c:v>
+              </c:pt>
+              <c:pt idx="3">
+                <c:v>7</c:v>
+              </c:pt>
+              <c:pt idx="4">
+                <c:v>8</c:v>
+              </c:pt>
+              <c:pt idx="5">
+                <c:v>9</c:v>
+              </c:pt>
+              <c:pt idx="6">
+                <c:v>10</c:v>
+              </c:pt>
+            </c:numLit>
           </c:val>
           <c:extLst>
             <c:ext xmlns:c16="http://schemas.microsoft.com/office/drawing/2014/chart" uri="{C3380CC4-5D6E-409C-BE32-E72D297353CC}">
-              <c16:uniqueId val="{00000000-717A-4011-A90B-B56100D252B3}"/>
+              <c16:uniqueId val="{00000000-0C42-44F5-BAE0-8ACEE4166430}"/>
             </c:ext>
           </c:extLst>
         </c:ser>
@@ -565,9 +561,12 @@
           <a:lstStyle/>
           <a:p>
             <a:pPr>
-              <a:defRPr sz="1050" b="1" i="0" u="none" strike="noStrike" kern="1200" baseline="0">
-                <a:solidFill>
-                  <a:schemeClr val="tx1"/>
+              <a:defRPr sz="900" b="1" i="0" u="none" strike="noStrike" kern="1200" baseline="0">
+                <a:solidFill>
+                  <a:schemeClr val="tx1">
+                    <a:lumMod val="65000"/>
+                    <a:lumOff val="35000"/>
+                  </a:schemeClr>
                 </a:solidFill>
                 <a:latin typeface="+mn-lt"/>
                 <a:ea typeface="+mn-ea"/>
@@ -606,7 +605,7 @@
             <a:effectLst/>
           </c:spPr>
         </c:majorGridlines>
-        <c:numFmt formatCode="0.00" sourceLinked="1"/>
+        <c:numFmt formatCode="General" sourceLinked="1"/>
         <c:majorTickMark val="none"/>
         <c:minorTickMark val="none"/>
         <c:tickLblPos val="nextTo"/>
@@ -624,7 +623,10 @@
             <a:pPr>
               <a:defRPr sz="900" b="1" i="0" u="none" strike="noStrike" kern="1200" baseline="0">
                 <a:solidFill>
-                  <a:schemeClr val="tx1"/>
+                  <a:schemeClr val="tx1">
+                    <a:lumMod val="65000"/>
+                    <a:lumOff val="35000"/>
+                  </a:schemeClr>
                 </a:solidFill>
                 <a:latin typeface="+mn-lt"/>
                 <a:ea typeface="+mn-ea"/>
@@ -662,7 +664,7 @@
     <a:lstStyle/>
     <a:p>
       <a:pPr>
-        <a:defRPr/>
+        <a:defRPr b="1"/>
       </a:pPr>
       <a:endParaRPr lang="zh-CN"/>
     </a:p>
@@ -1738,6 +1740,59 @@
           <a:bodyPr/>
           <a:lstStyle/>
           <a:p>
+            <a:r>
+              <a:rPr lang="en-US" altLang="zh-CN" dirty="0"/>
+              <a:t>S+     95-100 </a:t>
+            </a:r>
+            <a:br>
+              <a:rPr lang="en-US" altLang="zh-CN" dirty="0"/>
+            </a:br>
+            <a:r>
+              <a:rPr lang="en-US" altLang="zh-CN" dirty="0"/>
+              <a:t>S-     90-95 </a:t>
+            </a:r>
+            <a:br>
+              <a:rPr lang="en-US" altLang="zh-CN" dirty="0"/>
+            </a:br>
+            <a:r>
+              <a:rPr lang="en-US" altLang="zh-CN" dirty="0"/>
+              <a:t>A+     85-90 </a:t>
+            </a:r>
+            <a:br>
+              <a:rPr lang="en-US" altLang="zh-CN" dirty="0"/>
+            </a:br>
+            <a:r>
+              <a:rPr lang="en-US" altLang="zh-CN" dirty="0"/>
+              <a:t>A-     80-85 </a:t>
+            </a:r>
+            <a:br>
+              <a:rPr lang="en-US" altLang="zh-CN" dirty="0"/>
+            </a:br>
+            <a:r>
+              <a:rPr lang="en-US" altLang="zh-CN" dirty="0"/>
+              <a:t>B+     75-80 </a:t>
+            </a:r>
+            <a:br>
+              <a:rPr lang="en-US" altLang="zh-CN" dirty="0"/>
+            </a:br>
+            <a:r>
+              <a:rPr lang="en-US" altLang="zh-CN" dirty="0"/>
+              <a:t>B-     70-75 </a:t>
+            </a:r>
+            <a:br>
+              <a:rPr lang="en-US" altLang="zh-CN" dirty="0"/>
+            </a:br>
+            <a:r>
+              <a:rPr lang="en-US" altLang="zh-CN" dirty="0"/>
+              <a:t>C+     65-70</a:t>
+            </a:r>
+            <a:br>
+              <a:rPr lang="en-US" altLang="zh-CN" dirty="0"/>
+            </a:br>
+            <a:r>
+              <a:rPr lang="en-US" altLang="zh-CN" dirty="0"/>
+              <a:t>C-     60-65</a:t>
+            </a:r>
             <a:endParaRPr lang="zh-CN" altLang="en-US" dirty="0"/>
           </a:p>
         </p:txBody>
@@ -8512,7 +8567,7 @@
           <a:p>
             <a:fld id="{21DFC0C0-F3C1-46A6-B1E0-38A19114CB16}" type="datetimeFigureOut">
               <a:rPr lang="zh-CN" altLang="en-US" smtClean="0"/>
-              <a:t>2026/4/15</a:t>
+              <a:t>2026/4/27</a:t>
             </a:fld>
             <a:endParaRPr lang="zh-CN" altLang="en-US"/>
           </a:p>
@@ -11296,7 +11351,7 @@
           <a:p>
             <a:fld id="{21DFC0C0-F3C1-46A6-B1E0-38A19114CB16}" type="datetimeFigureOut">
               <a:rPr lang="zh-CN" altLang="en-US" smtClean="0"/>
-              <a:t>2026/4/15</a:t>
+              <a:t>2026/4/27</a:t>
             </a:fld>
             <a:endParaRPr lang="zh-CN" altLang="en-US"/>
           </a:p>
@@ -28050,7 +28105,7 @@
       </p:sp>
       <p:graphicFrame>
         <p:nvGraphicFramePr>
-          <p:cNvPr id="19" name="图表 44">
+          <p:cNvPr id="14" name="图表 13">
             <a:extLst>
               <a:ext uri="{FF2B5EF4-FFF2-40B4-BE49-F238E27FC236}">
                 <a16:creationId xmlns:a16="http://schemas.microsoft.com/office/drawing/2014/main" id="{C1BC75A2-27B3-3F68-EFE7-7569403389C6}"/>
@@ -28063,13 +28118,13 @@
           <p:nvPr>
             <p:extLst>
               <p:ext uri="{D42A27DB-BD31-4B8C-83A1-F6EECF244321}">
-                <p14:modId xmlns:p14="http://schemas.microsoft.com/office/powerpoint/2010/main" val="630057133"/>
+                <p14:modId xmlns:p14="http://schemas.microsoft.com/office/powerpoint/2010/main" val="47153894"/>
               </p:ext>
             </p:extLst>
           </p:nvPr>
         </p:nvGraphicFramePr>
         <p:xfrm>
-          <a:off x="3071664" y="290013"/>
+          <a:off x="3075816" y="278825"/>
           <a:ext cx="5934011" cy="2850955"/>
         </p:xfrm>
         <a:graphic>

--- a/src/Template 2.1.pptx
+++ b/src/Template 2.1.pptx
@@ -5,7 +5,7 @@
     <p:sldMasterId id="2147483648" r:id="rId1"/>
   </p:sldMasterIdLst>
   <p:notesMasterIdLst>
-    <p:notesMasterId r:id="rId19"/>
+    <p:notesMasterId r:id="rId21"/>
   </p:notesMasterIdLst>
   <p:sldIdLst>
     <p:sldId id="256" r:id="rId2"/>
@@ -25,6 +25,8 @@
     <p:sldId id="297" r:id="rId16"/>
     <p:sldId id="966" r:id="rId17"/>
     <p:sldId id="965" r:id="rId18"/>
+    <p:sldId id="1060" r:id="rId19"/>
+    <p:sldId id="1061" r:id="rId20"/>
   </p:sldIdLst>
   <p:sldSz cx="12192000" cy="6858000"/>
   <p:notesSz cx="6858000" cy="9144000"/>
@@ -670,6 +672,1052 @@
     </a:p>
   </c:txPr>
   <c:externalData r:id="rId3">
+    <c:autoUpdate val="0"/>
+  </c:externalData>
+</c:chartSpace>
+</file>
+
+<file path=ppt/charts/chart2.xml><?xml version="1.0" encoding="utf-8"?>
+<c:chartSpace xmlns:c="http://schemas.openxmlformats.org/drawingml/2006/chart" xmlns:a="http://schemas.openxmlformats.org/drawingml/2006/main" xmlns:r="http://schemas.openxmlformats.org/officeDocument/2006/relationships" xmlns:c16r2="http://schemas.microsoft.com/office/drawing/2015/06/chart">
+  <c:date1904 val="0"/>
+  <c:lang val="zh-CN"/>
+  <c:roundedCorners val="0"/>
+  <mc:AlternateContent xmlns:mc="http://schemas.openxmlformats.org/markup-compatibility/2006">
+    <mc:Choice xmlns:c14="http://schemas.microsoft.com/office/drawing/2007/8/2/chart" Requires="c14">
+      <c14:style val="102"/>
+    </mc:Choice>
+    <mc:Fallback>
+      <c:style val="2"/>
+    </mc:Fallback>
+  </mc:AlternateContent>
+  <c:chart>
+    <c:autoTitleDeleted val="1"/>
+    <c:plotArea>
+      <c:layout/>
+      <c:barChart>
+        <c:barDir val="bar"/>
+        <c:grouping val="clustered"/>
+        <c:varyColors val="0"/>
+        <c:ser>
+          <c:idx val="0"/>
+          <c:order val="0"/>
+          <c:tx>
+            <c:strRef>
+              <c:f>'服装试穿反馈 对标soar天海花女子长款转印 90g轻量正方格'!$C$6</c:f>
+              <c:strCache>
+                <c:ptCount val="1"/>
+                <c:pt idx="0">
+                  <c:v>评分（低于3.5分自动填充黑色）</c:v>
+                </c:pt>
+              </c:strCache>
+            </c:strRef>
+          </c:tx>
+          <c:invertIfNegative val="0"/>
+          <c:dPt>
+            <c:idx val="0"/>
+            <c:invertIfNegative val="0"/>
+            <c:bubble3D val="0"/>
+            <c:spPr>
+              <a:solidFill>
+                <a:srgbClr val="FF0000"/>
+              </a:solidFill>
+            </c:spPr>
+            <c:extLst>
+              <c:ext xmlns:c16="http://schemas.microsoft.com/office/drawing/2014/chart" uri="{C3380CC4-5D6E-409C-BE32-E72D297353CC}">
+                <c16:uniqueId val="{00000001-EA0B-468D-92A9-C9B4793DBF41}"/>
+              </c:ext>
+            </c:extLst>
+          </c:dPt>
+          <c:dPt>
+            <c:idx val="1"/>
+            <c:invertIfNegative val="0"/>
+            <c:bubble3D val="0"/>
+            <c:spPr>
+              <a:solidFill>
+                <a:srgbClr val="FF0000"/>
+              </a:solidFill>
+            </c:spPr>
+            <c:extLst>
+              <c:ext xmlns:c16="http://schemas.microsoft.com/office/drawing/2014/chart" uri="{C3380CC4-5D6E-409C-BE32-E72D297353CC}">
+                <c16:uniqueId val="{00000003-EA0B-468D-92A9-C9B4793DBF41}"/>
+              </c:ext>
+            </c:extLst>
+          </c:dPt>
+          <c:dPt>
+            <c:idx val="2"/>
+            <c:invertIfNegative val="0"/>
+            <c:bubble3D val="0"/>
+            <c:spPr>
+              <a:solidFill>
+                <a:srgbClr val="000000"/>
+              </a:solidFill>
+            </c:spPr>
+            <c:extLst>
+              <c:ext xmlns:c16="http://schemas.microsoft.com/office/drawing/2014/chart" uri="{C3380CC4-5D6E-409C-BE32-E72D297353CC}">
+                <c16:uniqueId val="{00000005-EA0B-468D-92A9-C9B4793DBF41}"/>
+              </c:ext>
+            </c:extLst>
+          </c:dPt>
+          <c:dPt>
+            <c:idx val="3"/>
+            <c:invertIfNegative val="0"/>
+            <c:bubble3D val="0"/>
+            <c:spPr>
+              <a:solidFill>
+                <a:srgbClr val="FF0000"/>
+              </a:solidFill>
+            </c:spPr>
+            <c:extLst>
+              <c:ext xmlns:c16="http://schemas.microsoft.com/office/drawing/2014/chart" uri="{C3380CC4-5D6E-409C-BE32-E72D297353CC}">
+                <c16:uniqueId val="{00000007-EA0B-468D-92A9-C9B4793DBF41}"/>
+              </c:ext>
+            </c:extLst>
+          </c:dPt>
+          <c:dPt>
+            <c:idx val="4"/>
+            <c:invertIfNegative val="0"/>
+            <c:bubble3D val="0"/>
+            <c:spPr>
+              <a:solidFill>
+                <a:srgbClr val="FF0000"/>
+              </a:solidFill>
+            </c:spPr>
+            <c:extLst>
+              <c:ext xmlns:c16="http://schemas.microsoft.com/office/drawing/2014/chart" uri="{C3380CC4-5D6E-409C-BE32-E72D297353CC}">
+                <c16:uniqueId val="{00000009-EA0B-468D-92A9-C9B4793DBF41}"/>
+              </c:ext>
+            </c:extLst>
+          </c:dPt>
+          <c:dLbls>
+            <c:spPr>
+              <a:noFill/>
+              <a:ln>
+                <a:noFill/>
+              </a:ln>
+              <a:effectLst/>
+            </c:spPr>
+            <c:txPr>
+              <a:bodyPr rot="0" spcFirstLastPara="0" vertOverflow="ellipsis" vert="horz" wrap="square" lIns="38100" tIns="19050" rIns="38100" bIns="19050" anchor="ctr" anchorCtr="1"/>
+              <a:lstStyle/>
+              <a:p>
+                <a:pPr>
+                  <a:defRPr lang="zh-CN" sz="1000" b="0" i="0" u="none" strike="noStrike" kern="1200" baseline="0">
+                    <a:solidFill>
+                      <a:schemeClr val="tx1"/>
+                    </a:solidFill>
+                    <a:latin typeface="+mn-lt"/>
+                    <a:ea typeface="+mn-ea"/>
+                    <a:cs typeface="+mn-cs"/>
+                  </a:defRPr>
+                </a:pPr>
+                <a:endParaRPr lang="zh-CN"/>
+              </a:p>
+            </c:txPr>
+            <c:dLblPos val="outEnd"/>
+            <c:showLegendKey val="0"/>
+            <c:showVal val="1"/>
+            <c:showCatName val="0"/>
+            <c:showSerName val="0"/>
+            <c:showPercent val="0"/>
+            <c:showBubbleSize val="0"/>
+            <c:showLeaderLines val="0"/>
+            <c:extLst>
+              <c:ext xmlns:c15="http://schemas.microsoft.com/office/drawing/2012/chart" uri="{CE6537A1-D6FC-4f65-9D91-7224C49458BB}">
+                <c15:showLeaderLines val="1"/>
+              </c:ext>
+            </c:extLst>
+          </c:dLbls>
+          <c:cat>
+            <c:strRef>
+              <c:f>'服装试穿反馈 对标soar天海花女子长款转印 90g轻量正方格'!$B$7:$B$11</c:f>
+              <c:strCache>
+                <c:ptCount val="5"/>
+                <c:pt idx="0">
+                  <c:v>整体</c:v>
+                </c:pt>
+                <c:pt idx="1">
+                  <c:v>衣领</c:v>
+                </c:pt>
+                <c:pt idx="2">
+                  <c:v>袖口</c:v>
+                </c:pt>
+                <c:pt idx="3">
+                  <c:v>胸围</c:v>
+                </c:pt>
+                <c:pt idx="4">
+                  <c:v>腰围</c:v>
+                </c:pt>
+              </c:strCache>
+            </c:strRef>
+          </c:cat>
+          <c:val>
+            <c:numRef>
+              <c:f>'服装试穿反馈 对标soar天海花女子长款转印 90g轻量正方格'!$C$7:$C$11</c:f>
+              <c:numCache>
+                <c:formatCode>0.0</c:formatCode>
+                <c:ptCount val="5"/>
+                <c:pt idx="0">
+                  <c:v>4.3</c:v>
+                </c:pt>
+                <c:pt idx="1">
+                  <c:v>4.8</c:v>
+                </c:pt>
+                <c:pt idx="2">
+                  <c:v>3.3</c:v>
+                </c:pt>
+                <c:pt idx="3">
+                  <c:v>4</c:v>
+                </c:pt>
+                <c:pt idx="4">
+                  <c:v>4.8</c:v>
+                </c:pt>
+              </c:numCache>
+            </c:numRef>
+          </c:val>
+          <c:extLst>
+            <c:ext xmlns:c16="http://schemas.microsoft.com/office/drawing/2014/chart" uri="{C3380CC4-5D6E-409C-BE32-E72D297353CC}">
+              <c16:uniqueId val="{0000000A-EA0B-468D-92A9-C9B4793DBF41}"/>
+            </c:ext>
+          </c:extLst>
+        </c:ser>
+        <c:dLbls>
+          <c:showLegendKey val="0"/>
+          <c:showVal val="0"/>
+          <c:showCatName val="0"/>
+          <c:showSerName val="0"/>
+          <c:showPercent val="0"/>
+          <c:showBubbleSize val="0"/>
+        </c:dLbls>
+        <c:gapWidth val="150"/>
+        <c:axId val="1190400511"/>
+        <c:axId val="1190402431"/>
+      </c:barChart>
+      <c:catAx>
+        <c:axId val="1190400511"/>
+        <c:scaling>
+          <c:orientation val="minMax"/>
+        </c:scaling>
+        <c:delete val="0"/>
+        <c:axPos val="l"/>
+        <c:numFmt formatCode="General" sourceLinked="1"/>
+        <c:majorTickMark val="out"/>
+        <c:minorTickMark val="none"/>
+        <c:tickLblPos val="nextTo"/>
+        <c:txPr>
+          <a:bodyPr rot="-60000000" spcFirstLastPara="0" vertOverflow="ellipsis" vert="horz" wrap="square" anchor="ctr" anchorCtr="1"/>
+          <a:lstStyle/>
+          <a:p>
+            <a:pPr>
+              <a:defRPr lang="zh-CN" sz="1000" b="0" i="0" u="none" strike="noStrike" kern="1200" baseline="0">
+                <a:solidFill>
+                  <a:schemeClr val="tx1"/>
+                </a:solidFill>
+                <a:latin typeface="+mn-lt"/>
+                <a:ea typeface="+mn-ea"/>
+                <a:cs typeface="+mn-cs"/>
+              </a:defRPr>
+            </a:pPr>
+            <a:endParaRPr lang="zh-CN"/>
+          </a:p>
+        </c:txPr>
+        <c:crossAx val="1190402431"/>
+        <c:crosses val="autoZero"/>
+        <c:auto val="1"/>
+        <c:lblAlgn val="ctr"/>
+        <c:lblOffset val="100"/>
+        <c:noMultiLvlLbl val="0"/>
+      </c:catAx>
+      <c:valAx>
+        <c:axId val="1190402431"/>
+        <c:scaling>
+          <c:orientation val="minMax"/>
+          <c:max val="5"/>
+          <c:min val="0"/>
+        </c:scaling>
+        <c:delete val="1"/>
+        <c:axPos val="b"/>
+        <c:numFmt formatCode="0.0" sourceLinked="1"/>
+        <c:majorTickMark val="out"/>
+        <c:minorTickMark val="none"/>
+        <c:tickLblPos val="nextTo"/>
+        <c:crossAx val="1190400511"/>
+        <c:crosses val="autoZero"/>
+        <c:crossBetween val="between"/>
+      </c:valAx>
+    </c:plotArea>
+    <c:plotVisOnly val="1"/>
+    <c:dispBlanksAs val="gap"/>
+    <c:showDLblsOverMax val="0"/>
+    <c:extLst>
+      <c:ext uri="{0b15fc19-7d7d-44ad-8c2d-2c3a37ce22c3}">
+        <chartProps xmlns="https://web.wps.cn/et/2018/main" chartId="{7701baa8-a723-4dcb-913b-9d5e2c3b373a}"/>
+      </c:ext>
+    </c:extLst>
+  </c:chart>
+  <c:txPr>
+    <a:bodyPr/>
+    <a:lstStyle/>
+    <a:p>
+      <a:pPr>
+        <a:defRPr lang="zh-CN"/>
+      </a:pPr>
+      <a:endParaRPr lang="zh-CN"/>
+    </a:p>
+  </c:txPr>
+  <c:externalData r:id="rId1">
+    <c:autoUpdate val="0"/>
+  </c:externalData>
+</c:chartSpace>
+</file>
+
+<file path=ppt/charts/chart3.xml><?xml version="1.0" encoding="utf-8"?>
+<c:chartSpace xmlns:c="http://schemas.openxmlformats.org/drawingml/2006/chart" xmlns:a="http://schemas.openxmlformats.org/drawingml/2006/main" xmlns:r="http://schemas.openxmlformats.org/officeDocument/2006/relationships" xmlns:c16r2="http://schemas.microsoft.com/office/drawing/2015/06/chart">
+  <c:date1904 val="0"/>
+  <c:lang val="zh-CN"/>
+  <c:roundedCorners val="0"/>
+  <mc:AlternateContent xmlns:mc="http://schemas.openxmlformats.org/markup-compatibility/2006">
+    <mc:Choice xmlns:c14="http://schemas.microsoft.com/office/drawing/2007/8/2/chart" Requires="c14">
+      <c14:style val="102"/>
+    </mc:Choice>
+    <mc:Fallback>
+      <c:style val="2"/>
+    </mc:Fallback>
+  </mc:AlternateContent>
+  <c:chart>
+    <c:autoTitleDeleted val="1"/>
+    <c:plotArea>
+      <c:layout/>
+      <c:barChart>
+        <c:barDir val="bar"/>
+        <c:grouping val="clustered"/>
+        <c:varyColors val="0"/>
+        <c:ser>
+          <c:idx val="0"/>
+          <c:order val="0"/>
+          <c:tx>
+            <c:strRef>
+              <c:f>'服装试穿反馈 对标soar天海花女子长款转印 90g轻量正方格'!$C$18</c:f>
+              <c:strCache>
+                <c:ptCount val="1"/>
+                <c:pt idx="0">
+                  <c:v>评分（低于3.5分自动填充黑色）</c:v>
+                </c:pt>
+              </c:strCache>
+            </c:strRef>
+          </c:tx>
+          <c:invertIfNegative val="0"/>
+          <c:dPt>
+            <c:idx val="0"/>
+            <c:invertIfNegative val="0"/>
+            <c:bubble3D val="0"/>
+            <c:spPr>
+              <a:solidFill>
+                <a:srgbClr val="FF0000"/>
+              </a:solidFill>
+            </c:spPr>
+            <c:extLst>
+              <c:ext xmlns:c16="http://schemas.microsoft.com/office/drawing/2014/chart" uri="{C3380CC4-5D6E-409C-BE32-E72D297353CC}">
+                <c16:uniqueId val="{00000001-3692-495C-8635-FE06E9846ABD}"/>
+              </c:ext>
+            </c:extLst>
+          </c:dPt>
+          <c:dPt>
+            <c:idx val="1"/>
+            <c:invertIfNegative val="0"/>
+            <c:bubble3D val="0"/>
+            <c:spPr>
+              <a:solidFill>
+                <a:srgbClr val="FF0000"/>
+              </a:solidFill>
+            </c:spPr>
+            <c:extLst>
+              <c:ext xmlns:c16="http://schemas.microsoft.com/office/drawing/2014/chart" uri="{C3380CC4-5D6E-409C-BE32-E72D297353CC}">
+                <c16:uniqueId val="{00000003-3692-495C-8635-FE06E9846ABD}"/>
+              </c:ext>
+            </c:extLst>
+          </c:dPt>
+          <c:dPt>
+            <c:idx val="2"/>
+            <c:invertIfNegative val="0"/>
+            <c:bubble3D val="0"/>
+            <c:spPr>
+              <a:solidFill>
+                <a:srgbClr val="FF0000"/>
+              </a:solidFill>
+            </c:spPr>
+            <c:extLst>
+              <c:ext xmlns:c16="http://schemas.microsoft.com/office/drawing/2014/chart" uri="{C3380CC4-5D6E-409C-BE32-E72D297353CC}">
+                <c16:uniqueId val="{00000005-3692-495C-8635-FE06E9846ABD}"/>
+              </c:ext>
+            </c:extLst>
+          </c:dPt>
+          <c:dLbls>
+            <c:spPr>
+              <a:noFill/>
+              <a:ln>
+                <a:noFill/>
+              </a:ln>
+              <a:effectLst/>
+            </c:spPr>
+            <c:txPr>
+              <a:bodyPr rot="0" spcFirstLastPara="0" vertOverflow="ellipsis" vert="horz" wrap="square" lIns="38100" tIns="19050" rIns="38100" bIns="19050" anchor="ctr" anchorCtr="1"/>
+              <a:lstStyle/>
+              <a:p>
+                <a:pPr>
+                  <a:defRPr lang="zh-CN" sz="1000" b="0" i="0" u="none" strike="noStrike" kern="1200" baseline="0">
+                    <a:solidFill>
+                      <a:schemeClr val="tx1"/>
+                    </a:solidFill>
+                    <a:latin typeface="+mn-lt"/>
+                    <a:ea typeface="+mn-ea"/>
+                    <a:cs typeface="+mn-cs"/>
+                  </a:defRPr>
+                </a:pPr>
+                <a:endParaRPr lang="zh-CN"/>
+              </a:p>
+            </c:txPr>
+            <c:dLblPos val="outEnd"/>
+            <c:showLegendKey val="0"/>
+            <c:showVal val="1"/>
+            <c:showCatName val="0"/>
+            <c:showSerName val="0"/>
+            <c:showPercent val="0"/>
+            <c:showBubbleSize val="0"/>
+            <c:showLeaderLines val="0"/>
+            <c:extLst>
+              <c:ext xmlns:c15="http://schemas.microsoft.com/office/drawing/2012/chart" uri="{CE6537A1-D6FC-4f65-9D91-7224C49458BB}">
+                <c15:showLeaderLines val="1"/>
+              </c:ext>
+            </c:extLst>
+          </c:dLbls>
+          <c:cat>
+            <c:strRef>
+              <c:f>'服装试穿反馈 对标soar天海花女子长款转印 90g轻量正方格'!$B$19:$B$21</c:f>
+              <c:strCache>
+                <c:ptCount val="3"/>
+                <c:pt idx="0">
+                  <c:v>亲肤度/手感</c:v>
+                </c:pt>
+                <c:pt idx="1">
+                  <c:v>透气性</c:v>
+                </c:pt>
+                <c:pt idx="2">
+                  <c:v>轻量化</c:v>
+                </c:pt>
+              </c:strCache>
+            </c:strRef>
+          </c:cat>
+          <c:val>
+            <c:numRef>
+              <c:f>'服装试穿反馈 对标soar天海花女子长款转印 90g轻量正方格'!$C$19:$C$21</c:f>
+              <c:numCache>
+                <c:formatCode>0.0</c:formatCode>
+                <c:ptCount val="3"/>
+                <c:pt idx="0">
+                  <c:v>4.8</c:v>
+                </c:pt>
+                <c:pt idx="1">
+                  <c:v>5</c:v>
+                </c:pt>
+                <c:pt idx="2">
+                  <c:v>5</c:v>
+                </c:pt>
+              </c:numCache>
+            </c:numRef>
+          </c:val>
+          <c:extLst>
+            <c:ext xmlns:c16="http://schemas.microsoft.com/office/drawing/2014/chart" uri="{C3380CC4-5D6E-409C-BE32-E72D297353CC}">
+              <c16:uniqueId val="{00000006-3692-495C-8635-FE06E9846ABD}"/>
+            </c:ext>
+          </c:extLst>
+        </c:ser>
+        <c:dLbls>
+          <c:showLegendKey val="0"/>
+          <c:showVal val="0"/>
+          <c:showCatName val="0"/>
+          <c:showSerName val="0"/>
+          <c:showPercent val="0"/>
+          <c:showBubbleSize val="0"/>
+        </c:dLbls>
+        <c:gapWidth val="150"/>
+        <c:axId val="1190424031"/>
+        <c:axId val="1190408671"/>
+      </c:barChart>
+      <c:catAx>
+        <c:axId val="1190424031"/>
+        <c:scaling>
+          <c:orientation val="minMax"/>
+        </c:scaling>
+        <c:delete val="0"/>
+        <c:axPos val="l"/>
+        <c:numFmt formatCode="General" sourceLinked="1"/>
+        <c:majorTickMark val="out"/>
+        <c:minorTickMark val="none"/>
+        <c:tickLblPos val="nextTo"/>
+        <c:txPr>
+          <a:bodyPr rot="-60000000" spcFirstLastPara="0" vertOverflow="ellipsis" vert="horz" wrap="square" anchor="ctr" anchorCtr="1"/>
+          <a:lstStyle/>
+          <a:p>
+            <a:pPr>
+              <a:defRPr lang="zh-CN" sz="1000" b="0" i="0" u="none" strike="noStrike" kern="1200" baseline="0">
+                <a:solidFill>
+                  <a:schemeClr val="tx1"/>
+                </a:solidFill>
+                <a:latin typeface="+mn-lt"/>
+                <a:ea typeface="+mn-ea"/>
+                <a:cs typeface="+mn-cs"/>
+              </a:defRPr>
+            </a:pPr>
+            <a:endParaRPr lang="zh-CN"/>
+          </a:p>
+        </c:txPr>
+        <c:crossAx val="1190408671"/>
+        <c:crosses val="autoZero"/>
+        <c:auto val="1"/>
+        <c:lblAlgn val="ctr"/>
+        <c:lblOffset val="100"/>
+        <c:noMultiLvlLbl val="0"/>
+      </c:catAx>
+      <c:valAx>
+        <c:axId val="1190408671"/>
+        <c:scaling>
+          <c:orientation val="minMax"/>
+          <c:max val="5"/>
+          <c:min val="0"/>
+        </c:scaling>
+        <c:delete val="1"/>
+        <c:axPos val="b"/>
+        <c:numFmt formatCode="0.0" sourceLinked="1"/>
+        <c:majorTickMark val="out"/>
+        <c:minorTickMark val="none"/>
+        <c:tickLblPos val="nextTo"/>
+        <c:crossAx val="1190424031"/>
+        <c:crosses val="autoZero"/>
+        <c:crossBetween val="between"/>
+      </c:valAx>
+    </c:plotArea>
+    <c:plotVisOnly val="1"/>
+    <c:dispBlanksAs val="gap"/>
+    <c:showDLblsOverMax val="0"/>
+    <c:extLst>
+      <c:ext uri="{0b15fc19-7d7d-44ad-8c2d-2c3a37ce22c3}">
+        <chartProps xmlns="https://web.wps.cn/et/2018/main" chartId="{70f9708f-eb63-40a5-a4b0-13a0add9258b}"/>
+      </c:ext>
+    </c:extLst>
+  </c:chart>
+  <c:txPr>
+    <a:bodyPr/>
+    <a:lstStyle/>
+    <a:p>
+      <a:pPr>
+        <a:defRPr lang="zh-CN"/>
+      </a:pPr>
+      <a:endParaRPr lang="zh-CN"/>
+    </a:p>
+  </c:txPr>
+  <c:externalData r:id="rId1">
+    <c:autoUpdate val="0"/>
+  </c:externalData>
+</c:chartSpace>
+</file>
+
+<file path=ppt/charts/chart4.xml><?xml version="1.0" encoding="utf-8"?>
+<c:chartSpace xmlns:c="http://schemas.openxmlformats.org/drawingml/2006/chart" xmlns:a="http://schemas.openxmlformats.org/drawingml/2006/main" xmlns:r="http://schemas.openxmlformats.org/officeDocument/2006/relationships" xmlns:c16r2="http://schemas.microsoft.com/office/drawing/2015/06/chart">
+  <c:date1904 val="0"/>
+  <c:lang val="zh-CN"/>
+  <c:roundedCorners val="0"/>
+  <mc:AlternateContent xmlns:mc="http://schemas.openxmlformats.org/markup-compatibility/2006">
+    <mc:Choice xmlns:c14="http://schemas.microsoft.com/office/drawing/2007/8/2/chart" Requires="c14">
+      <c14:style val="102"/>
+    </mc:Choice>
+    <mc:Fallback>
+      <c:style val="2"/>
+    </mc:Fallback>
+  </mc:AlternateContent>
+  <c:chart>
+    <c:autoTitleDeleted val="1"/>
+    <c:plotArea>
+      <c:layout/>
+      <c:barChart>
+        <c:barDir val="bar"/>
+        <c:grouping val="clustered"/>
+        <c:varyColors val="0"/>
+        <c:ser>
+          <c:idx val="0"/>
+          <c:order val="0"/>
+          <c:tx>
+            <c:strRef>
+              <c:f>'服装试穿反馈 对标soar天海花女子长款转印 90g轻量正方格'!$C$28</c:f>
+              <c:strCache>
+                <c:ptCount val="1"/>
+                <c:pt idx="0">
+                  <c:v>评分（低于3.5分自动填充黑色）</c:v>
+                </c:pt>
+              </c:strCache>
+            </c:strRef>
+          </c:tx>
+          <c:invertIfNegative val="0"/>
+          <c:dPt>
+            <c:idx val="0"/>
+            <c:invertIfNegative val="0"/>
+            <c:bubble3D val="0"/>
+            <c:spPr>
+              <a:solidFill>
+                <a:srgbClr val="FF0000"/>
+              </a:solidFill>
+            </c:spPr>
+            <c:extLst>
+              <c:ext xmlns:c16="http://schemas.microsoft.com/office/drawing/2014/chart" uri="{C3380CC4-5D6E-409C-BE32-E72D297353CC}">
+                <c16:uniqueId val="{00000001-8DCD-4144-8F41-1B2D6EC55D39}"/>
+              </c:ext>
+            </c:extLst>
+          </c:dPt>
+          <c:dPt>
+            <c:idx val="1"/>
+            <c:invertIfNegative val="0"/>
+            <c:bubble3D val="0"/>
+            <c:spPr>
+              <a:solidFill>
+                <a:srgbClr val="FF0000"/>
+              </a:solidFill>
+            </c:spPr>
+            <c:extLst>
+              <c:ext xmlns:c16="http://schemas.microsoft.com/office/drawing/2014/chart" uri="{C3380CC4-5D6E-409C-BE32-E72D297353CC}">
+                <c16:uniqueId val="{00000003-8DCD-4144-8F41-1B2D6EC55D39}"/>
+              </c:ext>
+            </c:extLst>
+          </c:dPt>
+          <c:dPt>
+            <c:idx val="2"/>
+            <c:invertIfNegative val="0"/>
+            <c:bubble3D val="0"/>
+            <c:spPr>
+              <a:solidFill>
+                <a:srgbClr val="FF0000"/>
+              </a:solidFill>
+            </c:spPr>
+            <c:extLst>
+              <c:ext xmlns:c16="http://schemas.microsoft.com/office/drawing/2014/chart" uri="{C3380CC4-5D6E-409C-BE32-E72D297353CC}">
+                <c16:uniqueId val="{00000005-8DCD-4144-8F41-1B2D6EC55D39}"/>
+              </c:ext>
+            </c:extLst>
+          </c:dPt>
+          <c:dLbls>
+            <c:spPr>
+              <a:noFill/>
+              <a:ln>
+                <a:noFill/>
+              </a:ln>
+              <a:effectLst/>
+            </c:spPr>
+            <c:txPr>
+              <a:bodyPr rot="0" spcFirstLastPara="0" vertOverflow="ellipsis" vert="horz" wrap="square" lIns="38100" tIns="19050" rIns="38100" bIns="19050" anchor="ctr" anchorCtr="1"/>
+              <a:lstStyle/>
+              <a:p>
+                <a:pPr>
+                  <a:defRPr lang="zh-CN" sz="1000" b="0" i="0" u="none" strike="noStrike" kern="1200" baseline="0">
+                    <a:solidFill>
+                      <a:schemeClr val="tx1"/>
+                    </a:solidFill>
+                    <a:latin typeface="+mn-lt"/>
+                    <a:ea typeface="+mn-ea"/>
+                    <a:cs typeface="+mn-cs"/>
+                  </a:defRPr>
+                </a:pPr>
+                <a:endParaRPr lang="zh-CN"/>
+              </a:p>
+            </c:txPr>
+            <c:dLblPos val="outEnd"/>
+            <c:showLegendKey val="0"/>
+            <c:showVal val="1"/>
+            <c:showCatName val="0"/>
+            <c:showSerName val="0"/>
+            <c:showPercent val="0"/>
+            <c:showBubbleSize val="0"/>
+            <c:showLeaderLines val="0"/>
+            <c:extLst>
+              <c:ext xmlns:c15="http://schemas.microsoft.com/office/drawing/2012/chart" uri="{CE6537A1-D6FC-4f65-9D91-7224C49458BB}">
+                <c15:showLeaderLines val="1"/>
+              </c:ext>
+            </c:extLst>
+          </c:dLbls>
+          <c:cat>
+            <c:strRef>
+              <c:f>'服装试穿反馈 对标soar天海花女子长款转印 90g轻量正方格'!$B$29:$B$31</c:f>
+              <c:strCache>
+                <c:ptCount val="3"/>
+                <c:pt idx="0">
+                  <c:v>整体</c:v>
+                </c:pt>
+                <c:pt idx="1">
+                  <c:v>前胸</c:v>
+                </c:pt>
+                <c:pt idx="2">
+                  <c:v>后背</c:v>
+                </c:pt>
+              </c:strCache>
+            </c:strRef>
+          </c:cat>
+          <c:val>
+            <c:numRef>
+              <c:f>'服装试穿反馈 对标soar天海花女子长款转印 90g轻量正方格'!$C$29:$C$31</c:f>
+              <c:numCache>
+                <c:formatCode>0.0</c:formatCode>
+                <c:ptCount val="3"/>
+                <c:pt idx="0">
+                  <c:v>5</c:v>
+                </c:pt>
+                <c:pt idx="1">
+                  <c:v>5</c:v>
+                </c:pt>
+                <c:pt idx="2">
+                  <c:v>5</c:v>
+                </c:pt>
+              </c:numCache>
+            </c:numRef>
+          </c:val>
+          <c:extLst>
+            <c:ext xmlns:c16="http://schemas.microsoft.com/office/drawing/2014/chart" uri="{C3380CC4-5D6E-409C-BE32-E72D297353CC}">
+              <c16:uniqueId val="{00000006-8DCD-4144-8F41-1B2D6EC55D39}"/>
+            </c:ext>
+          </c:extLst>
+        </c:ser>
+        <c:dLbls>
+          <c:showLegendKey val="0"/>
+          <c:showVal val="0"/>
+          <c:showCatName val="0"/>
+          <c:showSerName val="0"/>
+          <c:showPercent val="0"/>
+          <c:showBubbleSize val="0"/>
+        </c:dLbls>
+        <c:gapWidth val="150"/>
+        <c:axId val="1190418751"/>
+        <c:axId val="1190411551"/>
+      </c:barChart>
+      <c:catAx>
+        <c:axId val="1190418751"/>
+        <c:scaling>
+          <c:orientation val="minMax"/>
+        </c:scaling>
+        <c:delete val="0"/>
+        <c:axPos val="l"/>
+        <c:numFmt formatCode="General" sourceLinked="1"/>
+        <c:majorTickMark val="out"/>
+        <c:minorTickMark val="none"/>
+        <c:tickLblPos val="nextTo"/>
+        <c:txPr>
+          <a:bodyPr rot="-60000000" spcFirstLastPara="0" vertOverflow="ellipsis" vert="horz" wrap="square" anchor="ctr" anchorCtr="1"/>
+          <a:lstStyle/>
+          <a:p>
+            <a:pPr>
+              <a:defRPr lang="zh-CN" sz="1000" b="0" i="0" u="none" strike="noStrike" kern="1200" baseline="0">
+                <a:solidFill>
+                  <a:schemeClr val="tx1"/>
+                </a:solidFill>
+                <a:latin typeface="+mn-lt"/>
+                <a:ea typeface="+mn-ea"/>
+                <a:cs typeface="+mn-cs"/>
+              </a:defRPr>
+            </a:pPr>
+            <a:endParaRPr lang="zh-CN"/>
+          </a:p>
+        </c:txPr>
+        <c:crossAx val="1190411551"/>
+        <c:crosses val="autoZero"/>
+        <c:auto val="1"/>
+        <c:lblAlgn val="ctr"/>
+        <c:lblOffset val="100"/>
+        <c:noMultiLvlLbl val="0"/>
+      </c:catAx>
+      <c:valAx>
+        <c:axId val="1190411551"/>
+        <c:scaling>
+          <c:orientation val="minMax"/>
+          <c:max val="5"/>
+          <c:min val="0"/>
+        </c:scaling>
+        <c:delete val="1"/>
+        <c:axPos val="b"/>
+        <c:numFmt formatCode="0.0" sourceLinked="1"/>
+        <c:majorTickMark val="out"/>
+        <c:minorTickMark val="none"/>
+        <c:tickLblPos val="nextTo"/>
+        <c:crossAx val="1190418751"/>
+        <c:crosses val="autoZero"/>
+        <c:crossBetween val="between"/>
+      </c:valAx>
+    </c:plotArea>
+    <c:plotVisOnly val="1"/>
+    <c:dispBlanksAs val="gap"/>
+    <c:showDLblsOverMax val="0"/>
+    <c:extLst>
+      <c:ext uri="{0b15fc19-7d7d-44ad-8c2d-2c3a37ce22c3}">
+        <chartProps xmlns="https://web.wps.cn/et/2018/main" chartId="{d09fd2c2-747e-4ed8-be10-4fc9f7f62907}"/>
+      </c:ext>
+    </c:extLst>
+  </c:chart>
+  <c:txPr>
+    <a:bodyPr/>
+    <a:lstStyle/>
+    <a:p>
+      <a:pPr>
+        <a:defRPr lang="zh-CN"/>
+      </a:pPr>
+      <a:endParaRPr lang="zh-CN"/>
+    </a:p>
+  </c:txPr>
+  <c:externalData r:id="rId1">
+    <c:autoUpdate val="0"/>
+  </c:externalData>
+</c:chartSpace>
+</file>
+
+<file path=ppt/charts/chart5.xml><?xml version="1.0" encoding="utf-8"?>
+<c:chartSpace xmlns:c="http://schemas.openxmlformats.org/drawingml/2006/chart" xmlns:a="http://schemas.openxmlformats.org/drawingml/2006/main" xmlns:r="http://schemas.openxmlformats.org/officeDocument/2006/relationships" xmlns:c16r2="http://schemas.microsoft.com/office/drawing/2015/06/chart">
+  <c:date1904 val="0"/>
+  <c:lang val="zh-CN"/>
+  <c:roundedCorners val="0"/>
+  <mc:AlternateContent xmlns:mc="http://schemas.openxmlformats.org/markup-compatibility/2006">
+    <mc:Choice xmlns:c14="http://schemas.microsoft.com/office/drawing/2007/8/2/chart" Requires="c14">
+      <c14:style val="102"/>
+    </mc:Choice>
+    <mc:Fallback>
+      <c:style val="2"/>
+    </mc:Fallback>
+  </mc:AlternateContent>
+  <c:chart>
+    <c:autoTitleDeleted val="1"/>
+    <c:plotArea>
+      <c:layout/>
+      <c:barChart>
+        <c:barDir val="bar"/>
+        <c:grouping val="clustered"/>
+        <c:varyColors val="0"/>
+        <c:ser>
+          <c:idx val="0"/>
+          <c:order val="0"/>
+          <c:tx>
+            <c:strRef>
+              <c:f>'服装试穿反馈 对标soar天海花女子长款转印 90g轻量正方格'!$C$38</c:f>
+              <c:strCache>
+                <c:ptCount val="1"/>
+                <c:pt idx="0">
+                  <c:v>评分（低于3.5分自动填充黑色）</c:v>
+                </c:pt>
+              </c:strCache>
+            </c:strRef>
+          </c:tx>
+          <c:invertIfNegative val="0"/>
+          <c:dPt>
+            <c:idx val="0"/>
+            <c:invertIfNegative val="0"/>
+            <c:bubble3D val="0"/>
+            <c:spPr>
+              <a:solidFill>
+                <a:srgbClr val="FF0000"/>
+              </a:solidFill>
+            </c:spPr>
+            <c:extLst>
+              <c:ext xmlns:c16="http://schemas.microsoft.com/office/drawing/2014/chart" uri="{C3380CC4-5D6E-409C-BE32-E72D297353CC}">
+                <c16:uniqueId val="{00000001-64B3-4D19-8973-3F1F0EBC816E}"/>
+              </c:ext>
+            </c:extLst>
+          </c:dPt>
+          <c:dPt>
+            <c:idx val="1"/>
+            <c:invertIfNegative val="0"/>
+            <c:bubble3D val="0"/>
+            <c:spPr>
+              <a:solidFill>
+                <a:srgbClr val="FF0000"/>
+              </a:solidFill>
+            </c:spPr>
+            <c:extLst>
+              <c:ext xmlns:c16="http://schemas.microsoft.com/office/drawing/2014/chart" uri="{C3380CC4-5D6E-409C-BE32-E72D297353CC}">
+                <c16:uniqueId val="{00000003-64B3-4D19-8973-3F1F0EBC816E}"/>
+              </c:ext>
+            </c:extLst>
+          </c:dPt>
+          <c:dPt>
+            <c:idx val="2"/>
+            <c:invertIfNegative val="0"/>
+            <c:bubble3D val="0"/>
+            <c:spPr>
+              <a:solidFill>
+                <a:srgbClr val="FF0000"/>
+              </a:solidFill>
+            </c:spPr>
+            <c:extLst>
+              <c:ext xmlns:c16="http://schemas.microsoft.com/office/drawing/2014/chart" uri="{C3380CC4-5D6E-409C-BE32-E72D297353CC}">
+                <c16:uniqueId val="{00000005-64B3-4D19-8973-3F1F0EBC816E}"/>
+              </c:ext>
+            </c:extLst>
+          </c:dPt>
+          <c:dLbls>
+            <c:spPr>
+              <a:noFill/>
+              <a:ln>
+                <a:noFill/>
+              </a:ln>
+              <a:effectLst/>
+            </c:spPr>
+            <c:txPr>
+              <a:bodyPr rot="0" spcFirstLastPara="0" vertOverflow="ellipsis" vert="horz" wrap="square" lIns="38100" tIns="19050" rIns="38100" bIns="19050" anchor="ctr" anchorCtr="1"/>
+              <a:lstStyle/>
+              <a:p>
+                <a:pPr>
+                  <a:defRPr lang="zh-CN" sz="1000" b="0" i="0" u="none" strike="noStrike" kern="1200" baseline="0">
+                    <a:solidFill>
+                      <a:schemeClr val="tx1"/>
+                    </a:solidFill>
+                    <a:latin typeface="+mn-lt"/>
+                    <a:ea typeface="+mn-ea"/>
+                    <a:cs typeface="+mn-cs"/>
+                  </a:defRPr>
+                </a:pPr>
+                <a:endParaRPr lang="zh-CN"/>
+              </a:p>
+            </c:txPr>
+            <c:dLblPos val="outEnd"/>
+            <c:showLegendKey val="0"/>
+            <c:showVal val="1"/>
+            <c:showCatName val="0"/>
+            <c:showSerName val="0"/>
+            <c:showPercent val="0"/>
+            <c:showBubbleSize val="0"/>
+            <c:showLeaderLines val="0"/>
+            <c:extLst>
+              <c:ext xmlns:c15="http://schemas.microsoft.com/office/drawing/2012/chart" uri="{CE6537A1-D6FC-4f65-9D91-7224C49458BB}">
+                <c15:showLeaderLines val="1"/>
+              </c:ext>
+            </c:extLst>
+          </c:dLbls>
+          <c:cat>
+            <c:strRef>
+              <c:f>'服装试穿反馈 对标soar天海花女子长款转印 90g轻量正方格'!$B$39:$B$41</c:f>
+              <c:strCache>
+                <c:ptCount val="3"/>
+                <c:pt idx="0">
+                  <c:v>整体</c:v>
+                </c:pt>
+                <c:pt idx="1">
+                  <c:v>前胸</c:v>
+                </c:pt>
+                <c:pt idx="2">
+                  <c:v>后背</c:v>
+                </c:pt>
+              </c:strCache>
+            </c:strRef>
+          </c:cat>
+          <c:val>
+            <c:numRef>
+              <c:f>'服装试穿反馈 对标soar天海花女子长款转印 90g轻量正方格'!$C$39:$C$41</c:f>
+              <c:numCache>
+                <c:formatCode>0.0</c:formatCode>
+                <c:ptCount val="3"/>
+                <c:pt idx="0">
+                  <c:v>5</c:v>
+                </c:pt>
+                <c:pt idx="1">
+                  <c:v>5</c:v>
+                </c:pt>
+                <c:pt idx="2">
+                  <c:v>5</c:v>
+                </c:pt>
+              </c:numCache>
+            </c:numRef>
+          </c:val>
+          <c:extLst>
+            <c:ext xmlns:c16="http://schemas.microsoft.com/office/drawing/2014/chart" uri="{C3380CC4-5D6E-409C-BE32-E72D297353CC}">
+              <c16:uniqueId val="{00000006-64B3-4D19-8973-3F1F0EBC816E}"/>
+            </c:ext>
+          </c:extLst>
+        </c:ser>
+        <c:dLbls>
+          <c:showLegendKey val="0"/>
+          <c:showVal val="0"/>
+          <c:showCatName val="0"/>
+          <c:showSerName val="0"/>
+          <c:showPercent val="0"/>
+          <c:showBubbleSize val="0"/>
+        </c:dLbls>
+        <c:gapWidth val="150"/>
+        <c:axId val="1190410591"/>
+        <c:axId val="1190418271"/>
+      </c:barChart>
+      <c:catAx>
+        <c:axId val="1190410591"/>
+        <c:scaling>
+          <c:orientation val="minMax"/>
+        </c:scaling>
+        <c:delete val="0"/>
+        <c:axPos val="l"/>
+        <c:numFmt formatCode="General" sourceLinked="1"/>
+        <c:majorTickMark val="out"/>
+        <c:minorTickMark val="none"/>
+        <c:tickLblPos val="nextTo"/>
+        <c:txPr>
+          <a:bodyPr rot="-60000000" spcFirstLastPara="0" vertOverflow="ellipsis" vert="horz" wrap="square" anchor="ctr" anchorCtr="1"/>
+          <a:lstStyle/>
+          <a:p>
+            <a:pPr>
+              <a:defRPr lang="zh-CN" sz="1000" b="0" i="0" u="none" strike="noStrike" kern="1200" baseline="0">
+                <a:solidFill>
+                  <a:schemeClr val="tx1"/>
+                </a:solidFill>
+                <a:latin typeface="+mn-lt"/>
+                <a:ea typeface="+mn-ea"/>
+                <a:cs typeface="+mn-cs"/>
+              </a:defRPr>
+            </a:pPr>
+            <a:endParaRPr lang="zh-CN"/>
+          </a:p>
+        </c:txPr>
+        <c:crossAx val="1190418271"/>
+        <c:crosses val="autoZero"/>
+        <c:auto val="1"/>
+        <c:lblAlgn val="ctr"/>
+        <c:lblOffset val="100"/>
+        <c:noMultiLvlLbl val="0"/>
+      </c:catAx>
+      <c:valAx>
+        <c:axId val="1190418271"/>
+        <c:scaling>
+          <c:orientation val="minMax"/>
+          <c:max val="5"/>
+          <c:min val="0"/>
+        </c:scaling>
+        <c:delete val="1"/>
+        <c:axPos val="b"/>
+        <c:numFmt formatCode="0.0" sourceLinked="1"/>
+        <c:majorTickMark val="out"/>
+        <c:minorTickMark val="none"/>
+        <c:tickLblPos val="nextTo"/>
+        <c:crossAx val="1190410591"/>
+        <c:crosses val="autoZero"/>
+        <c:crossBetween val="between"/>
+      </c:valAx>
+    </c:plotArea>
+    <c:plotVisOnly val="1"/>
+    <c:dispBlanksAs val="gap"/>
+    <c:showDLblsOverMax val="0"/>
+    <c:extLst>
+      <c:ext uri="{0b15fc19-7d7d-44ad-8c2d-2c3a37ce22c3}">
+        <chartProps xmlns="https://web.wps.cn/et/2018/main" chartId="{d77578f9-402e-4364-9111-580f51a1e9a0}"/>
+      </c:ext>
+    </c:extLst>
+  </c:chart>
+  <c:txPr>
+    <a:bodyPr/>
+    <a:lstStyle/>
+    <a:p>
+      <a:pPr>
+        <a:defRPr lang="zh-CN"/>
+      </a:pPr>
+      <a:endParaRPr lang="zh-CN"/>
+    </a:p>
+  </c:txPr>
+  <c:externalData r:id="rId1">
     <c:autoUpdate val="0"/>
   </c:externalData>
 </c:chartSpace>
@@ -2001,6 +3049,151 @@
 </p:notes>
 </file>
 
+<file path=ppt/notesSlides/notesSlide15.xml><?xml version="1.0" encoding="utf-8"?>
+<p:notes xmlns:a="http://schemas.openxmlformats.org/drawingml/2006/main" xmlns:r="http://schemas.openxmlformats.org/officeDocument/2006/relationships" xmlns:p="http://schemas.openxmlformats.org/presentationml/2006/main">
+  <p:cSld>
+    <p:spTree>
+      <p:nvGrpSpPr>
+        <p:cNvPr id="1" name=""/>
+        <p:cNvGrpSpPr/>
+        <p:nvPr/>
+      </p:nvGrpSpPr>
+      <p:grpSpPr>
+        <a:xfrm>
+          <a:off x="0" y="0"/>
+          <a:ext cx="0" cy="0"/>
+          <a:chOff x="0" y="0"/>
+          <a:chExt cx="0" cy="0"/>
+        </a:xfrm>
+      </p:grpSpPr>
+      <p:sp>
+        <p:nvSpPr>
+          <p:cNvPr id="2" name="幻灯片图像占位符 1"/>
+          <p:cNvSpPr>
+            <a:spLocks noGrp="1" noRot="1" noChangeAspect="1"/>
+          </p:cNvSpPr>
+          <p:nvPr>
+            <p:ph type="sldImg"/>
+          </p:nvPr>
+        </p:nvSpPr>
+        <p:spPr>
+          <a:xfrm>
+            <a:off x="381000" y="685800"/>
+            <a:ext cx="6096000" cy="3429000"/>
+          </a:xfrm>
+        </p:spPr>
+      </p:sp>
+      <p:sp>
+        <p:nvSpPr>
+          <p:cNvPr id="3" name="备注占位符 2"/>
+          <p:cNvSpPr>
+            <a:spLocks noGrp="1"/>
+          </p:cNvSpPr>
+          <p:nvPr>
+            <p:ph type="body" idx="1"/>
+          </p:nvPr>
+        </p:nvSpPr>
+        <p:spPr/>
+        <p:txBody>
+          <a:bodyPr/>
+          <a:lstStyle/>
+          <a:p>
+            <a:endParaRPr lang="zh-CN" altLang="en-US" dirty="0"/>
+          </a:p>
+        </p:txBody>
+      </p:sp>
+    </p:spTree>
+  </p:cSld>
+  <p:clrMapOvr>
+    <a:masterClrMapping/>
+  </p:clrMapOvr>
+</p:notes>
+</file>
+
+<file path=ppt/notesSlides/notesSlide16.xml><?xml version="1.0" encoding="utf-8"?>
+<p:notes xmlns:a="http://schemas.openxmlformats.org/drawingml/2006/main" xmlns:r="http://schemas.openxmlformats.org/officeDocument/2006/relationships" xmlns:p="http://schemas.openxmlformats.org/presentationml/2006/main">
+  <p:cSld>
+    <p:spTree>
+      <p:nvGrpSpPr>
+        <p:cNvPr id="1" name="">
+          <a:extLst>
+            <a:ext uri="{FF2B5EF4-FFF2-40B4-BE49-F238E27FC236}">
+              <a16:creationId xmlns:a16="http://schemas.microsoft.com/office/drawing/2014/main" id="{11BA097D-2193-2301-DACF-4647B777F967}"/>
+            </a:ext>
+          </a:extLst>
+        </p:cNvPr>
+        <p:cNvGrpSpPr/>
+        <p:nvPr/>
+      </p:nvGrpSpPr>
+      <p:grpSpPr>
+        <a:xfrm>
+          <a:off x="0" y="0"/>
+          <a:ext cx="0" cy="0"/>
+          <a:chOff x="0" y="0"/>
+          <a:chExt cx="0" cy="0"/>
+        </a:xfrm>
+      </p:grpSpPr>
+      <p:sp>
+        <p:nvSpPr>
+          <p:cNvPr id="2" name="幻灯片图像占位符 1">
+            <a:extLst>
+              <a:ext uri="{FF2B5EF4-FFF2-40B4-BE49-F238E27FC236}">
+                <a16:creationId xmlns:a16="http://schemas.microsoft.com/office/drawing/2014/main" id="{182ECD85-E83E-A276-F8C4-D59A5B0E0F62}"/>
+              </a:ext>
+            </a:extLst>
+          </p:cNvPr>
+          <p:cNvSpPr>
+            <a:spLocks noGrp="1" noRot="1" noChangeAspect="1"/>
+          </p:cNvSpPr>
+          <p:nvPr>
+            <p:ph type="sldImg"/>
+          </p:nvPr>
+        </p:nvSpPr>
+        <p:spPr>
+          <a:xfrm>
+            <a:off x="381000" y="685800"/>
+            <a:ext cx="6096000" cy="3429000"/>
+          </a:xfrm>
+        </p:spPr>
+      </p:sp>
+      <p:sp>
+        <p:nvSpPr>
+          <p:cNvPr id="3" name="备注占位符 2">
+            <a:extLst>
+              <a:ext uri="{FF2B5EF4-FFF2-40B4-BE49-F238E27FC236}">
+                <a16:creationId xmlns:a16="http://schemas.microsoft.com/office/drawing/2014/main" id="{2EDBBCED-E2DC-A05E-4533-D021F9AD16CD}"/>
+              </a:ext>
+            </a:extLst>
+          </p:cNvPr>
+          <p:cNvSpPr>
+            <a:spLocks noGrp="1"/>
+          </p:cNvSpPr>
+          <p:nvPr>
+            <p:ph type="body" idx="1"/>
+          </p:nvPr>
+        </p:nvSpPr>
+        <p:spPr/>
+        <p:txBody>
+          <a:bodyPr/>
+          <a:lstStyle/>
+          <a:p>
+            <a:endParaRPr lang="zh-CN" altLang="en-US" dirty="0"/>
+          </a:p>
+        </p:txBody>
+      </p:sp>
+    </p:spTree>
+    <p:extLst>
+      <p:ext uri="{BB962C8B-B14F-4D97-AF65-F5344CB8AC3E}">
+        <p14:creationId xmlns:p14="http://schemas.microsoft.com/office/powerpoint/2010/main" val="4202519090"/>
+      </p:ext>
+    </p:extLst>
+  </p:cSld>
+  <p:clrMapOvr>
+    <a:masterClrMapping/>
+  </p:clrMapOvr>
+</p:notes>
+</file>
+
 <file path=ppt/notesSlides/notesSlide2.xml><?xml version="1.0" encoding="utf-8"?>
 <p:notes xmlns:a="http://schemas.openxmlformats.org/drawingml/2006/main" xmlns:r="http://schemas.openxmlformats.org/officeDocument/2006/relationships" xmlns:p="http://schemas.openxmlformats.org/presentationml/2006/main">
   <p:cSld>
@@ -8567,7 +9760,7 @@
           <a:p>
             <a:fld id="{21DFC0C0-F3C1-46A6-B1E0-38A19114CB16}" type="datetimeFigureOut">
               <a:rPr lang="zh-CN" altLang="en-US" smtClean="0"/>
-              <a:t>2026/4/27</a:t>
+              <a:t>2026/4/28</a:t>
             </a:fld>
             <a:endParaRPr lang="zh-CN" altLang="en-US"/>
           </a:p>
@@ -11351,7 +12544,7 @@
           <a:p>
             <a:fld id="{21DFC0C0-F3C1-46A6-B1E0-38A19114CB16}" type="datetimeFigureOut">
               <a:rPr lang="zh-CN" altLang="en-US" smtClean="0"/>
-              <a:t>2026/4/27</a:t>
+              <a:t>2026/4/28</a:t>
             </a:fld>
             <a:endParaRPr lang="zh-CN" altLang="en-US"/>
           </a:p>
@@ -28735,6 +29928,2432 @@
     <p:extLst>
       <p:ext uri="{BB962C8B-B14F-4D97-AF65-F5344CB8AC3E}">
         <p14:creationId xmlns:p14="http://schemas.microsoft.com/office/powerpoint/2010/main" val="1802919555"/>
+      </p:ext>
+    </p:extLst>
+  </p:cSld>
+  <p:clrMapOvr>
+    <a:masterClrMapping/>
+  </p:clrMapOvr>
+  <p:transition spd="med"/>
+</p:sld>
+</file>
+
+<file path=ppt/slides/slide18.xml><?xml version="1.0" encoding="utf-8"?>
+<p:sld xmlns:a="http://schemas.openxmlformats.org/drawingml/2006/main" xmlns:r="http://schemas.openxmlformats.org/officeDocument/2006/relationships" xmlns:p="http://schemas.openxmlformats.org/presentationml/2006/main">
+  <p:cSld>
+    <p:spTree>
+      <p:nvGrpSpPr>
+        <p:cNvPr id="1" name=""/>
+        <p:cNvGrpSpPr/>
+        <p:nvPr/>
+      </p:nvGrpSpPr>
+      <p:grpSpPr>
+        <a:xfrm>
+          <a:off x="0" y="0"/>
+          <a:ext cx="0" cy="0"/>
+          <a:chOff x="0" y="0"/>
+          <a:chExt cx="0" cy="0"/>
+        </a:xfrm>
+      </p:grpSpPr>
+      <p:cxnSp>
+        <p:nvCxnSpPr>
+          <p:cNvPr id="5" name="直接连接符 4"/>
+          <p:cNvCxnSpPr/>
+          <p:nvPr/>
+        </p:nvCxnSpPr>
+        <p:spPr>
+          <a:xfrm>
+            <a:off x="4312963" y="1107442"/>
+            <a:ext cx="3619289" cy="0"/>
+          </a:xfrm>
+          <a:prstGeom prst="line">
+            <a:avLst/>
+          </a:prstGeom>
+          <a:ln w="9525" cap="flat" cmpd="sng" algn="ctr">
+            <a:solidFill>
+              <a:schemeClr val="dk1"/>
+            </a:solidFill>
+            <a:prstDash val="dash"/>
+            <a:round/>
+            <a:headEnd type="none" w="med" len="med"/>
+            <a:tailEnd type="none" w="med" len="med"/>
+          </a:ln>
+        </p:spPr>
+        <p:style>
+          <a:lnRef idx="0">
+            <a:scrgbClr r="0" g="0" b="0"/>
+          </a:lnRef>
+          <a:fillRef idx="0">
+            <a:scrgbClr r="0" g="0" b="0"/>
+          </a:fillRef>
+          <a:effectRef idx="0">
+            <a:scrgbClr r="0" g="0" b="0"/>
+          </a:effectRef>
+          <a:fontRef idx="minor">
+            <a:schemeClr val="tx1"/>
+          </a:fontRef>
+        </p:style>
+      </p:cxnSp>
+      <p:cxnSp>
+        <p:nvCxnSpPr>
+          <p:cNvPr id="6" name="直接连接符 5"/>
+          <p:cNvCxnSpPr/>
+          <p:nvPr/>
+        </p:nvCxnSpPr>
+        <p:spPr>
+          <a:xfrm>
+            <a:off x="693674" y="1107442"/>
+            <a:ext cx="3619289" cy="0"/>
+          </a:xfrm>
+          <a:prstGeom prst="line">
+            <a:avLst/>
+          </a:prstGeom>
+          <a:ln>
+            <a:headEnd type="none" w="med" len="med"/>
+            <a:tailEnd type="none" w="med" len="med"/>
+          </a:ln>
+        </p:spPr>
+        <p:style>
+          <a:lnRef idx="2">
+            <a:schemeClr val="dk1"/>
+          </a:lnRef>
+          <a:fillRef idx="0">
+            <a:schemeClr val="dk1"/>
+          </a:fillRef>
+          <a:effectRef idx="1">
+            <a:schemeClr val="dk1"/>
+          </a:effectRef>
+          <a:fontRef idx="minor">
+            <a:schemeClr val="tx1"/>
+          </a:fontRef>
+        </p:style>
+      </p:cxnSp>
+      <p:sp>
+        <p:nvSpPr>
+          <p:cNvPr id="2" name="文本框 1"/>
+          <p:cNvSpPr txBox="1"/>
+          <p:nvPr/>
+        </p:nvSpPr>
+        <p:spPr>
+          <a:xfrm>
+            <a:off x="546100" y="673100"/>
+            <a:ext cx="3175000" cy="400108"/>
+          </a:xfrm>
+          <a:prstGeom prst="rect">
+            <a:avLst/>
+          </a:prstGeom>
+          <a:solidFill>
+            <a:srgbClr val="000000">
+              <a:alpha val="0"/>
+            </a:srgbClr>
+          </a:solidFill>
+          <a:ln w="12700" cap="flat">
+            <a:noFill/>
+            <a:miter lim="400000"/>
+          </a:ln>
+        </p:spPr>
+        <p:style>
+          <a:lnRef idx="0">
+            <a:scrgbClr r="0" g="0" b="0"/>
+          </a:lnRef>
+          <a:fillRef idx="0">
+            <a:scrgbClr r="0" g="0" b="0"/>
+          </a:fillRef>
+          <a:effectRef idx="0">
+            <a:scrgbClr r="0" g="0" b="0"/>
+          </a:effectRef>
+          <a:fontRef idx="none"/>
+        </p:style>
+        <p:txBody>
+          <a:bodyPr rot="0" spcFirstLastPara="1" vertOverflow="overflow" horzOverflow="overflow" vert="horz" wrap="square" lIns="45719" tIns="45719" rIns="45719" bIns="45719" numCol="1" spcCol="38100" rtlCol="0" anchor="t">
+            <a:spAutoFit/>
+          </a:bodyPr>
+          <a:lstStyle/>
+          <a:p>
+            <a:pPr marL="457200" indent="-457200">
+              <a:buFont typeface="Wingdings" panose="05000000000000000000" pitchFamily="2" charset="2"/>
+              <a:buChar char="ü"/>
+            </a:pPr>
+            <a:r>
+              <a:rPr kumimoji="0" lang="zh-CN" altLang="en-US" sz="2000" b="1" i="0" u="none" strike="noStrike" cap="none" spc="0" normalizeH="0" baseline="0">
+                <a:ln>
+                  <a:noFill/>
+                </a:ln>
+                <a:effectLst/>
+                <a:uFillTx/>
+                <a:latin typeface="Arial" panose="020B0604020202020204" pitchFamily="34" charset="0"/>
+                <a:ea typeface="微软雅黑" panose="020B0503020204020204" charset="-122"/>
+                <a:cs typeface="Arial" panose="020B0604020202020204"/>
+                <a:sym typeface="Arial" panose="020B0604020202020204"/>
+              </a:rPr>
+              <a:t>服装试穿反馈结果</a:t>
+            </a:r>
+          </a:p>
+        </p:txBody>
+      </p:sp>
+      <p:sp>
+        <p:nvSpPr>
+          <p:cNvPr id="33" name="文本框 32"/>
+          <p:cNvSpPr txBox="1"/>
+          <p:nvPr/>
+        </p:nvSpPr>
+        <p:spPr>
+          <a:xfrm>
+            <a:off x="262961" y="113947"/>
+            <a:ext cx="7345207" cy="369332"/>
+          </a:xfrm>
+          <a:prstGeom prst="rect">
+            <a:avLst/>
+          </a:prstGeom>
+          <a:solidFill>
+            <a:schemeClr val="dk1"/>
+          </a:solidFill>
+          <a:ln>
+            <a:noFill/>
+          </a:ln>
+        </p:spPr>
+        <p:style>
+          <a:lnRef idx="0">
+            <a:scrgbClr r="0" g="0" b="0"/>
+          </a:lnRef>
+          <a:fillRef idx="0">
+            <a:scrgbClr r="0" g="0" b="0"/>
+          </a:fillRef>
+          <a:effectRef idx="0">
+            <a:scrgbClr r="0" g="0" b="0"/>
+          </a:effectRef>
+          <a:fontRef idx="minor">
+            <a:schemeClr val="lt1"/>
+          </a:fontRef>
+        </p:style>
+        <p:txBody>
+          <a:bodyPr wrap="square" rtlCol="0" anchor="t">
+            <a:spAutoFit/>
+          </a:bodyPr>
+          <a:lstStyle/>
+          <a:p>
+            <a:pPr marL="342900" indent="-342900">
+              <a:buFont typeface="Wingdings" panose="05000000000000000000" pitchFamily="2" charset="2"/>
+              <a:buChar char="Ø"/>
+            </a:pPr>
+            <a:r>
+              <a:rPr lang="zh-CN" altLang="en-US" b="1" dirty="0">
+                <a:solidFill>
+                  <a:schemeClr val="bg1"/>
+                </a:solidFill>
+                <a:latin typeface="微软雅黑" panose="020B0503020204020204" charset="-122"/>
+                <a:ea typeface="微软雅黑" panose="020B0503020204020204" charset="-122"/>
+                <a:sym typeface="+mn-ea"/>
+              </a:rPr>
+              <a:t>试穿反馈</a:t>
+            </a:r>
+            <a:r>
+              <a:rPr lang="en-US" altLang="zh-CN" sz="1400" b="1" dirty="0">
+                <a:solidFill>
+                  <a:srgbClr val="FFC000"/>
+                </a:solidFill>
+                <a:latin typeface="微软雅黑" panose="020B0503020204020204" charset="-122"/>
+                <a:ea typeface="微软雅黑" panose="020B0503020204020204" charset="-122"/>
+                <a:sym typeface="+mn-ea"/>
+              </a:rPr>
+              <a:t>【</a:t>
+            </a:r>
+            <a:r>
+              <a:rPr lang="en-US" altLang="zh-CN" sz="1400" b="1" dirty="0"/>
+              <a:t> </a:t>
+            </a:r>
+            <a:r>
+              <a:rPr lang="en-US" altLang="zh-CN" sz="1400" b="1" dirty="0">
+                <a:solidFill>
+                  <a:srgbClr val="FFC000"/>
+                </a:solidFill>
+                <a:latin typeface="微软雅黑" panose="020B0503020204020204" charset="-122"/>
+                <a:ea typeface="微软雅黑" panose="020B0503020204020204" charset="-122"/>
+              </a:rPr>
+              <a:t>Athletes’ Feedback】</a:t>
+            </a:r>
+            <a:endParaRPr lang="zh-CN" altLang="en-US" sz="1200" b="1" dirty="0">
+              <a:solidFill>
+                <a:srgbClr val="FFC000"/>
+              </a:solidFill>
+              <a:latin typeface="微软雅黑" panose="020B0503020204020204" charset="-122"/>
+              <a:ea typeface="微软雅黑" panose="020B0503020204020204" charset="-122"/>
+              <a:sym typeface="+mn-ea"/>
+            </a:endParaRPr>
+          </a:p>
+        </p:txBody>
+      </p:sp>
+      <p:sp>
+        <p:nvSpPr>
+          <p:cNvPr id="34" name="矩形 33"/>
+          <p:cNvSpPr/>
+          <p:nvPr/>
+        </p:nvSpPr>
+        <p:spPr>
+          <a:xfrm>
+            <a:off x="4367808" y="154659"/>
+            <a:ext cx="3384376" cy="307777"/>
+          </a:xfrm>
+          <a:prstGeom prst="rect">
+            <a:avLst/>
+          </a:prstGeom>
+        </p:spPr>
+        <p:txBody>
+          <a:bodyPr wrap="square">
+            <a:spAutoFit/>
+          </a:bodyPr>
+          <a:lstStyle/>
+          <a:p>
+            <a:pPr>
+              <a:spcBef>
+                <a:spcPts val="1100"/>
+              </a:spcBef>
+              <a:defRPr sz="4800">
+                <a:solidFill>
+                  <a:srgbClr val="FFFFFF"/>
+                </a:solidFill>
+                <a:latin typeface="FZHei-B01S"/>
+                <a:ea typeface="FZHei-B01S"/>
+                <a:cs typeface="FZHei-B01S"/>
+                <a:sym typeface="FZHei-B01S"/>
+              </a:defRPr>
+            </a:pPr>
+            <a:r>
+              <a:rPr lang="en-US" altLang="zh-CN" sz="1400" b="1" dirty="0">
+                <a:solidFill>
+                  <a:schemeClr val="bg1"/>
+                </a:solidFill>
+                <a:latin typeface="微软雅黑" panose="020B0503020204020204" charset="-122"/>
+                <a:ea typeface="微软雅黑" panose="020B0503020204020204" charset="-122"/>
+              </a:rPr>
+              <a:t>I  &lt;</a:t>
+            </a:r>
+            <a:r>
+              <a:rPr lang="zh-CN" altLang="en-US" sz="1400" b="1" dirty="0">
+                <a:solidFill>
+                  <a:schemeClr val="bg1"/>
+                </a:solidFill>
+                <a:latin typeface="微软雅黑" panose="020B0503020204020204" charset="-122"/>
+                <a:ea typeface="微软雅黑" panose="020B0503020204020204" charset="-122"/>
+              </a:rPr>
+              <a:t>面料信息</a:t>
+            </a:r>
+            <a:r>
+              <a:rPr lang="en-US" altLang="zh-CN" sz="1400" b="1" dirty="0">
+                <a:solidFill>
+                  <a:schemeClr val="bg1"/>
+                </a:solidFill>
+                <a:latin typeface="微软雅黑" panose="020B0503020204020204" charset="-122"/>
+                <a:ea typeface="微软雅黑" panose="020B0503020204020204" charset="-122"/>
+              </a:rPr>
+              <a:t>&gt;</a:t>
+            </a:r>
+          </a:p>
+        </p:txBody>
+      </p:sp>
+      <p:sp>
+        <p:nvSpPr>
+          <p:cNvPr id="23" name="文本框 22">
+            <a:extLst>
+              <a:ext uri="{FF2B5EF4-FFF2-40B4-BE49-F238E27FC236}">
+                <a16:creationId xmlns:a16="http://schemas.microsoft.com/office/drawing/2014/main" id="{C09B7F65-DC1D-88AB-C3DF-562E19A24E35}"/>
+              </a:ext>
+            </a:extLst>
+          </p:cNvPr>
+          <p:cNvSpPr txBox="1"/>
+          <p:nvPr/>
+        </p:nvSpPr>
+        <p:spPr>
+          <a:xfrm>
+            <a:off x="262961" y="4548820"/>
+            <a:ext cx="5617015" cy="1944000"/>
+          </a:xfrm>
+          <a:prstGeom prst="rect">
+            <a:avLst/>
+          </a:prstGeom>
+          <a:solidFill>
+            <a:scrgbClr r="0" g="0" b="0">
+              <a:alpha val="0"/>
+            </a:scrgbClr>
+          </a:solidFill>
+          <a:ln w="38100" cap="flat">
+            <a:solidFill>
+              <a:srgbClr val="E16776"/>
+            </a:solidFill>
+            <a:prstDash val="dash"/>
+            <a:miter lim="400000"/>
+          </a:ln>
+        </p:spPr>
+        <p:style>
+          <a:lnRef idx="0">
+            <a:scrgbClr r="0" g="0" b="0"/>
+          </a:lnRef>
+          <a:fillRef idx="0">
+            <a:scrgbClr r="0" g="0" b="0"/>
+          </a:fillRef>
+          <a:effectRef idx="0">
+            <a:scrgbClr r="0" g="0" b="0"/>
+          </a:effectRef>
+          <a:fontRef idx="none"/>
+        </p:style>
+        <p:txBody>
+          <a:bodyPr rot="0" spcFirstLastPara="1" vertOverflow="overflow" horzOverflow="overflow" vert="horz" wrap="square" lIns="45719" tIns="45719" rIns="45719" bIns="45719" numCol="1" spcCol="38100" rtlCol="0" anchor="t">
+            <a:spAutoFit/>
+          </a:bodyPr>
+          <a:lstStyle/>
+          <a:p>
+            <a:pPr marR="0" lvl="0" algn="ctr" defTabSz="457200" rtl="0" eaLnBrk="1" fontAlgn="auto" latinLnBrk="0" hangingPunct="0">
+              <a:lnSpc>
+                <a:spcPct val="150000"/>
+              </a:lnSpc>
+              <a:spcBef>
+                <a:spcPts val="0"/>
+              </a:spcBef>
+              <a:spcAft>
+                <a:spcPts val="0"/>
+              </a:spcAft>
+              <a:buClrTx/>
+              <a:buSzTx/>
+              <a:defRPr/>
+            </a:pPr>
+            <a:r>
+              <a:rPr lang="zh-CN" altLang="en-US" sz="1400" b="1" dirty="0">
+                <a:solidFill>
+                  <a:srgbClr val="C00000"/>
+                </a:solidFill>
+                <a:latin typeface="微软雅黑" panose="020B0503020204020204" charset="-122"/>
+                <a:ea typeface="微软雅黑" panose="020B0503020204020204" charset="-122"/>
+              </a:rPr>
+              <a:t>优点 </a:t>
+            </a:r>
+            <a:r>
+              <a:rPr lang="en-US" altLang="zh-CN" sz="1400" b="1" dirty="0">
+                <a:solidFill>
+                  <a:srgbClr val="C00000"/>
+                </a:solidFill>
+                <a:latin typeface="微软雅黑" panose="020B0503020204020204" charset="-122"/>
+                <a:ea typeface="微软雅黑" panose="020B0503020204020204" charset="-122"/>
+              </a:rPr>
+              <a:t>strengths</a:t>
+            </a:r>
+            <a:endParaRPr lang="en-US" altLang="zh-CN" sz="1400" dirty="0">
+              <a:solidFill>
+                <a:schemeClr val="tx1"/>
+              </a:solidFill>
+              <a:latin typeface="微软雅黑" panose="020B0503020204020204" charset="-122"/>
+              <a:ea typeface="微软雅黑" panose="020B0503020204020204" charset="-122"/>
+            </a:endParaRPr>
+          </a:p>
+        </p:txBody>
+      </p:sp>
+      <p:sp>
+        <p:nvSpPr>
+          <p:cNvPr id="26" name="文本框 25">
+            <a:extLst>
+              <a:ext uri="{FF2B5EF4-FFF2-40B4-BE49-F238E27FC236}">
+                <a16:creationId xmlns:a16="http://schemas.microsoft.com/office/drawing/2014/main" id="{73D3E686-1196-993A-B9DD-850EE760CB9F}"/>
+              </a:ext>
+            </a:extLst>
+          </p:cNvPr>
+          <p:cNvSpPr txBox="1"/>
+          <p:nvPr/>
+        </p:nvSpPr>
+        <p:spPr>
+          <a:xfrm>
+            <a:off x="6096000" y="4548820"/>
+            <a:ext cx="4428601" cy="1944000"/>
+          </a:xfrm>
+          <a:prstGeom prst="rect">
+            <a:avLst/>
+          </a:prstGeom>
+          <a:solidFill>
+            <a:scrgbClr r="0" g="0" b="0">
+              <a:alpha val="0"/>
+            </a:scrgbClr>
+          </a:solidFill>
+          <a:ln w="38100" cap="flat">
+            <a:solidFill>
+              <a:srgbClr val="C3E0FF"/>
+            </a:solidFill>
+            <a:prstDash val="dash"/>
+            <a:miter lim="400000"/>
+          </a:ln>
+        </p:spPr>
+        <p:style>
+          <a:lnRef idx="0">
+            <a:scrgbClr r="0" g="0" b="0"/>
+          </a:lnRef>
+          <a:fillRef idx="0">
+            <a:scrgbClr r="0" g="0" b="0"/>
+          </a:fillRef>
+          <a:effectRef idx="0">
+            <a:scrgbClr r="0" g="0" b="0"/>
+          </a:effectRef>
+          <a:fontRef idx="none"/>
+        </p:style>
+        <p:txBody>
+          <a:bodyPr rot="0" spcFirstLastPara="1" vertOverflow="overflow" horzOverflow="overflow" vert="horz" wrap="square" lIns="45719" tIns="45719" rIns="45719" bIns="45719" numCol="1" spcCol="38100" rtlCol="0" anchor="t">
+            <a:spAutoFit/>
+          </a:bodyPr>
+          <a:lstStyle>
+            <a:defPPr marL="0" marR="0" indent="0" algn="l" defTabSz="914400" rtl="0" fontAlgn="auto" latinLnBrk="1" hangingPunct="0">
+              <a:lnSpc>
+                <a:spcPct val="100000"/>
+              </a:lnSpc>
+              <a:spcBef>
+                <a:spcPts val="0"/>
+              </a:spcBef>
+              <a:spcAft>
+                <a:spcPts val="0"/>
+              </a:spcAft>
+              <a:buClrTx/>
+              <a:buSzTx/>
+              <a:buFontTx/>
+              <a:buNone/>
+              <a:defRPr kumimoji="0" sz="1800" b="0" i="0" u="none" strike="noStrike" cap="none" spc="0" normalizeH="0" baseline="0">
+                <a:ln>
+                  <a:noFill/>
+                </a:ln>
+                <a:solidFill>
+                  <a:srgbClr val="000000"/>
+                </a:solidFill>
+                <a:effectLst/>
+                <a:uFillTx/>
+              </a:defRPr>
+            </a:defPPr>
+            <a:lvl1pPr lvl="0" algn="ctr" eaLnBrk="1">
+              <a:lnSpc>
+                <a:spcPct val="150000"/>
+              </a:lnSpc>
+              <a:defRPr sz="1600" b="1">
+                <a:solidFill>
+                  <a:schemeClr val="tx1"/>
+                </a:solidFill>
+                <a:latin typeface="微软雅黑" panose="020B0503020204020204" charset="-122"/>
+                <a:ea typeface="微软雅黑" panose="020B0503020204020204" charset="-122"/>
+              </a:defRPr>
+            </a:lvl1pPr>
+          </a:lstStyle>
+          <a:p>
+            <a:r>
+              <a:rPr lang="zh-CN" altLang="en-US" sz="1400" dirty="0">
+                <a:solidFill>
+                  <a:srgbClr val="0070C0"/>
+                </a:solidFill>
+              </a:rPr>
+              <a:t>缺点 </a:t>
+            </a:r>
+            <a:r>
+              <a:rPr lang="en-US" altLang="zh-CN" sz="1400" dirty="0">
+                <a:solidFill>
+                  <a:srgbClr val="0070C0"/>
+                </a:solidFill>
+              </a:rPr>
+              <a:t>drawbacks</a:t>
+            </a:r>
+            <a:endParaRPr lang="en-US" altLang="zh-CN" sz="1400" b="0" dirty="0"/>
+          </a:p>
+        </p:txBody>
+      </p:sp>
+    </p:spTree>
+  </p:cSld>
+  <p:clrMapOvr>
+    <a:masterClrMapping/>
+  </p:clrMapOvr>
+  <p:transition spd="med"/>
+</p:sld>
+</file>
+
+<file path=ppt/slides/slide19.xml><?xml version="1.0" encoding="utf-8"?>
+<p:sld xmlns:a="http://schemas.openxmlformats.org/drawingml/2006/main" xmlns:r="http://schemas.openxmlformats.org/officeDocument/2006/relationships" xmlns:p="http://schemas.openxmlformats.org/presentationml/2006/main">
+  <p:cSld>
+    <p:spTree>
+      <p:nvGrpSpPr>
+        <p:cNvPr id="1" name="">
+          <a:extLst>
+            <a:ext uri="{FF2B5EF4-FFF2-40B4-BE49-F238E27FC236}">
+              <a16:creationId xmlns:a16="http://schemas.microsoft.com/office/drawing/2014/main" id="{3C90DF3F-599A-128F-2CD5-AA91FA72BA45}"/>
+            </a:ext>
+          </a:extLst>
+        </p:cNvPr>
+        <p:cNvGrpSpPr/>
+        <p:nvPr/>
+      </p:nvGrpSpPr>
+      <p:grpSpPr>
+        <a:xfrm>
+          <a:off x="0" y="0"/>
+          <a:ext cx="0" cy="0"/>
+          <a:chOff x="0" y="0"/>
+          <a:chExt cx="0" cy="0"/>
+        </a:xfrm>
+      </p:grpSpPr>
+      <p:cxnSp>
+        <p:nvCxnSpPr>
+          <p:cNvPr id="5" name="直接连接符 4">
+            <a:extLst>
+              <a:ext uri="{FF2B5EF4-FFF2-40B4-BE49-F238E27FC236}">
+                <a16:creationId xmlns:a16="http://schemas.microsoft.com/office/drawing/2014/main" id="{BE84036E-0D18-C531-8E4A-F50243307089}"/>
+              </a:ext>
+            </a:extLst>
+          </p:cNvPr>
+          <p:cNvCxnSpPr/>
+          <p:nvPr/>
+        </p:nvCxnSpPr>
+        <p:spPr>
+          <a:xfrm>
+            <a:off x="4312963" y="1107442"/>
+            <a:ext cx="3619289" cy="0"/>
+          </a:xfrm>
+          <a:prstGeom prst="line">
+            <a:avLst/>
+          </a:prstGeom>
+          <a:ln w="9525" cap="flat" cmpd="sng" algn="ctr">
+            <a:solidFill>
+              <a:schemeClr val="dk1"/>
+            </a:solidFill>
+            <a:prstDash val="dash"/>
+            <a:round/>
+            <a:headEnd type="none" w="med" len="med"/>
+            <a:tailEnd type="none" w="med" len="med"/>
+          </a:ln>
+        </p:spPr>
+        <p:style>
+          <a:lnRef idx="0">
+            <a:scrgbClr r="0" g="0" b="0"/>
+          </a:lnRef>
+          <a:fillRef idx="0">
+            <a:scrgbClr r="0" g="0" b="0"/>
+          </a:fillRef>
+          <a:effectRef idx="0">
+            <a:scrgbClr r="0" g="0" b="0"/>
+          </a:effectRef>
+          <a:fontRef idx="minor">
+            <a:schemeClr val="tx1"/>
+          </a:fontRef>
+        </p:style>
+      </p:cxnSp>
+      <p:cxnSp>
+        <p:nvCxnSpPr>
+          <p:cNvPr id="6" name="直接连接符 5">
+            <a:extLst>
+              <a:ext uri="{FF2B5EF4-FFF2-40B4-BE49-F238E27FC236}">
+                <a16:creationId xmlns:a16="http://schemas.microsoft.com/office/drawing/2014/main" id="{D380D277-02AA-1AD6-F687-EC534604EB64}"/>
+              </a:ext>
+            </a:extLst>
+          </p:cNvPr>
+          <p:cNvCxnSpPr/>
+          <p:nvPr/>
+        </p:nvCxnSpPr>
+        <p:spPr>
+          <a:xfrm>
+            <a:off x="693674" y="1107442"/>
+            <a:ext cx="3619289" cy="0"/>
+          </a:xfrm>
+          <a:prstGeom prst="line">
+            <a:avLst/>
+          </a:prstGeom>
+          <a:ln>
+            <a:headEnd type="none" w="med" len="med"/>
+            <a:tailEnd type="none" w="med" len="med"/>
+          </a:ln>
+        </p:spPr>
+        <p:style>
+          <a:lnRef idx="2">
+            <a:schemeClr val="dk1"/>
+          </a:lnRef>
+          <a:fillRef idx="0">
+            <a:schemeClr val="dk1"/>
+          </a:fillRef>
+          <a:effectRef idx="1">
+            <a:schemeClr val="dk1"/>
+          </a:effectRef>
+          <a:fontRef idx="minor">
+            <a:schemeClr val="tx1"/>
+          </a:fontRef>
+        </p:style>
+      </p:cxnSp>
+      <p:sp>
+        <p:nvSpPr>
+          <p:cNvPr id="2" name="文本框 1">
+            <a:extLst>
+              <a:ext uri="{FF2B5EF4-FFF2-40B4-BE49-F238E27FC236}">
+                <a16:creationId xmlns:a16="http://schemas.microsoft.com/office/drawing/2014/main" id="{8E969061-10B0-FF3B-2558-B4DDF2B0A8DD}"/>
+              </a:ext>
+            </a:extLst>
+          </p:cNvPr>
+          <p:cNvSpPr txBox="1"/>
+          <p:nvPr/>
+        </p:nvSpPr>
+        <p:spPr>
+          <a:xfrm>
+            <a:off x="546100" y="673100"/>
+            <a:ext cx="3175000" cy="400108"/>
+          </a:xfrm>
+          <a:prstGeom prst="rect">
+            <a:avLst/>
+          </a:prstGeom>
+          <a:solidFill>
+            <a:srgbClr val="000000">
+              <a:alpha val="0"/>
+            </a:srgbClr>
+          </a:solidFill>
+          <a:ln w="12700" cap="flat">
+            <a:noFill/>
+            <a:miter lim="400000"/>
+          </a:ln>
+        </p:spPr>
+        <p:style>
+          <a:lnRef idx="0">
+            <a:scrgbClr r="0" g="0" b="0"/>
+          </a:lnRef>
+          <a:fillRef idx="0">
+            <a:scrgbClr r="0" g="0" b="0"/>
+          </a:fillRef>
+          <a:effectRef idx="0">
+            <a:scrgbClr r="0" g="0" b="0"/>
+          </a:effectRef>
+          <a:fontRef idx="none"/>
+        </p:style>
+        <p:txBody>
+          <a:bodyPr rot="0" spcFirstLastPara="1" vertOverflow="overflow" horzOverflow="overflow" vert="horz" wrap="square" lIns="45719" tIns="45719" rIns="45719" bIns="45719" numCol="1" spcCol="38100" rtlCol="0" anchor="t">
+            <a:spAutoFit/>
+          </a:bodyPr>
+          <a:lstStyle/>
+          <a:p>
+            <a:pPr marL="457200" indent="-457200">
+              <a:buFont typeface="Wingdings" panose="05000000000000000000" pitchFamily="2" charset="2"/>
+              <a:buChar char="ü"/>
+            </a:pPr>
+            <a:r>
+              <a:rPr kumimoji="0" lang="zh-CN" altLang="en-US" sz="2000" b="1" i="0" u="none" strike="noStrike" cap="none" spc="0" normalizeH="0" baseline="0">
+                <a:ln>
+                  <a:noFill/>
+                </a:ln>
+                <a:effectLst/>
+                <a:uFillTx/>
+                <a:latin typeface="Arial" panose="020B0604020202020204" pitchFamily="34" charset="0"/>
+                <a:ea typeface="微软雅黑" panose="020B0503020204020204" charset="-122"/>
+                <a:cs typeface="Arial" panose="020B0604020202020204"/>
+                <a:sym typeface="Arial" panose="020B0604020202020204"/>
+              </a:rPr>
+              <a:t>服装试穿反馈结果</a:t>
+            </a:r>
+          </a:p>
+        </p:txBody>
+      </p:sp>
+      <p:sp>
+        <p:nvSpPr>
+          <p:cNvPr id="4" name="椭圆 3">
+            <a:extLst>
+              <a:ext uri="{FF2B5EF4-FFF2-40B4-BE49-F238E27FC236}">
+                <a16:creationId xmlns:a16="http://schemas.microsoft.com/office/drawing/2014/main" id="{C72C4F87-E973-B28C-E9DE-43A09BA92BAA}"/>
+              </a:ext>
+            </a:extLst>
+          </p:cNvPr>
+          <p:cNvSpPr/>
+          <p:nvPr/>
+        </p:nvSpPr>
+        <p:spPr>
+          <a:xfrm>
+            <a:off x="482600" y="1244600"/>
+            <a:ext cx="1435100" cy="1435100"/>
+          </a:xfrm>
+          <a:prstGeom prst="ellipse">
+            <a:avLst/>
+          </a:prstGeom>
+          <a:solidFill>
+            <a:srgbClr val="FFFFFF">
+              <a:alpha val="0"/>
+            </a:srgbClr>
+          </a:solidFill>
+          <a:ln w="76200" cap="flat">
+            <a:solidFill>
+              <a:srgbClr val="F4C1BD"/>
+            </a:solidFill>
+            <a:prstDash val="dash"/>
+            <a:round/>
+          </a:ln>
+          <a:effectLst/>
+        </p:spPr>
+        <p:style>
+          <a:lnRef idx="0">
+            <a:scrgbClr r="0" g="0" b="0"/>
+          </a:lnRef>
+          <a:fillRef idx="0">
+            <a:scrgbClr r="0" g="0" b="0"/>
+          </a:fillRef>
+          <a:effectRef idx="0">
+            <a:scrgbClr r="0" g="0" b="0"/>
+          </a:effectRef>
+          <a:fontRef idx="none"/>
+        </p:style>
+        <p:txBody>
+          <a:bodyPr rot="0" spcFirstLastPara="1" vertOverflow="overflow" horzOverflow="overflow" vert="horz" wrap="square" lIns="45719" tIns="45719" rIns="45719" bIns="45719" numCol="1" spcCol="38100" rtlCol="0" anchor="ctr">
+            <a:spAutoFit/>
+          </a:bodyPr>
+          <a:lstStyle/>
+          <a:p>
+            <a:pPr marL="0" marR="0" indent="0" algn="l" defTabSz="457200" rtl="0" fontAlgn="auto" latinLnBrk="0" hangingPunct="0">
+              <a:lnSpc>
+                <a:spcPct val="100000"/>
+              </a:lnSpc>
+              <a:spcBef>
+                <a:spcPts val="0"/>
+              </a:spcBef>
+              <a:spcAft>
+                <a:spcPts val="0"/>
+              </a:spcAft>
+              <a:buClrTx/>
+              <a:buSzTx/>
+              <a:buFontTx/>
+              <a:buNone/>
+            </a:pPr>
+            <a:endParaRPr kumimoji="0" lang="zh-CN" altLang="en-US" sz="1800" b="0" i="0" u="none" strike="noStrike" cap="none" spc="0" normalizeH="0" baseline="0">
+              <a:ln>
+                <a:noFill/>
+              </a:ln>
+              <a:solidFill>
+                <a:srgbClr val="000000"/>
+              </a:solidFill>
+              <a:effectLst/>
+              <a:uFillTx/>
+              <a:latin typeface="Arial" panose="020B0604020202020204"/>
+              <a:ea typeface="Arial" panose="020B0604020202020204"/>
+              <a:cs typeface="Arial" panose="020B0604020202020204"/>
+              <a:sym typeface="Arial" panose="020B0604020202020204"/>
+            </a:endParaRPr>
+          </a:p>
+        </p:txBody>
+      </p:sp>
+      <p:sp>
+        <p:nvSpPr>
+          <p:cNvPr id="7" name="文本框 6">
+            <a:extLst>
+              <a:ext uri="{FF2B5EF4-FFF2-40B4-BE49-F238E27FC236}">
+                <a16:creationId xmlns:a16="http://schemas.microsoft.com/office/drawing/2014/main" id="{E852F407-03E3-FAE5-0036-9CD776509CE2}"/>
+              </a:ext>
+            </a:extLst>
+          </p:cNvPr>
+          <p:cNvSpPr txBox="1"/>
+          <p:nvPr/>
+        </p:nvSpPr>
+        <p:spPr>
+          <a:xfrm>
+            <a:off x="419100" y="1752600"/>
+            <a:ext cx="1587500" cy="406400"/>
+          </a:xfrm>
+          <a:prstGeom prst="rect">
+            <a:avLst/>
+          </a:prstGeom>
+          <a:solidFill>
+            <a:srgbClr val="000000">
+              <a:alpha val="0"/>
+            </a:srgbClr>
+          </a:solidFill>
+          <a:ln w="12700" cap="flat">
+            <a:noFill/>
+            <a:miter lim="400000"/>
+          </a:ln>
+        </p:spPr>
+        <p:style>
+          <a:lnRef idx="0">
+            <a:scrgbClr r="0" g="0" b="0"/>
+          </a:lnRef>
+          <a:fillRef idx="0">
+            <a:scrgbClr r="0" g="0" b="0"/>
+          </a:fillRef>
+          <a:effectRef idx="0">
+            <a:scrgbClr r="0" g="0" b="0"/>
+          </a:effectRef>
+          <a:fontRef idx="none"/>
+        </p:style>
+        <p:txBody>
+          <a:bodyPr rot="0" spcFirstLastPara="1" vertOverflow="overflow" horzOverflow="overflow" vert="horz" wrap="square" lIns="45719" tIns="45719" rIns="45719" bIns="45719" numCol="1" spcCol="38100" rtlCol="0" anchor="t">
+            <a:spAutoFit/>
+          </a:bodyPr>
+          <a:lstStyle/>
+          <a:p>
+            <a:pPr marL="0" marR="0" indent="0" algn="ctr" defTabSz="457200" rtl="0" fontAlgn="auto" latinLnBrk="0" hangingPunct="0">
+              <a:spcBef>
+                <a:spcPts val="0"/>
+              </a:spcBef>
+              <a:spcAft>
+                <a:spcPts val="0"/>
+              </a:spcAft>
+              <a:buClrTx/>
+              <a:buSzTx/>
+              <a:buFontTx/>
+              <a:buNone/>
+            </a:pPr>
+            <a:r>
+              <a:rPr kumimoji="0" lang="zh-CN" altLang="en-US" sz="2000" b="1" i="0" u="none" strike="noStrike" cap="none" spc="0" normalizeH="0" baseline="0">
+                <a:ln>
+                  <a:noFill/>
+                </a:ln>
+                <a:effectLst/>
+                <a:uFillTx/>
+                <a:latin typeface="Arial" panose="020B0604020202020204" pitchFamily="34" charset="0"/>
+                <a:ea typeface="微软雅黑" panose="020B0503020204020204" charset="-122"/>
+                <a:cs typeface="Arial" panose="020B0604020202020204"/>
+                <a:sym typeface="Arial" panose="020B0604020202020204"/>
+              </a:rPr>
+              <a:t>版型</a:t>
+            </a:r>
+          </a:p>
+        </p:txBody>
+      </p:sp>
+      <p:graphicFrame>
+        <p:nvGraphicFramePr>
+          <p:cNvPr id="13" name="图表 12">
+            <a:extLst>
+              <a:ext uri="{FF2B5EF4-FFF2-40B4-BE49-F238E27FC236}">
+                <a16:creationId xmlns:a16="http://schemas.microsoft.com/office/drawing/2014/main" id="{47F463C8-6746-8E48-52DF-5419C32C0E5D}"/>
+              </a:ext>
+            </a:extLst>
+          </p:cNvPr>
+          <p:cNvGraphicFramePr/>
+          <p:nvPr/>
+        </p:nvGraphicFramePr>
+        <p:xfrm>
+          <a:off x="1625600" y="1016000"/>
+          <a:ext cx="2413000" cy="1905000"/>
+        </p:xfrm>
+        <a:graphic>
+          <a:graphicData uri="http://schemas.openxmlformats.org/drawingml/2006/chart">
+            <c:chart xmlns:c="http://schemas.openxmlformats.org/drawingml/2006/chart" xmlns:r="http://schemas.openxmlformats.org/officeDocument/2006/relationships" r:id="rId3"/>
+          </a:graphicData>
+        </a:graphic>
+      </p:graphicFrame>
+      <p:sp>
+        <p:nvSpPr>
+          <p:cNvPr id="14" name="椭圆 13">
+            <a:extLst>
+              <a:ext uri="{FF2B5EF4-FFF2-40B4-BE49-F238E27FC236}">
+                <a16:creationId xmlns:a16="http://schemas.microsoft.com/office/drawing/2014/main" id="{39984E8F-25E6-BAA9-C88B-23E5E09B9B9E}"/>
+              </a:ext>
+            </a:extLst>
+          </p:cNvPr>
+          <p:cNvSpPr/>
+          <p:nvPr/>
+        </p:nvSpPr>
+        <p:spPr>
+          <a:xfrm>
+            <a:off x="4191000" y="1244600"/>
+            <a:ext cx="1435100" cy="1435100"/>
+          </a:xfrm>
+          <a:prstGeom prst="ellipse">
+            <a:avLst/>
+          </a:prstGeom>
+          <a:solidFill>
+            <a:srgbClr val="FFFFFF">
+              <a:alpha val="0"/>
+            </a:srgbClr>
+          </a:solidFill>
+          <a:ln w="76200" cap="flat">
+            <a:solidFill>
+              <a:srgbClr val="F4C1BD"/>
+            </a:solidFill>
+            <a:prstDash val="dash"/>
+            <a:round/>
+          </a:ln>
+          <a:effectLst/>
+        </p:spPr>
+        <p:style>
+          <a:lnRef idx="0">
+            <a:scrgbClr r="0" g="0" b="0"/>
+          </a:lnRef>
+          <a:fillRef idx="0">
+            <a:scrgbClr r="0" g="0" b="0"/>
+          </a:fillRef>
+          <a:effectRef idx="0">
+            <a:scrgbClr r="0" g="0" b="0"/>
+          </a:effectRef>
+          <a:fontRef idx="none"/>
+        </p:style>
+        <p:txBody>
+          <a:bodyPr rot="0" spcFirstLastPara="1" vertOverflow="overflow" horzOverflow="overflow" vert="horz" wrap="square" lIns="45719" tIns="45719" rIns="45719" bIns="45719" numCol="1" spcCol="38100" rtlCol="0" anchor="ctr">
+            <a:spAutoFit/>
+          </a:bodyPr>
+          <a:lstStyle/>
+          <a:p>
+            <a:pPr marL="0" marR="0" indent="0" algn="l" defTabSz="457200" rtl="0" fontAlgn="auto" latinLnBrk="0" hangingPunct="0">
+              <a:lnSpc>
+                <a:spcPct val="100000"/>
+              </a:lnSpc>
+              <a:spcBef>
+                <a:spcPts val="0"/>
+              </a:spcBef>
+              <a:spcAft>
+                <a:spcPts val="0"/>
+              </a:spcAft>
+              <a:buClrTx/>
+              <a:buSzTx/>
+              <a:buFontTx/>
+              <a:buNone/>
+            </a:pPr>
+            <a:endParaRPr kumimoji="0" lang="zh-CN" altLang="en-US" sz="1800" b="0" i="0" u="none" strike="noStrike" cap="none" spc="0" normalizeH="0" baseline="0">
+              <a:ln>
+                <a:noFill/>
+              </a:ln>
+              <a:solidFill>
+                <a:srgbClr val="000000"/>
+              </a:solidFill>
+              <a:effectLst/>
+              <a:uFillTx/>
+              <a:latin typeface="Arial" panose="020B0604020202020204"/>
+              <a:ea typeface="Arial" panose="020B0604020202020204"/>
+              <a:cs typeface="Arial" panose="020B0604020202020204"/>
+              <a:sym typeface="Arial" panose="020B0604020202020204"/>
+            </a:endParaRPr>
+          </a:p>
+        </p:txBody>
+      </p:sp>
+      <p:sp>
+        <p:nvSpPr>
+          <p:cNvPr id="15" name="文本框 14">
+            <a:extLst>
+              <a:ext uri="{FF2B5EF4-FFF2-40B4-BE49-F238E27FC236}">
+                <a16:creationId xmlns:a16="http://schemas.microsoft.com/office/drawing/2014/main" id="{8D951B05-D636-E5F2-21FE-589AD43C8E00}"/>
+              </a:ext>
+            </a:extLst>
+          </p:cNvPr>
+          <p:cNvSpPr txBox="1"/>
+          <p:nvPr/>
+        </p:nvSpPr>
+        <p:spPr>
+          <a:xfrm>
+            <a:off x="4127500" y="1752600"/>
+            <a:ext cx="1587500" cy="406400"/>
+          </a:xfrm>
+          <a:prstGeom prst="rect">
+            <a:avLst/>
+          </a:prstGeom>
+          <a:solidFill>
+            <a:srgbClr val="000000">
+              <a:alpha val="0"/>
+            </a:srgbClr>
+          </a:solidFill>
+          <a:ln w="12700" cap="flat">
+            <a:noFill/>
+            <a:miter lim="400000"/>
+          </a:ln>
+        </p:spPr>
+        <p:style>
+          <a:lnRef idx="0">
+            <a:scrgbClr r="0" g="0" b="0"/>
+          </a:lnRef>
+          <a:fillRef idx="0">
+            <a:scrgbClr r="0" g="0" b="0"/>
+          </a:fillRef>
+          <a:effectRef idx="0">
+            <a:scrgbClr r="0" g="0" b="0"/>
+          </a:effectRef>
+          <a:fontRef idx="none"/>
+        </p:style>
+        <p:txBody>
+          <a:bodyPr rot="0" spcFirstLastPara="1" vertOverflow="overflow" horzOverflow="overflow" vert="horz" wrap="square" lIns="45719" tIns="45719" rIns="45719" bIns="45719" numCol="1" spcCol="38100" rtlCol="0" anchor="t">
+            <a:spAutoFit/>
+          </a:bodyPr>
+          <a:lstStyle/>
+          <a:p>
+            <a:pPr marL="0" marR="0" indent="0" algn="ctr" defTabSz="457200" rtl="0" fontAlgn="auto" latinLnBrk="0" hangingPunct="0">
+              <a:spcBef>
+                <a:spcPts val="0"/>
+              </a:spcBef>
+              <a:spcAft>
+                <a:spcPts val="0"/>
+              </a:spcAft>
+              <a:buClrTx/>
+              <a:buSzTx/>
+              <a:buFontTx/>
+              <a:buNone/>
+            </a:pPr>
+            <a:r>
+              <a:rPr kumimoji="0" lang="zh-CN" altLang="en-US" sz="2000" b="1" i="0" u="none" strike="noStrike" cap="none" spc="0" normalizeH="0" baseline="0">
+                <a:ln>
+                  <a:noFill/>
+                </a:ln>
+                <a:effectLst/>
+                <a:uFillTx/>
+                <a:latin typeface="Arial" panose="020B0604020202020204" pitchFamily="34" charset="0"/>
+                <a:ea typeface="微软雅黑" panose="020B0503020204020204" charset="-122"/>
+                <a:cs typeface="Arial" panose="020B0604020202020204"/>
+                <a:sym typeface="Arial" panose="020B0604020202020204"/>
+              </a:rPr>
+              <a:t>面料</a:t>
+            </a:r>
+          </a:p>
+        </p:txBody>
+      </p:sp>
+      <p:graphicFrame>
+        <p:nvGraphicFramePr>
+          <p:cNvPr id="16" name="图表 15">
+            <a:extLst>
+              <a:ext uri="{FF2B5EF4-FFF2-40B4-BE49-F238E27FC236}">
+                <a16:creationId xmlns:a16="http://schemas.microsoft.com/office/drawing/2014/main" id="{B7644477-6B08-E436-7DC7-C39CC6B263AA}"/>
+              </a:ext>
+            </a:extLst>
+          </p:cNvPr>
+          <p:cNvGraphicFramePr/>
+          <p:nvPr/>
+        </p:nvGraphicFramePr>
+        <p:xfrm>
+          <a:off x="5334000" y="1304032"/>
+          <a:ext cx="2413000" cy="1245092"/>
+        </p:xfrm>
+        <a:graphic>
+          <a:graphicData uri="http://schemas.openxmlformats.org/drawingml/2006/chart">
+            <c:chart xmlns:c="http://schemas.openxmlformats.org/drawingml/2006/chart" xmlns:r="http://schemas.openxmlformats.org/officeDocument/2006/relationships" r:id="rId4"/>
+          </a:graphicData>
+        </a:graphic>
+      </p:graphicFrame>
+      <p:sp>
+        <p:nvSpPr>
+          <p:cNvPr id="17" name="椭圆 16">
+            <a:extLst>
+              <a:ext uri="{FF2B5EF4-FFF2-40B4-BE49-F238E27FC236}">
+                <a16:creationId xmlns:a16="http://schemas.microsoft.com/office/drawing/2014/main" id="{1EFFAB1F-AAA5-F812-49DE-DEC3474DB6A0}"/>
+              </a:ext>
+            </a:extLst>
+          </p:cNvPr>
+          <p:cNvSpPr/>
+          <p:nvPr/>
+        </p:nvSpPr>
+        <p:spPr>
+          <a:xfrm>
+            <a:off x="482600" y="2924944"/>
+            <a:ext cx="1435100" cy="1435100"/>
+          </a:xfrm>
+          <a:prstGeom prst="ellipse">
+            <a:avLst/>
+          </a:prstGeom>
+          <a:solidFill>
+            <a:srgbClr val="FFFFFF">
+              <a:alpha val="0"/>
+            </a:srgbClr>
+          </a:solidFill>
+          <a:ln w="76200" cap="flat">
+            <a:solidFill>
+              <a:srgbClr val="F4C1BD"/>
+            </a:solidFill>
+            <a:prstDash val="dash"/>
+            <a:round/>
+          </a:ln>
+          <a:effectLst/>
+        </p:spPr>
+        <p:style>
+          <a:lnRef idx="0">
+            <a:scrgbClr r="0" g="0" b="0"/>
+          </a:lnRef>
+          <a:fillRef idx="0">
+            <a:scrgbClr r="0" g="0" b="0"/>
+          </a:fillRef>
+          <a:effectRef idx="0">
+            <a:scrgbClr r="0" g="0" b="0"/>
+          </a:effectRef>
+          <a:fontRef idx="none"/>
+        </p:style>
+        <p:txBody>
+          <a:bodyPr rot="0" spcFirstLastPara="1" vertOverflow="overflow" horzOverflow="overflow" vert="horz" wrap="square" lIns="45719" tIns="45719" rIns="45719" bIns="45719" numCol="1" spcCol="38100" rtlCol="0" anchor="ctr">
+            <a:spAutoFit/>
+          </a:bodyPr>
+          <a:lstStyle/>
+          <a:p>
+            <a:pPr marL="0" marR="0" indent="0" algn="l" defTabSz="457200" rtl="0" fontAlgn="auto" latinLnBrk="0" hangingPunct="0">
+              <a:lnSpc>
+                <a:spcPct val="100000"/>
+              </a:lnSpc>
+              <a:spcBef>
+                <a:spcPts val="0"/>
+              </a:spcBef>
+              <a:spcAft>
+                <a:spcPts val="0"/>
+              </a:spcAft>
+              <a:buClrTx/>
+              <a:buSzTx/>
+              <a:buFontTx/>
+              <a:buNone/>
+            </a:pPr>
+            <a:endParaRPr kumimoji="0" lang="zh-CN" altLang="en-US" sz="1800" b="0" i="0" u="none" strike="noStrike" cap="none" spc="0" normalizeH="0" baseline="0">
+              <a:ln>
+                <a:noFill/>
+              </a:ln>
+              <a:solidFill>
+                <a:srgbClr val="000000"/>
+              </a:solidFill>
+              <a:effectLst/>
+              <a:uFillTx/>
+              <a:latin typeface="Arial" panose="020B0604020202020204"/>
+              <a:ea typeface="Arial" panose="020B0604020202020204"/>
+              <a:cs typeface="Arial" panose="020B0604020202020204"/>
+              <a:sym typeface="Arial" panose="020B0604020202020204"/>
+            </a:endParaRPr>
+          </a:p>
+        </p:txBody>
+      </p:sp>
+      <p:sp>
+        <p:nvSpPr>
+          <p:cNvPr id="18" name="文本框 17">
+            <a:extLst>
+              <a:ext uri="{FF2B5EF4-FFF2-40B4-BE49-F238E27FC236}">
+                <a16:creationId xmlns:a16="http://schemas.microsoft.com/office/drawing/2014/main" id="{11CE48F8-C4C1-1829-A475-4215F61DEACB}"/>
+              </a:ext>
+            </a:extLst>
+          </p:cNvPr>
+          <p:cNvSpPr txBox="1"/>
+          <p:nvPr/>
+        </p:nvSpPr>
+        <p:spPr>
+          <a:xfrm>
+            <a:off x="419100" y="3432944"/>
+            <a:ext cx="1587500" cy="406400"/>
+          </a:xfrm>
+          <a:prstGeom prst="rect">
+            <a:avLst/>
+          </a:prstGeom>
+          <a:solidFill>
+            <a:srgbClr val="000000">
+              <a:alpha val="0"/>
+            </a:srgbClr>
+          </a:solidFill>
+          <a:ln w="12700" cap="flat">
+            <a:noFill/>
+            <a:miter lim="400000"/>
+          </a:ln>
+        </p:spPr>
+        <p:style>
+          <a:lnRef idx="0">
+            <a:scrgbClr r="0" g="0" b="0"/>
+          </a:lnRef>
+          <a:fillRef idx="0">
+            <a:scrgbClr r="0" g="0" b="0"/>
+          </a:fillRef>
+          <a:effectRef idx="0">
+            <a:scrgbClr r="0" g="0" b="0"/>
+          </a:effectRef>
+          <a:fontRef idx="none"/>
+        </p:style>
+        <p:txBody>
+          <a:bodyPr rot="0" spcFirstLastPara="1" vertOverflow="overflow" horzOverflow="overflow" vert="horz" wrap="square" lIns="45719" tIns="45719" rIns="45719" bIns="45719" numCol="1" spcCol="38100" rtlCol="0" anchor="t">
+            <a:spAutoFit/>
+          </a:bodyPr>
+          <a:lstStyle/>
+          <a:p>
+            <a:pPr marL="0" marR="0" indent="0" algn="ctr" defTabSz="457200" rtl="0" fontAlgn="auto" latinLnBrk="0" hangingPunct="0">
+              <a:spcBef>
+                <a:spcPts val="0"/>
+              </a:spcBef>
+              <a:spcAft>
+                <a:spcPts val="0"/>
+              </a:spcAft>
+              <a:buClrTx/>
+              <a:buSzTx/>
+              <a:buFontTx/>
+              <a:buNone/>
+            </a:pPr>
+            <a:r>
+              <a:rPr kumimoji="0" lang="zh-CN" altLang="en-US" sz="2000" b="1" i="0" u="none" strike="noStrike" cap="none" spc="0" normalizeH="0" baseline="0">
+                <a:ln>
+                  <a:noFill/>
+                </a:ln>
+                <a:effectLst/>
+                <a:uFillTx/>
+                <a:latin typeface="Arial" panose="020B0604020202020204" pitchFamily="34" charset="0"/>
+                <a:ea typeface="微软雅黑" panose="020B0503020204020204" charset="-122"/>
+                <a:cs typeface="Arial" panose="020B0604020202020204"/>
+                <a:sym typeface="Arial" panose="020B0604020202020204"/>
+              </a:rPr>
+              <a:t>吸湿排汗</a:t>
+            </a:r>
+          </a:p>
+        </p:txBody>
+      </p:sp>
+      <p:graphicFrame>
+        <p:nvGraphicFramePr>
+          <p:cNvPr id="19" name="图表 18">
+            <a:extLst>
+              <a:ext uri="{FF2B5EF4-FFF2-40B4-BE49-F238E27FC236}">
+                <a16:creationId xmlns:a16="http://schemas.microsoft.com/office/drawing/2014/main" id="{623D2B04-54F1-4151-2F5F-0D6D0DD6D6E3}"/>
+              </a:ext>
+            </a:extLst>
+          </p:cNvPr>
+          <p:cNvGraphicFramePr/>
+          <p:nvPr/>
+        </p:nvGraphicFramePr>
+        <p:xfrm>
+          <a:off x="1625600" y="3056384"/>
+          <a:ext cx="2413000" cy="1245096"/>
+        </p:xfrm>
+        <a:graphic>
+          <a:graphicData uri="http://schemas.openxmlformats.org/drawingml/2006/chart">
+            <c:chart xmlns:c="http://schemas.openxmlformats.org/drawingml/2006/chart" xmlns:r="http://schemas.openxmlformats.org/officeDocument/2006/relationships" r:id="rId5"/>
+          </a:graphicData>
+        </a:graphic>
+      </p:graphicFrame>
+      <p:sp>
+        <p:nvSpPr>
+          <p:cNvPr id="20" name="椭圆 19">
+            <a:extLst>
+              <a:ext uri="{FF2B5EF4-FFF2-40B4-BE49-F238E27FC236}">
+                <a16:creationId xmlns:a16="http://schemas.microsoft.com/office/drawing/2014/main" id="{AB24AF34-6ECA-CF9A-E76C-AC17C2289341}"/>
+              </a:ext>
+            </a:extLst>
+          </p:cNvPr>
+          <p:cNvSpPr/>
+          <p:nvPr/>
+        </p:nvSpPr>
+        <p:spPr>
+          <a:xfrm>
+            <a:off x="4191000" y="2924944"/>
+            <a:ext cx="1435100" cy="1435100"/>
+          </a:xfrm>
+          <a:prstGeom prst="ellipse">
+            <a:avLst/>
+          </a:prstGeom>
+          <a:solidFill>
+            <a:srgbClr val="FFFFFF">
+              <a:alpha val="0"/>
+            </a:srgbClr>
+          </a:solidFill>
+          <a:ln w="76200" cap="flat">
+            <a:solidFill>
+              <a:srgbClr val="F4C1BD"/>
+            </a:solidFill>
+            <a:prstDash val="dash"/>
+            <a:round/>
+          </a:ln>
+          <a:effectLst/>
+        </p:spPr>
+        <p:style>
+          <a:lnRef idx="0">
+            <a:scrgbClr r="0" g="0" b="0"/>
+          </a:lnRef>
+          <a:fillRef idx="0">
+            <a:scrgbClr r="0" g="0" b="0"/>
+          </a:fillRef>
+          <a:effectRef idx="0">
+            <a:scrgbClr r="0" g="0" b="0"/>
+          </a:effectRef>
+          <a:fontRef idx="none"/>
+        </p:style>
+        <p:txBody>
+          <a:bodyPr rot="0" spcFirstLastPara="1" vertOverflow="overflow" horzOverflow="overflow" vert="horz" wrap="square" lIns="45719" tIns="45719" rIns="45719" bIns="45719" numCol="1" spcCol="38100" rtlCol="0" anchor="ctr">
+            <a:spAutoFit/>
+          </a:bodyPr>
+          <a:lstStyle/>
+          <a:p>
+            <a:pPr marL="0" marR="0" indent="0" algn="l" defTabSz="457200" rtl="0" fontAlgn="auto" latinLnBrk="0" hangingPunct="0">
+              <a:lnSpc>
+                <a:spcPct val="100000"/>
+              </a:lnSpc>
+              <a:spcBef>
+                <a:spcPts val="0"/>
+              </a:spcBef>
+              <a:spcAft>
+                <a:spcPts val="0"/>
+              </a:spcAft>
+              <a:buClrTx/>
+              <a:buSzTx/>
+              <a:buFontTx/>
+              <a:buNone/>
+            </a:pPr>
+            <a:endParaRPr kumimoji="0" lang="zh-CN" altLang="en-US" sz="1800" b="0" i="0" u="none" strike="noStrike" cap="none" spc="0" normalizeH="0" baseline="0">
+              <a:ln>
+                <a:noFill/>
+              </a:ln>
+              <a:solidFill>
+                <a:srgbClr val="000000"/>
+              </a:solidFill>
+              <a:effectLst/>
+              <a:uFillTx/>
+              <a:latin typeface="Arial" panose="020B0604020202020204"/>
+              <a:ea typeface="Arial" panose="020B0604020202020204"/>
+              <a:cs typeface="Arial" panose="020B0604020202020204"/>
+              <a:sym typeface="Arial" panose="020B0604020202020204"/>
+            </a:endParaRPr>
+          </a:p>
+        </p:txBody>
+      </p:sp>
+      <p:sp>
+        <p:nvSpPr>
+          <p:cNvPr id="21" name="文本框 20">
+            <a:extLst>
+              <a:ext uri="{FF2B5EF4-FFF2-40B4-BE49-F238E27FC236}">
+                <a16:creationId xmlns:a16="http://schemas.microsoft.com/office/drawing/2014/main" id="{85C35336-77B2-3B8E-5665-AE7ADD6EB1CE}"/>
+              </a:ext>
+            </a:extLst>
+          </p:cNvPr>
+          <p:cNvSpPr txBox="1"/>
+          <p:nvPr/>
+        </p:nvSpPr>
+        <p:spPr>
+          <a:xfrm>
+            <a:off x="4127500" y="3432944"/>
+            <a:ext cx="1587500" cy="406400"/>
+          </a:xfrm>
+          <a:prstGeom prst="rect">
+            <a:avLst/>
+          </a:prstGeom>
+          <a:solidFill>
+            <a:srgbClr val="000000">
+              <a:alpha val="0"/>
+            </a:srgbClr>
+          </a:solidFill>
+          <a:ln w="12700" cap="flat">
+            <a:noFill/>
+            <a:miter lim="400000"/>
+          </a:ln>
+        </p:spPr>
+        <p:style>
+          <a:lnRef idx="0">
+            <a:scrgbClr r="0" g="0" b="0"/>
+          </a:lnRef>
+          <a:fillRef idx="0">
+            <a:scrgbClr r="0" g="0" b="0"/>
+          </a:fillRef>
+          <a:effectRef idx="0">
+            <a:scrgbClr r="0" g="0" b="0"/>
+          </a:effectRef>
+          <a:fontRef idx="none"/>
+        </p:style>
+        <p:txBody>
+          <a:bodyPr rot="0" spcFirstLastPara="1" vertOverflow="overflow" horzOverflow="overflow" vert="horz" wrap="square" lIns="45719" tIns="45719" rIns="45719" bIns="45719" numCol="1" spcCol="38100" rtlCol="0" anchor="t">
+            <a:spAutoFit/>
+          </a:bodyPr>
+          <a:lstStyle/>
+          <a:p>
+            <a:pPr marL="0" marR="0" indent="0" algn="ctr" defTabSz="457200" rtl="0" fontAlgn="auto" latinLnBrk="0" hangingPunct="0">
+              <a:spcBef>
+                <a:spcPts val="0"/>
+              </a:spcBef>
+              <a:spcAft>
+                <a:spcPts val="0"/>
+              </a:spcAft>
+              <a:buClrTx/>
+              <a:buSzTx/>
+              <a:buFontTx/>
+              <a:buNone/>
+            </a:pPr>
+            <a:r>
+              <a:rPr kumimoji="0" lang="zh-CN" altLang="en-US" sz="2000" b="1" i="0" u="none" strike="noStrike" cap="none" spc="0" normalizeH="0" baseline="0">
+                <a:ln>
+                  <a:noFill/>
+                </a:ln>
+                <a:effectLst/>
+                <a:uFillTx/>
+                <a:latin typeface="Arial" panose="020B0604020202020204" pitchFamily="34" charset="0"/>
+                <a:ea typeface="微软雅黑" panose="020B0503020204020204" charset="-122"/>
+                <a:cs typeface="Arial" panose="020B0604020202020204"/>
+                <a:sym typeface="Arial" panose="020B0604020202020204"/>
+              </a:rPr>
+              <a:t>速干</a:t>
+            </a:r>
+          </a:p>
+        </p:txBody>
+      </p:sp>
+      <p:graphicFrame>
+        <p:nvGraphicFramePr>
+          <p:cNvPr id="22" name="图表 21">
+            <a:extLst>
+              <a:ext uri="{FF2B5EF4-FFF2-40B4-BE49-F238E27FC236}">
+                <a16:creationId xmlns:a16="http://schemas.microsoft.com/office/drawing/2014/main" id="{8E9D049E-628D-FDE6-EAFD-6928A06B4E82}"/>
+              </a:ext>
+            </a:extLst>
+          </p:cNvPr>
+          <p:cNvGraphicFramePr/>
+          <p:nvPr/>
+        </p:nvGraphicFramePr>
+        <p:xfrm>
+          <a:off x="5334000" y="3056384"/>
+          <a:ext cx="2413000" cy="1245096"/>
+        </p:xfrm>
+        <a:graphic>
+          <a:graphicData uri="http://schemas.openxmlformats.org/drawingml/2006/chart">
+            <c:chart xmlns:c="http://schemas.openxmlformats.org/drawingml/2006/chart" xmlns:r="http://schemas.openxmlformats.org/officeDocument/2006/relationships" r:id="rId6"/>
+          </a:graphicData>
+        </a:graphic>
+      </p:graphicFrame>
+      <p:sp>
+        <p:nvSpPr>
+          <p:cNvPr id="24" name="文本框 23">
+            <a:extLst>
+              <a:ext uri="{FF2B5EF4-FFF2-40B4-BE49-F238E27FC236}">
+                <a16:creationId xmlns:a16="http://schemas.microsoft.com/office/drawing/2014/main" id="{42DBCF6C-9C64-F130-823A-6B6435D59B9A}"/>
+              </a:ext>
+            </a:extLst>
+          </p:cNvPr>
+          <p:cNvSpPr txBox="1"/>
+          <p:nvPr/>
+        </p:nvSpPr>
+        <p:spPr>
+          <a:xfrm>
+            <a:off x="262961" y="4548820"/>
+            <a:ext cx="5617015" cy="1944000"/>
+          </a:xfrm>
+          <a:prstGeom prst="rect">
+            <a:avLst/>
+          </a:prstGeom>
+          <a:solidFill>
+            <a:scrgbClr r="0" g="0" b="0">
+              <a:alpha val="0"/>
+            </a:scrgbClr>
+          </a:solidFill>
+          <a:ln w="38100" cap="flat">
+            <a:solidFill>
+              <a:srgbClr val="E16776"/>
+            </a:solidFill>
+            <a:prstDash val="dash"/>
+            <a:miter lim="400000"/>
+          </a:ln>
+        </p:spPr>
+        <p:style>
+          <a:lnRef idx="0">
+            <a:scrgbClr r="0" g="0" b="0"/>
+          </a:lnRef>
+          <a:fillRef idx="0">
+            <a:scrgbClr r="0" g="0" b="0"/>
+          </a:fillRef>
+          <a:effectRef idx="0">
+            <a:scrgbClr r="0" g="0" b="0"/>
+          </a:effectRef>
+          <a:fontRef idx="none"/>
+        </p:style>
+        <p:txBody>
+          <a:bodyPr rot="0" spcFirstLastPara="1" vertOverflow="overflow" horzOverflow="overflow" vert="horz" wrap="square" lIns="45719" tIns="45719" rIns="45719" bIns="45719" numCol="1" spcCol="38100" rtlCol="0" anchor="t">
+            <a:spAutoFit/>
+          </a:bodyPr>
+          <a:lstStyle/>
+          <a:p>
+            <a:pPr marR="0" lvl="0" algn="ctr" defTabSz="457200" rtl="0" eaLnBrk="1" fontAlgn="auto" latinLnBrk="0" hangingPunct="0">
+              <a:lnSpc>
+                <a:spcPct val="150000"/>
+              </a:lnSpc>
+              <a:spcBef>
+                <a:spcPts val="0"/>
+              </a:spcBef>
+              <a:spcAft>
+                <a:spcPts val="0"/>
+              </a:spcAft>
+              <a:buClrTx/>
+              <a:buSzTx/>
+              <a:defRPr/>
+            </a:pPr>
+            <a:r>
+              <a:rPr lang="zh-CN" altLang="en-US" sz="1400" b="1" dirty="0">
+                <a:solidFill>
+                  <a:srgbClr val="C00000"/>
+                </a:solidFill>
+                <a:latin typeface="微软雅黑" panose="020B0503020204020204" charset="-122"/>
+                <a:ea typeface="微软雅黑" panose="020B0503020204020204" charset="-122"/>
+              </a:rPr>
+              <a:t>优点 </a:t>
+            </a:r>
+            <a:r>
+              <a:rPr lang="en-US" altLang="zh-CN" sz="1400" b="1" dirty="0">
+                <a:solidFill>
+                  <a:srgbClr val="C00000"/>
+                </a:solidFill>
+                <a:latin typeface="微软雅黑" panose="020B0503020204020204" charset="-122"/>
+                <a:ea typeface="微软雅黑" panose="020B0503020204020204" charset="-122"/>
+              </a:rPr>
+              <a:t>strengths</a:t>
+            </a:r>
+            <a:endParaRPr lang="en-US" altLang="zh-CN" sz="1400" dirty="0">
+              <a:solidFill>
+                <a:schemeClr val="tx1"/>
+              </a:solidFill>
+              <a:latin typeface="微软雅黑" panose="020B0503020204020204" charset="-122"/>
+              <a:ea typeface="微软雅黑" panose="020B0503020204020204" charset="-122"/>
+            </a:endParaRPr>
+          </a:p>
+        </p:txBody>
+      </p:sp>
+      <p:sp>
+        <p:nvSpPr>
+          <p:cNvPr id="25" name="文本框 24">
+            <a:extLst>
+              <a:ext uri="{FF2B5EF4-FFF2-40B4-BE49-F238E27FC236}">
+                <a16:creationId xmlns:a16="http://schemas.microsoft.com/office/drawing/2014/main" id="{925B7754-656B-D42A-C5F0-92B296F451E4}"/>
+              </a:ext>
+            </a:extLst>
+          </p:cNvPr>
+          <p:cNvSpPr txBox="1"/>
+          <p:nvPr/>
+        </p:nvSpPr>
+        <p:spPr>
+          <a:xfrm>
+            <a:off x="10555698" y="679061"/>
+            <a:ext cx="1589062" cy="1131077"/>
+          </a:xfrm>
+          <a:prstGeom prst="rect">
+            <a:avLst/>
+          </a:prstGeom>
+          <a:solidFill>
+            <a:srgbClr val="FFFF00">
+              <a:alpha val="0"/>
+            </a:srgbClr>
+          </a:solidFill>
+          <a:ln w="38100" cap="flat">
+            <a:noFill/>
+            <a:prstDash val="dash"/>
+            <a:miter lim="400000"/>
+          </a:ln>
+        </p:spPr>
+        <p:style>
+          <a:lnRef idx="0">
+            <a:scrgbClr r="0" g="0" b="0"/>
+          </a:lnRef>
+          <a:fillRef idx="0">
+            <a:scrgbClr r="0" g="0" b="0"/>
+          </a:fillRef>
+          <a:effectRef idx="0">
+            <a:scrgbClr r="0" g="0" b="0"/>
+          </a:effectRef>
+          <a:fontRef idx="none"/>
+        </p:style>
+        <p:txBody>
+          <a:bodyPr rot="0" spcFirstLastPara="1" vertOverflow="overflow" horzOverflow="overflow" vert="horz" wrap="square" lIns="45719" tIns="45719" rIns="45719" bIns="45719" numCol="1" spcCol="38100" rtlCol="0" anchor="t">
+            <a:spAutoFit/>
+          </a:bodyPr>
+          <a:lstStyle/>
+          <a:p>
+            <a:pPr marR="0" lvl="0" algn="ctr" defTabSz="457200" rtl="0" eaLnBrk="1" fontAlgn="auto" latinLnBrk="0" hangingPunct="0">
+              <a:lnSpc>
+                <a:spcPct val="150000"/>
+              </a:lnSpc>
+              <a:spcBef>
+                <a:spcPts val="0"/>
+              </a:spcBef>
+              <a:spcAft>
+                <a:spcPts val="0"/>
+              </a:spcAft>
+              <a:buClrTx/>
+              <a:buSzTx/>
+              <a:defRPr/>
+            </a:pPr>
+            <a:r>
+              <a:rPr lang="zh-CN" altLang="en-US" sz="900" b="1" dirty="0">
+                <a:solidFill>
+                  <a:schemeClr val="tx1"/>
+                </a:solidFill>
+                <a:latin typeface="微软雅黑" panose="020B0503020204020204" charset="-122"/>
+                <a:ea typeface="微软雅黑" panose="020B0503020204020204" charset="-122"/>
+              </a:rPr>
+              <a:t>受试者信息 </a:t>
+            </a:r>
+            <a:r>
+              <a:rPr lang="en-US" altLang="zh-CN" sz="900" b="1" dirty="0">
+                <a:solidFill>
+                  <a:schemeClr val="tx1"/>
+                </a:solidFill>
+                <a:latin typeface="微软雅黑" panose="020B0503020204020204" charset="-122"/>
+                <a:ea typeface="微软雅黑" panose="020B0503020204020204" charset="-122"/>
+              </a:rPr>
+              <a:t>Information</a:t>
+            </a:r>
+          </a:p>
+          <a:p>
+            <a:pPr marR="0" lvl="0" algn="ctr" defTabSz="457200" rtl="0" eaLnBrk="1" fontAlgn="auto" latinLnBrk="0" hangingPunct="0">
+              <a:lnSpc>
+                <a:spcPct val="150000"/>
+              </a:lnSpc>
+              <a:spcBef>
+                <a:spcPts val="0"/>
+              </a:spcBef>
+              <a:spcAft>
+                <a:spcPts val="0"/>
+              </a:spcAft>
+              <a:buClrTx/>
+              <a:buSzTx/>
+              <a:defRPr/>
+            </a:pPr>
+            <a:r>
+              <a:rPr lang="en-US" altLang="zh-CN" sz="900" dirty="0">
+                <a:solidFill>
+                  <a:schemeClr val="tx1"/>
+                </a:solidFill>
+                <a:latin typeface="微软雅黑" panose="020B0503020204020204" charset="-122"/>
+                <a:ea typeface="微软雅黑" panose="020B0503020204020204" charset="-122"/>
+              </a:rPr>
+              <a:t>A: 160CM / 50 KG</a:t>
+            </a:r>
+          </a:p>
+          <a:p>
+            <a:pPr marR="0" lvl="0" algn="ctr" defTabSz="457200" rtl="0" eaLnBrk="1" fontAlgn="auto" latinLnBrk="0" hangingPunct="0">
+              <a:lnSpc>
+                <a:spcPct val="150000"/>
+              </a:lnSpc>
+              <a:spcBef>
+                <a:spcPts val="0"/>
+              </a:spcBef>
+              <a:spcAft>
+                <a:spcPts val="0"/>
+              </a:spcAft>
+              <a:buClrTx/>
+              <a:buSzTx/>
+              <a:defRPr/>
+            </a:pPr>
+            <a:r>
+              <a:rPr lang="en-US" altLang="zh-CN" sz="900" dirty="0">
+                <a:solidFill>
+                  <a:schemeClr val="tx1"/>
+                </a:solidFill>
+                <a:latin typeface="微软雅黑" panose="020B0503020204020204" charset="-122"/>
+                <a:ea typeface="微软雅黑" panose="020B0503020204020204" charset="-122"/>
+              </a:rPr>
+              <a:t>B: 165CM / 52 KG</a:t>
+            </a:r>
+          </a:p>
+          <a:p>
+            <a:pPr marR="0" lvl="0" algn="ctr" defTabSz="457200" rtl="0" eaLnBrk="1" fontAlgn="auto" latinLnBrk="0" hangingPunct="0">
+              <a:lnSpc>
+                <a:spcPct val="150000"/>
+              </a:lnSpc>
+              <a:spcBef>
+                <a:spcPts val="0"/>
+              </a:spcBef>
+              <a:spcAft>
+                <a:spcPts val="0"/>
+              </a:spcAft>
+              <a:buClrTx/>
+              <a:buSzTx/>
+              <a:defRPr/>
+            </a:pPr>
+            <a:r>
+              <a:rPr lang="en-US" altLang="zh-CN" sz="900" dirty="0">
+                <a:solidFill>
+                  <a:schemeClr val="tx1"/>
+                </a:solidFill>
+                <a:latin typeface="微软雅黑" panose="020B0503020204020204" charset="-122"/>
+                <a:ea typeface="微软雅黑" panose="020B0503020204020204" charset="-122"/>
+              </a:rPr>
+              <a:t>C: 162CM / 58 KG</a:t>
+            </a:r>
+          </a:p>
+          <a:p>
+            <a:pPr marR="0" lvl="0" algn="ctr" defTabSz="457200" rtl="0" eaLnBrk="1" fontAlgn="auto" latinLnBrk="0" hangingPunct="0">
+              <a:lnSpc>
+                <a:spcPct val="150000"/>
+              </a:lnSpc>
+              <a:spcBef>
+                <a:spcPts val="0"/>
+              </a:spcBef>
+              <a:spcAft>
+                <a:spcPts val="0"/>
+              </a:spcAft>
+              <a:buClrTx/>
+              <a:buSzTx/>
+              <a:defRPr/>
+            </a:pPr>
+            <a:r>
+              <a:rPr lang="en-US" altLang="zh-CN" sz="900" dirty="0">
+                <a:solidFill>
+                  <a:schemeClr val="tx1"/>
+                </a:solidFill>
+                <a:latin typeface="微软雅黑" panose="020B0503020204020204" charset="-122"/>
+                <a:ea typeface="微软雅黑" panose="020B0503020204020204" charset="-122"/>
+              </a:rPr>
+              <a:t>D: 168CM</a:t>
+            </a:r>
+            <a:r>
+              <a:rPr lang="zh-CN" altLang="en-US" sz="900" dirty="0">
+                <a:solidFill>
+                  <a:schemeClr val="tx1"/>
+                </a:solidFill>
+                <a:latin typeface="微软雅黑" panose="020B0503020204020204" charset="-122"/>
+                <a:ea typeface="微软雅黑" panose="020B0503020204020204" charset="-122"/>
+              </a:rPr>
+              <a:t> </a:t>
+            </a:r>
+            <a:r>
+              <a:rPr lang="en-US" altLang="zh-CN" sz="900" dirty="0">
+                <a:solidFill>
+                  <a:schemeClr val="tx1"/>
+                </a:solidFill>
+                <a:latin typeface="微软雅黑" panose="020B0503020204020204" charset="-122"/>
+                <a:ea typeface="微软雅黑" panose="020B0503020204020204" charset="-122"/>
+              </a:rPr>
+              <a:t>/</a:t>
+            </a:r>
+            <a:r>
+              <a:rPr lang="zh-CN" altLang="en-US" sz="900" dirty="0">
+                <a:solidFill>
+                  <a:schemeClr val="tx1"/>
+                </a:solidFill>
+                <a:latin typeface="微软雅黑" panose="020B0503020204020204" charset="-122"/>
+                <a:ea typeface="微软雅黑" panose="020B0503020204020204" charset="-122"/>
+              </a:rPr>
+              <a:t> </a:t>
+            </a:r>
+            <a:r>
+              <a:rPr lang="en-US" altLang="zh-CN" sz="900" dirty="0">
+                <a:solidFill>
+                  <a:schemeClr val="tx1"/>
+                </a:solidFill>
+                <a:latin typeface="微软雅黑" panose="020B0503020204020204" charset="-122"/>
+                <a:ea typeface="微软雅黑" panose="020B0503020204020204" charset="-122"/>
+              </a:rPr>
+              <a:t>60</a:t>
+            </a:r>
+            <a:r>
+              <a:rPr lang="zh-CN" altLang="en-US" sz="900" dirty="0">
+                <a:solidFill>
+                  <a:schemeClr val="tx1"/>
+                </a:solidFill>
+                <a:latin typeface="微软雅黑" panose="020B0503020204020204" charset="-122"/>
+                <a:ea typeface="微软雅黑" panose="020B0503020204020204" charset="-122"/>
+              </a:rPr>
+              <a:t> </a:t>
+            </a:r>
+            <a:r>
+              <a:rPr lang="en-US" altLang="zh-CN" sz="900" dirty="0">
+                <a:solidFill>
+                  <a:schemeClr val="tx1"/>
+                </a:solidFill>
+                <a:latin typeface="微软雅黑" panose="020B0503020204020204" charset="-122"/>
+                <a:ea typeface="微软雅黑" panose="020B0503020204020204" charset="-122"/>
+              </a:rPr>
+              <a:t>KG</a:t>
+            </a:r>
+          </a:p>
+        </p:txBody>
+      </p:sp>
+      <p:sp>
+        <p:nvSpPr>
+          <p:cNvPr id="27" name="文本框 26">
+            <a:extLst>
+              <a:ext uri="{FF2B5EF4-FFF2-40B4-BE49-F238E27FC236}">
+                <a16:creationId xmlns:a16="http://schemas.microsoft.com/office/drawing/2014/main" id="{F85E0F9A-AFD2-3085-1BB5-51F6352B0CDE}"/>
+              </a:ext>
+            </a:extLst>
+          </p:cNvPr>
+          <p:cNvSpPr txBox="1"/>
+          <p:nvPr/>
+        </p:nvSpPr>
+        <p:spPr>
+          <a:xfrm>
+            <a:off x="6096000" y="4548820"/>
+            <a:ext cx="4428601" cy="1944000"/>
+          </a:xfrm>
+          <a:prstGeom prst="rect">
+            <a:avLst/>
+          </a:prstGeom>
+          <a:solidFill>
+            <a:scrgbClr r="0" g="0" b="0">
+              <a:alpha val="0"/>
+            </a:scrgbClr>
+          </a:solidFill>
+          <a:ln w="38100" cap="flat">
+            <a:solidFill>
+              <a:srgbClr val="C3E0FF"/>
+            </a:solidFill>
+            <a:prstDash val="dash"/>
+            <a:miter lim="400000"/>
+          </a:ln>
+        </p:spPr>
+        <p:style>
+          <a:lnRef idx="0">
+            <a:scrgbClr r="0" g="0" b="0"/>
+          </a:lnRef>
+          <a:fillRef idx="0">
+            <a:scrgbClr r="0" g="0" b="0"/>
+          </a:fillRef>
+          <a:effectRef idx="0">
+            <a:scrgbClr r="0" g="0" b="0"/>
+          </a:effectRef>
+          <a:fontRef idx="none"/>
+        </p:style>
+        <p:txBody>
+          <a:bodyPr rot="0" spcFirstLastPara="1" vertOverflow="overflow" horzOverflow="overflow" vert="horz" wrap="square" lIns="45719" tIns="45719" rIns="45719" bIns="45719" numCol="1" spcCol="38100" rtlCol="0" anchor="t">
+            <a:spAutoFit/>
+          </a:bodyPr>
+          <a:lstStyle>
+            <a:defPPr marL="0" marR="0" indent="0" algn="l" defTabSz="914400" rtl="0" fontAlgn="auto" latinLnBrk="1" hangingPunct="0">
+              <a:lnSpc>
+                <a:spcPct val="100000"/>
+              </a:lnSpc>
+              <a:spcBef>
+                <a:spcPts val="0"/>
+              </a:spcBef>
+              <a:spcAft>
+                <a:spcPts val="0"/>
+              </a:spcAft>
+              <a:buClrTx/>
+              <a:buSzTx/>
+              <a:buFontTx/>
+              <a:buNone/>
+              <a:defRPr kumimoji="0" sz="1800" b="0" i="0" u="none" strike="noStrike" cap="none" spc="0" normalizeH="0" baseline="0">
+                <a:ln>
+                  <a:noFill/>
+                </a:ln>
+                <a:solidFill>
+                  <a:srgbClr val="000000"/>
+                </a:solidFill>
+                <a:effectLst/>
+                <a:uFillTx/>
+              </a:defRPr>
+            </a:defPPr>
+            <a:lvl1pPr lvl="0" algn="ctr" eaLnBrk="1">
+              <a:lnSpc>
+                <a:spcPct val="150000"/>
+              </a:lnSpc>
+              <a:defRPr sz="1600" b="1">
+                <a:solidFill>
+                  <a:schemeClr val="tx1"/>
+                </a:solidFill>
+                <a:latin typeface="微软雅黑" panose="020B0503020204020204" charset="-122"/>
+                <a:ea typeface="微软雅黑" panose="020B0503020204020204" charset="-122"/>
+              </a:defRPr>
+            </a:lvl1pPr>
+          </a:lstStyle>
+          <a:p>
+            <a:r>
+              <a:rPr lang="zh-CN" altLang="en-US" sz="1400" dirty="0">
+                <a:solidFill>
+                  <a:srgbClr val="0070C0"/>
+                </a:solidFill>
+              </a:rPr>
+              <a:t>缺点 </a:t>
+            </a:r>
+            <a:r>
+              <a:rPr lang="en-US" altLang="zh-CN" sz="1400" dirty="0">
+                <a:solidFill>
+                  <a:srgbClr val="0070C0"/>
+                </a:solidFill>
+              </a:rPr>
+              <a:t>drawbacks</a:t>
+            </a:r>
+            <a:endParaRPr lang="en-US" altLang="zh-CN" sz="1400" b="0" dirty="0"/>
+          </a:p>
+        </p:txBody>
+      </p:sp>
+      <p:sp>
+        <p:nvSpPr>
+          <p:cNvPr id="33" name="文本框 32">
+            <a:extLst>
+              <a:ext uri="{FF2B5EF4-FFF2-40B4-BE49-F238E27FC236}">
+                <a16:creationId xmlns:a16="http://schemas.microsoft.com/office/drawing/2014/main" id="{BDFD7929-5E38-55C2-592D-D1ACE541AAE5}"/>
+              </a:ext>
+            </a:extLst>
+          </p:cNvPr>
+          <p:cNvSpPr txBox="1"/>
+          <p:nvPr/>
+        </p:nvSpPr>
+        <p:spPr>
+          <a:xfrm>
+            <a:off x="262961" y="113947"/>
+            <a:ext cx="7345207" cy="369332"/>
+          </a:xfrm>
+          <a:prstGeom prst="rect">
+            <a:avLst/>
+          </a:prstGeom>
+          <a:solidFill>
+            <a:schemeClr val="dk1"/>
+          </a:solidFill>
+          <a:ln>
+            <a:noFill/>
+          </a:ln>
+        </p:spPr>
+        <p:style>
+          <a:lnRef idx="0">
+            <a:scrgbClr r="0" g="0" b="0"/>
+          </a:lnRef>
+          <a:fillRef idx="0">
+            <a:scrgbClr r="0" g="0" b="0"/>
+          </a:fillRef>
+          <a:effectRef idx="0">
+            <a:scrgbClr r="0" g="0" b="0"/>
+          </a:effectRef>
+          <a:fontRef idx="minor">
+            <a:schemeClr val="lt1"/>
+          </a:fontRef>
+        </p:style>
+        <p:txBody>
+          <a:bodyPr wrap="square" rtlCol="0" anchor="t">
+            <a:spAutoFit/>
+          </a:bodyPr>
+          <a:lstStyle/>
+          <a:p>
+            <a:pPr marL="342900" indent="-342900">
+              <a:buFont typeface="Wingdings" panose="05000000000000000000" pitchFamily="2" charset="2"/>
+              <a:buChar char="Ø"/>
+            </a:pPr>
+            <a:r>
+              <a:rPr lang="zh-CN" altLang="en-US" b="1" dirty="0">
+                <a:solidFill>
+                  <a:schemeClr val="bg1"/>
+                </a:solidFill>
+                <a:latin typeface="微软雅黑" panose="020B0503020204020204" charset="-122"/>
+                <a:ea typeface="微软雅黑" panose="020B0503020204020204" charset="-122"/>
+                <a:sym typeface="+mn-ea"/>
+              </a:rPr>
+              <a:t>试穿反馈</a:t>
+            </a:r>
+            <a:r>
+              <a:rPr lang="en-US" altLang="zh-CN" sz="1400" b="1" dirty="0">
+                <a:solidFill>
+                  <a:srgbClr val="FFC000"/>
+                </a:solidFill>
+                <a:latin typeface="微软雅黑" panose="020B0503020204020204" charset="-122"/>
+                <a:ea typeface="微软雅黑" panose="020B0503020204020204" charset="-122"/>
+                <a:sym typeface="+mn-ea"/>
+              </a:rPr>
+              <a:t>【</a:t>
+            </a:r>
+            <a:r>
+              <a:rPr lang="en-US" altLang="zh-CN" sz="1400" b="1" dirty="0"/>
+              <a:t> </a:t>
+            </a:r>
+            <a:r>
+              <a:rPr lang="en-US" altLang="zh-CN" sz="1400" b="1" dirty="0">
+                <a:solidFill>
+                  <a:srgbClr val="FFC000"/>
+                </a:solidFill>
+                <a:latin typeface="微软雅黑" panose="020B0503020204020204" charset="-122"/>
+                <a:ea typeface="微软雅黑" panose="020B0503020204020204" charset="-122"/>
+              </a:rPr>
+              <a:t>Athletes’ Feedback】</a:t>
+            </a:r>
+            <a:endParaRPr lang="zh-CN" altLang="en-US" sz="1200" b="1" dirty="0">
+              <a:solidFill>
+                <a:srgbClr val="FFC000"/>
+              </a:solidFill>
+              <a:latin typeface="微软雅黑" panose="020B0503020204020204" charset="-122"/>
+              <a:ea typeface="微软雅黑" panose="020B0503020204020204" charset="-122"/>
+              <a:sym typeface="+mn-ea"/>
+            </a:endParaRPr>
+          </a:p>
+        </p:txBody>
+      </p:sp>
+      <p:sp>
+        <p:nvSpPr>
+          <p:cNvPr id="9" name="文本框 8">
+            <a:extLst>
+              <a:ext uri="{FF2B5EF4-FFF2-40B4-BE49-F238E27FC236}">
+                <a16:creationId xmlns:a16="http://schemas.microsoft.com/office/drawing/2014/main" id="{397C0EDA-4182-5B15-ED80-A9EECA341CB2}"/>
+              </a:ext>
+            </a:extLst>
+          </p:cNvPr>
+          <p:cNvSpPr txBox="1"/>
+          <p:nvPr/>
+        </p:nvSpPr>
+        <p:spPr>
+          <a:xfrm>
+            <a:off x="365479" y="4938944"/>
+            <a:ext cx="5411978" cy="1346907"/>
+          </a:xfrm>
+          <a:prstGeom prst="rect">
+            <a:avLst/>
+          </a:prstGeom>
+          <a:noFill/>
+          <a:ln w="12700" cap="flat">
+            <a:noFill/>
+            <a:miter lim="400000"/>
+          </a:ln>
+          <a:effectLst/>
+        </p:spPr>
+        <p:style>
+          <a:lnRef idx="0">
+            <a:scrgbClr r="0" g="0" b="0"/>
+          </a:lnRef>
+          <a:fillRef idx="0">
+            <a:scrgbClr r="0" g="0" b="0"/>
+          </a:fillRef>
+          <a:effectRef idx="0">
+            <a:scrgbClr r="0" g="0" b="0"/>
+          </a:effectRef>
+          <a:fontRef idx="none"/>
+        </p:style>
+        <p:txBody>
+          <a:bodyPr wrap="square">
+            <a:spAutoFit/>
+          </a:bodyPr>
+          <a:lstStyle/>
+          <a:p>
+            <a:pPr marL="342900" indent="-342900">
+              <a:lnSpc>
+                <a:spcPct val="150000"/>
+              </a:lnSpc>
+              <a:buFont typeface="+mj-lt"/>
+              <a:buAutoNum type="arabicPeriod"/>
+              <a:defRPr/>
+            </a:pPr>
+            <a:r>
+              <a:rPr lang="zh-CN" altLang="en-US" sz="1400" dirty="0">
+                <a:solidFill>
+                  <a:schemeClr val="tx1"/>
+                </a:solidFill>
+                <a:latin typeface="微软雅黑" panose="020B0503020204020204" charset="-122"/>
+                <a:ea typeface="微软雅黑" panose="020B0503020204020204" charset="-122"/>
+              </a:rPr>
+              <a:t>轻薄透气，舒适不闷热（</a:t>
+            </a:r>
+            <a:r>
+              <a:rPr lang="en-US" altLang="zh-CN" sz="1400" dirty="0">
+                <a:solidFill>
+                  <a:schemeClr val="tx1"/>
+                </a:solidFill>
+                <a:latin typeface="微软雅黑" panose="020B0503020204020204" charset="-122"/>
+                <a:ea typeface="微软雅黑" panose="020B0503020204020204" charset="-122"/>
+              </a:rPr>
+              <a:t>4/4</a:t>
+            </a:r>
+            <a:r>
+              <a:rPr lang="zh-CN" altLang="en-US" sz="1400" dirty="0">
+                <a:solidFill>
+                  <a:schemeClr val="tx1"/>
+                </a:solidFill>
+                <a:latin typeface="微软雅黑" panose="020B0503020204020204" charset="-122"/>
+                <a:ea typeface="微软雅黑" panose="020B0503020204020204" charset="-122"/>
+              </a:rPr>
+              <a:t>）</a:t>
+            </a:r>
+            <a:endParaRPr lang="en-US" altLang="zh-CN" sz="1400" dirty="0">
+              <a:solidFill>
+                <a:schemeClr val="tx1"/>
+              </a:solidFill>
+              <a:latin typeface="微软雅黑" panose="020B0503020204020204" charset="-122"/>
+              <a:ea typeface="微软雅黑" panose="020B0503020204020204" charset="-122"/>
+            </a:endParaRPr>
+          </a:p>
+          <a:p>
+            <a:pPr marL="342900" indent="-342900">
+              <a:lnSpc>
+                <a:spcPct val="150000"/>
+              </a:lnSpc>
+              <a:buFont typeface="+mj-lt"/>
+              <a:buAutoNum type="arabicPeriod"/>
+              <a:defRPr/>
+            </a:pPr>
+            <a:r>
+              <a:rPr lang="zh-CN" altLang="en-US" sz="1400" dirty="0">
+                <a:solidFill>
+                  <a:schemeClr val="tx1"/>
+                </a:solidFill>
+                <a:latin typeface="微软雅黑" panose="020B0503020204020204" charset="-122"/>
+                <a:ea typeface="微软雅黑" panose="020B0503020204020204" charset="-122"/>
+              </a:rPr>
+              <a:t>吸湿排汗性能好，汗湿后衣服不会黏在身上（</a:t>
+            </a:r>
+            <a:r>
+              <a:rPr lang="en-US" altLang="zh-CN" sz="1400" dirty="0">
+                <a:solidFill>
+                  <a:schemeClr val="tx1"/>
+                </a:solidFill>
+                <a:latin typeface="微软雅黑" panose="020B0503020204020204" charset="-122"/>
+                <a:ea typeface="微软雅黑" panose="020B0503020204020204" charset="-122"/>
+              </a:rPr>
+              <a:t>4/4</a:t>
+            </a:r>
+            <a:r>
+              <a:rPr lang="zh-CN" altLang="en-US" sz="1400" dirty="0">
+                <a:solidFill>
+                  <a:schemeClr val="tx1"/>
+                </a:solidFill>
+                <a:latin typeface="微软雅黑" panose="020B0503020204020204" charset="-122"/>
+                <a:ea typeface="微软雅黑" panose="020B0503020204020204" charset="-122"/>
+              </a:rPr>
+              <a:t>）；</a:t>
+            </a:r>
+            <a:endParaRPr lang="en-US" altLang="zh-CN" sz="1400" dirty="0">
+              <a:solidFill>
+                <a:schemeClr val="tx1"/>
+              </a:solidFill>
+              <a:latin typeface="微软雅黑" panose="020B0503020204020204" charset="-122"/>
+              <a:ea typeface="微软雅黑" panose="020B0503020204020204" charset="-122"/>
+            </a:endParaRPr>
+          </a:p>
+          <a:p>
+            <a:pPr marL="342900" indent="-342900">
+              <a:lnSpc>
+                <a:spcPct val="150000"/>
+              </a:lnSpc>
+              <a:buFont typeface="+mj-lt"/>
+              <a:buAutoNum type="arabicPeriod"/>
+              <a:defRPr/>
+            </a:pPr>
+            <a:r>
+              <a:rPr lang="zh-CN" altLang="en-US" sz="1400" dirty="0">
+                <a:solidFill>
+                  <a:schemeClr val="tx1"/>
+                </a:solidFill>
+                <a:latin typeface="微软雅黑" panose="020B0503020204020204" charset="-122"/>
+                <a:ea typeface="微软雅黑" panose="020B0503020204020204" charset="-122"/>
+              </a:rPr>
+              <a:t>速干性能极好（</a:t>
+            </a:r>
+            <a:r>
+              <a:rPr lang="en-US" altLang="zh-CN" sz="1400" dirty="0">
+                <a:solidFill>
+                  <a:schemeClr val="tx1"/>
+                </a:solidFill>
+                <a:latin typeface="微软雅黑" panose="020B0503020204020204" charset="-122"/>
+                <a:ea typeface="微软雅黑" panose="020B0503020204020204" charset="-122"/>
+              </a:rPr>
+              <a:t>4/4</a:t>
+            </a:r>
+            <a:r>
+              <a:rPr lang="zh-CN" altLang="en-US" sz="1400" dirty="0">
+                <a:solidFill>
+                  <a:schemeClr val="tx1"/>
+                </a:solidFill>
+                <a:latin typeface="微软雅黑" panose="020B0503020204020204" charset="-122"/>
+                <a:ea typeface="微软雅黑" panose="020B0503020204020204" charset="-122"/>
+              </a:rPr>
+              <a:t>）大部分时间都很干爽（</a:t>
+            </a:r>
+            <a:r>
+              <a:rPr lang="en-US" altLang="zh-CN" sz="1400" dirty="0">
+                <a:solidFill>
+                  <a:schemeClr val="tx1"/>
+                </a:solidFill>
+                <a:latin typeface="微软雅黑" panose="020B0503020204020204" charset="-122"/>
+                <a:ea typeface="微软雅黑" panose="020B0503020204020204" charset="-122"/>
+              </a:rPr>
+              <a:t>1/4</a:t>
+            </a:r>
+            <a:r>
+              <a:rPr lang="zh-CN" altLang="en-US" sz="1400" dirty="0">
+                <a:solidFill>
+                  <a:schemeClr val="tx1"/>
+                </a:solidFill>
+                <a:latin typeface="微软雅黑" panose="020B0503020204020204" charset="-122"/>
+                <a:ea typeface="微软雅黑" panose="020B0503020204020204" charset="-122"/>
+              </a:rPr>
+              <a:t>）几乎感受不到身上有汗（</a:t>
+            </a:r>
+            <a:r>
+              <a:rPr lang="en-US" altLang="zh-CN" sz="1400" dirty="0">
+                <a:solidFill>
+                  <a:schemeClr val="tx1"/>
+                </a:solidFill>
+                <a:latin typeface="微软雅黑" panose="020B0503020204020204" charset="-122"/>
+                <a:ea typeface="微软雅黑" panose="020B0503020204020204" charset="-122"/>
+              </a:rPr>
+              <a:t>1/4</a:t>
+            </a:r>
+            <a:r>
+              <a:rPr lang="zh-CN" altLang="en-US" sz="1400" dirty="0">
+                <a:solidFill>
+                  <a:schemeClr val="tx1"/>
+                </a:solidFill>
+                <a:latin typeface="微软雅黑" panose="020B0503020204020204" charset="-122"/>
+                <a:ea typeface="微软雅黑" panose="020B0503020204020204" charset="-122"/>
+              </a:rPr>
+              <a:t>）；</a:t>
+            </a:r>
+            <a:endParaRPr lang="en-US" altLang="zh-CN" sz="1400" dirty="0">
+              <a:solidFill>
+                <a:schemeClr val="tx1"/>
+              </a:solidFill>
+              <a:latin typeface="微软雅黑" panose="020B0503020204020204" charset="-122"/>
+              <a:ea typeface="微软雅黑" panose="020B0503020204020204" charset="-122"/>
+            </a:endParaRPr>
+          </a:p>
+        </p:txBody>
+      </p:sp>
+      <p:sp>
+        <p:nvSpPr>
+          <p:cNvPr id="23" name="文本框 22">
+            <a:extLst>
+              <a:ext uri="{FF2B5EF4-FFF2-40B4-BE49-F238E27FC236}">
+                <a16:creationId xmlns:a16="http://schemas.microsoft.com/office/drawing/2014/main" id="{AE909F5C-B7F6-DF9C-ACA8-07D662B4C0D4}"/>
+              </a:ext>
+            </a:extLst>
+          </p:cNvPr>
+          <p:cNvSpPr txBox="1"/>
+          <p:nvPr/>
+        </p:nvSpPr>
+        <p:spPr>
+          <a:xfrm>
+            <a:off x="6118860" y="4938944"/>
+            <a:ext cx="4296849" cy="1346907"/>
+          </a:xfrm>
+          <a:prstGeom prst="rect">
+            <a:avLst/>
+          </a:prstGeom>
+          <a:noFill/>
+          <a:ln w="12700" cap="flat">
+            <a:noFill/>
+            <a:miter lim="400000"/>
+          </a:ln>
+          <a:effectLst/>
+        </p:spPr>
+        <p:style>
+          <a:lnRef idx="0">
+            <a:scrgbClr r="0" g="0" b="0"/>
+          </a:lnRef>
+          <a:fillRef idx="0">
+            <a:scrgbClr r="0" g="0" b="0"/>
+          </a:fillRef>
+          <a:effectRef idx="0">
+            <a:scrgbClr r="0" g="0" b="0"/>
+          </a:effectRef>
+          <a:fontRef idx="none"/>
+        </p:style>
+        <p:txBody>
+          <a:bodyPr wrap="square">
+            <a:spAutoFit/>
+          </a:bodyPr>
+          <a:lstStyle>
+            <a:defPPr marL="0" marR="0" indent="0" algn="l" defTabSz="914400" rtl="0" fontAlgn="auto" latinLnBrk="1" hangingPunct="0">
+              <a:lnSpc>
+                <a:spcPct val="100000"/>
+              </a:lnSpc>
+              <a:spcBef>
+                <a:spcPts val="0"/>
+              </a:spcBef>
+              <a:spcAft>
+                <a:spcPts val="0"/>
+              </a:spcAft>
+              <a:buClrTx/>
+              <a:buSzTx/>
+              <a:buFontTx/>
+              <a:buNone/>
+              <a:defRPr kumimoji="0" sz="1800" b="0" i="0" u="none" strike="noStrike" cap="none" spc="0" normalizeH="0" baseline="0">
+                <a:ln>
+                  <a:noFill/>
+                </a:ln>
+                <a:solidFill>
+                  <a:srgbClr val="000000"/>
+                </a:solidFill>
+                <a:effectLst/>
+                <a:uFillTx/>
+              </a:defRPr>
+            </a:defPPr>
+            <a:lvl1pPr marL="342900" indent="-342900">
+              <a:lnSpc>
+                <a:spcPct val="150000"/>
+              </a:lnSpc>
+              <a:buFont typeface="+mj-lt"/>
+              <a:buAutoNum type="arabicPeriod"/>
+              <a:defRPr sz="1400">
+                <a:solidFill>
+                  <a:schemeClr val="tx1"/>
+                </a:solidFill>
+                <a:latin typeface="微软雅黑" panose="020B0503020204020204" charset="-122"/>
+                <a:ea typeface="微软雅黑" panose="020B0503020204020204" charset="-122"/>
+              </a:defRPr>
+            </a:lvl1pPr>
+          </a:lstStyle>
+          <a:p>
+            <a:r>
+              <a:rPr lang="zh-CN" altLang="en-US" dirty="0"/>
+              <a:t>肩部挖空偏小，会勒腋下，影响摆臂（</a:t>
+            </a:r>
+            <a:r>
+              <a:rPr lang="en-US" altLang="zh-CN" dirty="0"/>
+              <a:t>2/4</a:t>
+            </a:r>
+            <a:r>
+              <a:rPr lang="zh-CN" altLang="en-US" dirty="0"/>
+              <a:t>）；</a:t>
+            </a:r>
+            <a:endParaRPr lang="en-US" altLang="zh-CN" dirty="0"/>
+          </a:p>
+          <a:p>
+            <a:r>
+              <a:rPr lang="zh-CN" altLang="en-US" dirty="0"/>
+              <a:t>后背开叉偏高，跑动过程后背会漏出小三角，晒太阳会痛，风大了会受凉，开车可向下调整四指宽（约</a:t>
+            </a:r>
+            <a:r>
+              <a:rPr lang="en-US" altLang="zh-CN" dirty="0"/>
+              <a:t>5cm</a:t>
+            </a:r>
+            <a:r>
+              <a:rPr lang="zh-CN" altLang="en-US" dirty="0"/>
+              <a:t>）（</a:t>
+            </a:r>
+            <a:r>
+              <a:rPr lang="en-US" altLang="zh-CN" dirty="0"/>
+              <a:t>1/4</a:t>
+            </a:r>
+            <a:r>
+              <a:rPr lang="zh-CN" altLang="en-US" dirty="0"/>
+              <a:t>）；</a:t>
+            </a:r>
+            <a:endParaRPr lang="en-US" altLang="zh-CN" dirty="0"/>
+          </a:p>
+        </p:txBody>
+      </p:sp>
+      <p:sp>
+        <p:nvSpPr>
+          <p:cNvPr id="26" name="矩形 25">
+            <a:extLst>
+              <a:ext uri="{FF2B5EF4-FFF2-40B4-BE49-F238E27FC236}">
+                <a16:creationId xmlns:a16="http://schemas.microsoft.com/office/drawing/2014/main" id="{CEAB2860-D225-9537-F3A1-F49F44A3708A}"/>
+              </a:ext>
+            </a:extLst>
+          </p:cNvPr>
+          <p:cNvSpPr/>
+          <p:nvPr/>
+        </p:nvSpPr>
+        <p:spPr>
+          <a:xfrm>
+            <a:off x="4367808" y="154659"/>
+            <a:ext cx="3384376" cy="307777"/>
+          </a:xfrm>
+          <a:prstGeom prst="rect">
+            <a:avLst/>
+          </a:prstGeom>
+        </p:spPr>
+        <p:txBody>
+          <a:bodyPr wrap="square">
+            <a:spAutoFit/>
+          </a:bodyPr>
+          <a:lstStyle/>
+          <a:p>
+            <a:pPr>
+              <a:spcBef>
+                <a:spcPts val="1100"/>
+              </a:spcBef>
+              <a:defRPr sz="4800">
+                <a:solidFill>
+                  <a:srgbClr val="FFFFFF"/>
+                </a:solidFill>
+                <a:latin typeface="FZHei-B01S"/>
+                <a:ea typeface="FZHei-B01S"/>
+                <a:cs typeface="FZHei-B01S"/>
+                <a:sym typeface="FZHei-B01S"/>
+              </a:defRPr>
+            </a:pPr>
+            <a:r>
+              <a:rPr lang="en-US" altLang="zh-CN" sz="1400" b="1" dirty="0">
+                <a:solidFill>
+                  <a:schemeClr val="bg1"/>
+                </a:solidFill>
+                <a:latin typeface="微软雅黑" panose="020B0503020204020204" charset="-122"/>
+                <a:ea typeface="微软雅黑" panose="020B0503020204020204" charset="-122"/>
+              </a:rPr>
+              <a:t>I  &lt;</a:t>
+            </a:r>
+            <a:r>
+              <a:rPr lang="zh-CN" altLang="en-US" sz="1400" b="1" dirty="0">
+                <a:solidFill>
+                  <a:schemeClr val="bg1"/>
+                </a:solidFill>
+                <a:latin typeface="微软雅黑" panose="020B0503020204020204" charset="-122"/>
+                <a:ea typeface="微软雅黑" panose="020B0503020204020204" charset="-122"/>
+              </a:rPr>
+              <a:t>面料信息</a:t>
+            </a:r>
+            <a:r>
+              <a:rPr lang="en-US" altLang="zh-CN" sz="1400" b="1" dirty="0">
+                <a:solidFill>
+                  <a:schemeClr val="bg1"/>
+                </a:solidFill>
+                <a:latin typeface="微软雅黑" panose="020B0503020204020204" charset="-122"/>
+                <a:ea typeface="微软雅黑" panose="020B0503020204020204" charset="-122"/>
+              </a:rPr>
+              <a:t>&gt;</a:t>
+            </a:r>
+          </a:p>
+        </p:txBody>
+      </p:sp>
+    </p:spTree>
+    <p:extLst>
+      <p:ext uri="{BB962C8B-B14F-4D97-AF65-F5344CB8AC3E}">
+        <p14:creationId xmlns:p14="http://schemas.microsoft.com/office/powerpoint/2010/main" val="170524510"/>
       </p:ext>
     </p:extLst>
   </p:cSld>
